--- a/pitch-deck/CursorHackathon-Pitch.pptx
+++ b/pitch-deck/CursorHackathon-Pitch.pptx
@@ -3109,7 +3109,7 @@
             <a:avLst/>
           </a:prstGeom>
           <a:solidFill>
-            <a:srgbClr val="0A0F1C"/>
+            <a:srgbClr val="060812"/>
           </a:solidFill>
           <a:ln>
             <a:noFill/>
@@ -3144,15 +3144,15 @@
           <p:nvPr/>
         </p:nvSpPr>
         <p:spPr>
-          <a:xfrm>
-            <a:off x="0" y="0"/>
-            <a:ext cx="12191695" cy="109728"/>
+          <a:xfrm rot="660000">
+            <a:off x="6400800" y="-548640"/>
+            <a:ext cx="6583680" cy="8412480"/>
           </a:xfrm>
           <a:prstGeom prst="rect">
             <a:avLst/>
           </a:prstGeom>
           <a:solidFill>
-            <a:srgbClr val="22D3EE"/>
+            <a:srgbClr val="081022"/>
           </a:solidFill>
           <a:ln>
             <a:noFill/>
@@ -3182,130 +3182,23 @@
       </p:sp>
       <p:sp>
         <p:nvSpPr>
-          <p:cNvPr id="4" name="TextBox 3"/>
-          <p:cNvSpPr txBox="1"/>
+          <p:cNvPr id="4" name="Rectangle 3"/>
+          <p:cNvSpPr/>
           <p:nvPr/>
         </p:nvSpPr>
         <p:spPr>
           <a:xfrm>
-            <a:off x="502920" y="1920240"/>
-            <a:ext cx="11185855" cy="1005840"/>
+            <a:off x="7635240" y="228600"/>
+            <a:ext cx="54864" cy="6400800"/>
           </a:xfrm>
           <a:prstGeom prst="rect">
             <a:avLst/>
           </a:prstGeom>
-          <a:noFill/>
-        </p:spPr>
-        <p:txBody>
-          <a:bodyPr wrap="square" anchor="t">
-            <a:noAutofit/>
-          </a:bodyPr>
-          <a:lstStyle/>
-          <a:p>
-            <a:pPr algn="l"/>
-            <a:r>
-              <a:rPr sz="5400" b="1">
-                <a:solidFill>
-                  <a:srgbClr val="FFFFFF"/>
-                </a:solidFill>
-                <a:latin typeface="Calibri Light"/>
-              </a:rPr>
-              <a:t>RISCON</a:t>
-            </a:r>
-          </a:p>
-        </p:txBody>
-      </p:sp>
-      <p:sp>
-        <p:nvSpPr>
-          <p:cNvPr id="5" name="TextBox 4"/>
-          <p:cNvSpPr txBox="1"/>
-          <p:nvPr/>
-        </p:nvSpPr>
-        <p:spPr>
-          <a:xfrm>
-            <a:off x="502920" y="2880360"/>
-            <a:ext cx="11185855" cy="502920"/>
-          </a:xfrm>
-          <a:prstGeom prst="rect">
-            <a:avLst/>
-          </a:prstGeom>
-          <a:noFill/>
-        </p:spPr>
-        <p:txBody>
-          <a:bodyPr wrap="square" anchor="t">
-            <a:noAutofit/>
-          </a:bodyPr>
-          <a:lstStyle/>
-          <a:p>
-            <a:pPr algn="l"/>
-            <a:r>
-              <a:rPr sz="1400" b="1">
-                <a:solidFill>
-                  <a:srgbClr val="22D3EE"/>
-                </a:solidFill>
-                <a:latin typeface="Consolas"/>
-              </a:rPr>
-              <a:t>SUPPLY CHAIN RISK COMMAND CENTER</a:t>
-            </a:r>
-          </a:p>
-        </p:txBody>
-      </p:sp>
-      <p:sp>
-        <p:nvSpPr>
-          <p:cNvPr id="6" name="TextBox 5"/>
-          <p:cNvSpPr txBox="1"/>
-          <p:nvPr/>
-        </p:nvSpPr>
-        <p:spPr>
-          <a:xfrm>
-            <a:off x="502920" y="3520440"/>
-            <a:ext cx="11185855" cy="1097280"/>
-          </a:xfrm>
-          <a:prstGeom prst="rect">
-            <a:avLst/>
-          </a:prstGeom>
-          <a:noFill/>
-        </p:spPr>
-        <p:txBody>
-          <a:bodyPr wrap="square" anchor="t">
-            <a:noAutofit/>
-          </a:bodyPr>
-          <a:lstStyle/>
-          <a:p>
-            <a:pPr algn="l"/>
-            <a:r>
-              <a:rPr sz="1600" b="0">
-                <a:solidFill>
-                  <a:srgbClr val="94A3B8"/>
-                </a:solidFill>
-                <a:latin typeface="Calibri"/>
-              </a:rPr>
-              <a:t>AI-classified maritime &amp; logistics news, fused with enterprise plants, suppliers, and fleet mobility — delivered through a live operations dashboard and probability signals.</a:t>
-            </a:r>
-          </a:p>
-        </p:txBody>
-      </p:sp>
-      <p:sp>
-        <p:nvSpPr>
-          <p:cNvPr id="7" name="Rounded Rectangle 6"/>
-          <p:cNvSpPr/>
-          <p:nvPr/>
-        </p:nvSpPr>
-        <p:spPr>
-          <a:xfrm>
-            <a:off x="502920" y="4709160"/>
-            <a:ext cx="2606040" cy="594360"/>
-          </a:xfrm>
-          <a:prstGeom prst="roundRect">
-            <a:avLst/>
-          </a:prstGeom>
           <a:solidFill>
-            <a:srgbClr val="1E293B"/>
+            <a:srgbClr val="FF2D95"/>
           </a:solidFill>
           <a:ln>
-            <a:solidFill>
-              <a:srgbClr val="1E293B"/>
-            </a:solidFill>
+            <a:noFill/>
           </a:ln>
         </p:spPr>
         <p:style>
@@ -3332,61 +3225,23 @@
       </p:sp>
       <p:sp>
         <p:nvSpPr>
-          <p:cNvPr id="8" name="TextBox 7"/>
-          <p:cNvSpPr txBox="1"/>
+          <p:cNvPr id="5" name="Rectangle 4"/>
+          <p:cNvSpPr/>
           <p:nvPr/>
         </p:nvSpPr>
         <p:spPr>
           <a:xfrm>
-            <a:off x="685800" y="4837176"/>
-            <a:ext cx="2286000" cy="594360"/>
+            <a:off x="7790688" y="228600"/>
+            <a:ext cx="54864" cy="6400800"/>
           </a:xfrm>
           <a:prstGeom prst="rect">
             <a:avLst/>
           </a:prstGeom>
-          <a:noFill/>
-        </p:spPr>
-        <p:txBody>
-          <a:bodyPr wrap="none">
-            <a:spAutoFit/>
-          </a:bodyPr>
-          <a:lstStyle/>
-          <a:p>
-            <a:pPr>
-              <a:defRPr sz="1000" b="1">
-                <a:solidFill>
-                  <a:srgbClr val="22C55E"/>
-                </a:solidFill>
-                <a:latin typeface="Consolas"/>
-              </a:defRPr>
-            </a:pPr>
-            <a:r>
-              <a:t>LIVE SIGNALS</a:t>
-            </a:r>
-          </a:p>
-        </p:txBody>
-      </p:sp>
-      <p:sp>
-        <p:nvSpPr>
-          <p:cNvPr id="9" name="Rounded Rectangle 8"/>
-          <p:cNvSpPr/>
-          <p:nvPr/>
-        </p:nvSpPr>
-        <p:spPr>
-          <a:xfrm>
-            <a:off x="3429000" y="4709160"/>
-            <a:ext cx="2606040" cy="594360"/>
-          </a:xfrm>
-          <a:prstGeom prst="roundRect">
-            <a:avLst/>
-          </a:prstGeom>
           <a:solidFill>
-            <a:srgbClr val="1E293B"/>
+            <a:srgbClr val="22E3FF"/>
           </a:solidFill>
           <a:ln>
-            <a:solidFill>
-              <a:srgbClr val="1E293B"/>
-            </a:solidFill>
+            <a:noFill/>
           </a:ln>
         </p:spPr>
         <p:style>
@@ -3413,60 +3268,24 @@
       </p:sp>
       <p:sp>
         <p:nvSpPr>
-          <p:cNvPr id="10" name="TextBox 9"/>
-          <p:cNvSpPr txBox="1"/>
-          <p:nvPr/>
-        </p:nvSpPr>
-        <p:spPr>
-          <a:xfrm>
-            <a:off x="3611880" y="4837176"/>
-            <a:ext cx="2286000" cy="594360"/>
-          </a:xfrm>
-          <a:prstGeom prst="rect">
-            <a:avLst/>
-          </a:prstGeom>
-          <a:noFill/>
-        </p:spPr>
-        <p:txBody>
-          <a:bodyPr wrap="none">
-            <a:spAutoFit/>
-          </a:bodyPr>
-          <a:lstStyle/>
-          <a:p>
-            <a:pPr>
-              <a:defRPr sz="1000" b="1">
-                <a:solidFill>
-                  <a:srgbClr val="22D3EE"/>
-                </a:solidFill>
-                <a:latin typeface="Consolas"/>
-              </a:defRPr>
-            </a:pPr>
-            <a:r>
-              <a:t>PROBABILITY ENGINE</a:t>
-            </a:r>
-          </a:p>
-        </p:txBody>
-      </p:sp>
-      <p:sp>
-        <p:nvSpPr>
-          <p:cNvPr id="11" name="Rounded Rectangle 10"/>
+          <p:cNvPr id="6" name="Oval 5"/>
           <p:cNvSpPr/>
           <p:nvPr/>
         </p:nvSpPr>
         <p:spPr>
           <a:xfrm>
-            <a:off x="6355080" y="4709160"/>
-            <a:ext cx="2606040" cy="594360"/>
-          </a:xfrm>
-          <a:prstGeom prst="roundRect">
+            <a:off x="9448495" y="-457200"/>
+            <a:ext cx="3657600" cy="3657600"/>
+          </a:xfrm>
+          <a:prstGeom prst="ellipse">
             <a:avLst/>
           </a:prstGeom>
           <a:solidFill>
-            <a:srgbClr val="1E293B"/>
+            <a:srgbClr val="060812"/>
           </a:solidFill>
-          <a:ln>
+          <a:ln w="63500">
             <a:solidFill>
-              <a:srgbClr val="1E293B"/>
+              <a:srgbClr val="CCFF00"/>
             </a:solidFill>
           </a:ln>
         </p:spPr>
@@ -3494,14 +3313,188 @@
       </p:sp>
       <p:sp>
         <p:nvSpPr>
-          <p:cNvPr id="12" name="TextBox 11"/>
+          <p:cNvPr id="7" name="Oval 6"/>
+          <p:cNvSpPr/>
+          <p:nvPr/>
+        </p:nvSpPr>
+        <p:spPr>
+          <a:xfrm>
+            <a:off x="-1371600" y="4297680"/>
+            <a:ext cx="3840480" cy="2926080"/>
+          </a:xfrm>
+          <a:prstGeom prst="ellipse">
+            <a:avLst/>
+          </a:prstGeom>
+          <a:solidFill>
+            <a:srgbClr val="060812"/>
+          </a:solidFill>
+          <a:ln w="50800">
+            <a:solidFill>
+              <a:srgbClr val="22E3FF"/>
+            </a:solidFill>
+          </a:ln>
+        </p:spPr>
+        <p:style>
+          <a:lnRef idx="1">
+            <a:schemeClr val="accent1"/>
+          </a:lnRef>
+          <a:fillRef idx="3">
+            <a:schemeClr val="accent1"/>
+          </a:fillRef>
+          <a:effectRef idx="2">
+            <a:schemeClr val="accent1"/>
+          </a:effectRef>
+          <a:fontRef idx="minor">
+            <a:schemeClr val="lt1"/>
+          </a:fontRef>
+        </p:style>
+        <p:txBody>
+          <a:bodyPr rtlCol="0" anchor="ctr"/>
+          <a:lstStyle/>
+          <a:p>
+            <a:pPr algn="ctr"/>
+          </a:p>
+        </p:txBody>
+      </p:sp>
+      <p:sp>
+        <p:nvSpPr>
+          <p:cNvPr id="8" name="Rectangle 7"/>
+          <p:cNvSpPr/>
+          <p:nvPr/>
+        </p:nvSpPr>
+        <p:spPr>
+          <a:xfrm>
+            <a:off x="0" y="0"/>
+            <a:ext cx="12191695" cy="164592"/>
+          </a:xfrm>
+          <a:prstGeom prst="rect">
+            <a:avLst/>
+          </a:prstGeom>
+          <a:solidFill>
+            <a:srgbClr val="22E3FF"/>
+          </a:solidFill>
+          <a:ln>
+            <a:noFill/>
+          </a:ln>
+        </p:spPr>
+        <p:style>
+          <a:lnRef idx="1">
+            <a:schemeClr val="accent1"/>
+          </a:lnRef>
+          <a:fillRef idx="3">
+            <a:schemeClr val="accent1"/>
+          </a:fillRef>
+          <a:effectRef idx="2">
+            <a:schemeClr val="accent1"/>
+          </a:effectRef>
+          <a:fontRef idx="minor">
+            <a:schemeClr val="lt1"/>
+          </a:fontRef>
+        </p:style>
+        <p:txBody>
+          <a:bodyPr rtlCol="0" anchor="ctr"/>
+          <a:lstStyle/>
+          <a:p>
+            <a:pPr algn="ctr"/>
+          </a:p>
+        </p:txBody>
+      </p:sp>
+      <p:sp>
+        <p:nvSpPr>
+          <p:cNvPr id="9" name="Rectangle 8"/>
+          <p:cNvSpPr/>
+          <p:nvPr/>
+        </p:nvSpPr>
+        <p:spPr>
+          <a:xfrm>
+            <a:off x="9631375" y="0"/>
+            <a:ext cx="2560320" cy="164592"/>
+          </a:xfrm>
+          <a:prstGeom prst="rect">
+            <a:avLst/>
+          </a:prstGeom>
+          <a:solidFill>
+            <a:srgbClr val="CCFF00"/>
+          </a:solidFill>
+          <a:ln>
+            <a:noFill/>
+          </a:ln>
+        </p:spPr>
+        <p:style>
+          <a:lnRef idx="1">
+            <a:schemeClr val="accent1"/>
+          </a:lnRef>
+          <a:fillRef idx="3">
+            <a:schemeClr val="accent1"/>
+          </a:fillRef>
+          <a:effectRef idx="2">
+            <a:schemeClr val="accent1"/>
+          </a:effectRef>
+          <a:fontRef idx="minor">
+            <a:schemeClr val="lt1"/>
+          </a:fontRef>
+        </p:style>
+        <p:txBody>
+          <a:bodyPr rtlCol="0" anchor="ctr"/>
+          <a:lstStyle/>
+          <a:p>
+            <a:pPr algn="ctr"/>
+          </a:p>
+        </p:txBody>
+      </p:sp>
+      <p:sp>
+        <p:nvSpPr>
+          <p:cNvPr id="10" name="Rounded Rectangle 9"/>
+          <p:cNvSpPr/>
+          <p:nvPr/>
+        </p:nvSpPr>
+        <p:spPr>
+          <a:xfrm>
+            <a:off x="502920" y="502920"/>
+            <a:ext cx="2331720" cy="475488"/>
+          </a:xfrm>
+          <a:prstGeom prst="roundRect">
+            <a:avLst/>
+          </a:prstGeom>
+          <a:solidFill>
+            <a:srgbClr val="FF2D95"/>
+          </a:solidFill>
+          <a:ln>
+            <a:noFill/>
+          </a:ln>
+        </p:spPr>
+        <p:style>
+          <a:lnRef idx="1">
+            <a:schemeClr val="accent1"/>
+          </a:lnRef>
+          <a:fillRef idx="3">
+            <a:schemeClr val="accent1"/>
+          </a:fillRef>
+          <a:effectRef idx="2">
+            <a:schemeClr val="accent1"/>
+          </a:effectRef>
+          <a:fontRef idx="minor">
+            <a:schemeClr val="lt1"/>
+          </a:fontRef>
+        </p:style>
+        <p:txBody>
+          <a:bodyPr rtlCol="0" anchor="ctr"/>
+          <a:lstStyle/>
+          <a:p>
+            <a:pPr algn="ctr"/>
+          </a:p>
+        </p:txBody>
+      </p:sp>
+      <p:sp>
+        <p:nvSpPr>
+          <p:cNvPr id="11" name="TextBox 10"/>
           <p:cNvSpPr txBox="1"/>
           <p:nvPr/>
         </p:nvSpPr>
         <p:spPr>
           <a:xfrm>
-            <a:off x="6537960" y="4837176"/>
-            <a:ext cx="2286000" cy="594360"/>
+            <a:off x="685800" y="530352"/>
+            <a:ext cx="2011680" cy="411480"/>
           </a:xfrm>
           <a:prstGeom prst="rect">
             <a:avLst/>
@@ -3515,29 +3508,29 @@
           <a:lstStyle/>
           <a:p>
             <a:pPr>
-              <a:defRPr sz="1000" b="1">
-                <a:solidFill>
-                  <a:srgbClr val="FACC15"/>
+              <a:defRPr sz="1100" b="1">
+                <a:solidFill>
+                  <a:srgbClr val="FFFFFF"/>
                 </a:solidFill>
                 <a:latin typeface="Consolas"/>
               </a:defRPr>
             </a:pPr>
             <a:r>
-              <a:t>ENTERPRISE DATA</a:t>
-            </a:r>
-          </a:p>
-        </p:txBody>
-      </p:sp>
-      <p:sp>
-        <p:nvSpPr>
-          <p:cNvPr id="13" name="TextBox 12"/>
+              <a:t>⚡ HACKATHON DEMO</a:t>
+            </a:r>
+          </a:p>
+        </p:txBody>
+      </p:sp>
+      <p:sp>
+        <p:nvSpPr>
+          <p:cNvPr id="12" name="TextBox 11"/>
           <p:cNvSpPr txBox="1"/>
           <p:nvPr/>
         </p:nvSpPr>
         <p:spPr>
           <a:xfrm>
-            <a:off x="502920" y="6263640"/>
-            <a:ext cx="11185855" cy="365760"/>
+            <a:off x="502920" y="1234440"/>
+            <a:ext cx="1325880" cy="1097280"/>
           </a:xfrm>
           <a:prstGeom prst="rect">
             <a:avLst/>
@@ -3552,9 +3545,392 @@
           <a:p>
             <a:pPr algn="l"/>
             <a:r>
-              <a:rPr sz="1100" b="0">
-                <a:solidFill>
-                  <a:srgbClr val="64748B"/>
+              <a:rPr sz="7200" b="1">
+                <a:solidFill>
+                  <a:srgbClr val="FFFFFF"/>
+                </a:solidFill>
+                <a:latin typeface="Calibri Light"/>
+              </a:rPr>
+              <a:t>RIS</a:t>
+            </a:r>
+          </a:p>
+        </p:txBody>
+      </p:sp>
+      <p:sp>
+        <p:nvSpPr>
+          <p:cNvPr id="13" name="TextBox 12"/>
+          <p:cNvSpPr txBox="1"/>
+          <p:nvPr/>
+        </p:nvSpPr>
+        <p:spPr>
+          <a:xfrm>
+            <a:off x="1764792" y="1234440"/>
+            <a:ext cx="2926080" cy="1097280"/>
+          </a:xfrm>
+          <a:prstGeom prst="rect">
+            <a:avLst/>
+          </a:prstGeom>
+          <a:noFill/>
+        </p:spPr>
+        <p:txBody>
+          <a:bodyPr wrap="square" anchor="t">
+            <a:noAutofit/>
+          </a:bodyPr>
+          <a:lstStyle/>
+          <a:p>
+            <a:pPr algn="l"/>
+            <a:r>
+              <a:rPr sz="7200" b="1">
+                <a:solidFill>
+                  <a:srgbClr val="22E3FF"/>
+                </a:solidFill>
+                <a:latin typeface="Calibri Light"/>
+              </a:rPr>
+              <a:t>CON</a:t>
+            </a:r>
+          </a:p>
+        </p:txBody>
+      </p:sp>
+      <p:sp>
+        <p:nvSpPr>
+          <p:cNvPr id="14" name="TextBox 13"/>
+          <p:cNvSpPr txBox="1"/>
+          <p:nvPr/>
+        </p:nvSpPr>
+        <p:spPr>
+          <a:xfrm>
+            <a:off x="502920" y="2359152"/>
+            <a:ext cx="11185855" cy="502920"/>
+          </a:xfrm>
+          <a:prstGeom prst="rect">
+            <a:avLst/>
+          </a:prstGeom>
+          <a:noFill/>
+        </p:spPr>
+        <p:txBody>
+          <a:bodyPr wrap="square" anchor="t">
+            <a:noAutofit/>
+          </a:bodyPr>
+          <a:lstStyle/>
+          <a:p>
+            <a:pPr algn="l"/>
+            <a:r>
+              <a:rPr sz="1500" b="1">
+                <a:solidFill>
+                  <a:srgbClr val="CCFF00"/>
+                </a:solidFill>
+                <a:latin typeface="Consolas"/>
+              </a:rPr>
+              <a:t>SUPPLY CHAIN RISK COMMAND CENTER</a:t>
+            </a:r>
+          </a:p>
+        </p:txBody>
+      </p:sp>
+      <p:sp>
+        <p:nvSpPr>
+          <p:cNvPr id="15" name="TextBox 14"/>
+          <p:cNvSpPr txBox="1"/>
+          <p:nvPr/>
+        </p:nvSpPr>
+        <p:spPr>
+          <a:xfrm>
+            <a:off x="502920" y="2971800"/>
+            <a:ext cx="11185855" cy="1051560"/>
+          </a:xfrm>
+          <a:prstGeom prst="rect">
+            <a:avLst/>
+          </a:prstGeom>
+          <a:noFill/>
+        </p:spPr>
+        <p:txBody>
+          <a:bodyPr wrap="square" anchor="t">
+            <a:noAutofit/>
+          </a:bodyPr>
+          <a:lstStyle/>
+          <a:p>
+            <a:pPr algn="l"/>
+            <a:r>
+              <a:rPr sz="2000" b="0">
+                <a:solidFill>
+                  <a:srgbClr val="C8D4E8"/>
+                </a:solidFill>
+                <a:latin typeface="Calibri"/>
+              </a:rPr>
+              <a:t>Maritime &amp; logistics signals → live probability → your footprint on a map.</a:t>
+            </a:r>
+          </a:p>
+        </p:txBody>
+      </p:sp>
+      <p:sp>
+        <p:nvSpPr>
+          <p:cNvPr id="16" name="Rounded Rectangle 15"/>
+          <p:cNvSpPr/>
+          <p:nvPr/>
+        </p:nvSpPr>
+        <p:spPr>
+          <a:xfrm>
+            <a:off x="502920" y="4617720"/>
+            <a:ext cx="2670048" cy="658368"/>
+          </a:xfrm>
+          <a:prstGeom prst="roundRect">
+            <a:avLst/>
+          </a:prstGeom>
+          <a:solidFill>
+            <a:srgbClr val="0C1222"/>
+          </a:solidFill>
+          <a:ln w="25400">
+            <a:solidFill>
+              <a:srgbClr val="39FF9C"/>
+            </a:solidFill>
+          </a:ln>
+        </p:spPr>
+        <p:style>
+          <a:lnRef idx="1">
+            <a:schemeClr val="accent1"/>
+          </a:lnRef>
+          <a:fillRef idx="3">
+            <a:schemeClr val="accent1"/>
+          </a:fillRef>
+          <a:effectRef idx="2">
+            <a:schemeClr val="accent1"/>
+          </a:effectRef>
+          <a:fontRef idx="minor">
+            <a:schemeClr val="lt1"/>
+          </a:fontRef>
+        </p:style>
+        <p:txBody>
+          <a:bodyPr rtlCol="0" anchor="ctr"/>
+          <a:lstStyle/>
+          <a:p>
+            <a:pPr algn="ctr"/>
+          </a:p>
+        </p:txBody>
+      </p:sp>
+      <p:sp>
+        <p:nvSpPr>
+          <p:cNvPr id="17" name="TextBox 16"/>
+          <p:cNvSpPr txBox="1"/>
+          <p:nvPr/>
+        </p:nvSpPr>
+        <p:spPr>
+          <a:xfrm>
+            <a:off x="704088" y="4764024"/>
+            <a:ext cx="2304288" cy="658368"/>
+          </a:xfrm>
+          <a:prstGeom prst="rect">
+            <a:avLst/>
+          </a:prstGeom>
+          <a:noFill/>
+        </p:spPr>
+        <p:txBody>
+          <a:bodyPr wrap="none">
+            <a:spAutoFit/>
+          </a:bodyPr>
+          <a:lstStyle/>
+          <a:p>
+            <a:pPr>
+              <a:defRPr sz="1100" b="1">
+                <a:solidFill>
+                  <a:srgbClr val="39FF9C"/>
+                </a:solidFill>
+                <a:latin typeface="Consolas"/>
+              </a:defRPr>
+            </a:pPr>
+            <a:r>
+              <a:t>LIVE SIGNALS</a:t>
+            </a:r>
+          </a:p>
+        </p:txBody>
+      </p:sp>
+      <p:sp>
+        <p:nvSpPr>
+          <p:cNvPr id="18" name="Rounded Rectangle 17"/>
+          <p:cNvSpPr/>
+          <p:nvPr/>
+        </p:nvSpPr>
+        <p:spPr>
+          <a:xfrm>
+            <a:off x="3429000" y="4617720"/>
+            <a:ext cx="2670048" cy="658368"/>
+          </a:xfrm>
+          <a:prstGeom prst="roundRect">
+            <a:avLst/>
+          </a:prstGeom>
+          <a:solidFill>
+            <a:srgbClr val="0C1222"/>
+          </a:solidFill>
+          <a:ln w="25400">
+            <a:solidFill>
+              <a:srgbClr val="22E3FF"/>
+            </a:solidFill>
+          </a:ln>
+        </p:spPr>
+        <p:style>
+          <a:lnRef idx="1">
+            <a:schemeClr val="accent1"/>
+          </a:lnRef>
+          <a:fillRef idx="3">
+            <a:schemeClr val="accent1"/>
+          </a:fillRef>
+          <a:effectRef idx="2">
+            <a:schemeClr val="accent1"/>
+          </a:effectRef>
+          <a:fontRef idx="minor">
+            <a:schemeClr val="lt1"/>
+          </a:fontRef>
+        </p:style>
+        <p:txBody>
+          <a:bodyPr rtlCol="0" anchor="ctr"/>
+          <a:lstStyle/>
+          <a:p>
+            <a:pPr algn="ctr"/>
+          </a:p>
+        </p:txBody>
+      </p:sp>
+      <p:sp>
+        <p:nvSpPr>
+          <p:cNvPr id="19" name="TextBox 18"/>
+          <p:cNvSpPr txBox="1"/>
+          <p:nvPr/>
+        </p:nvSpPr>
+        <p:spPr>
+          <a:xfrm>
+            <a:off x="3630168" y="4764024"/>
+            <a:ext cx="2304288" cy="658368"/>
+          </a:xfrm>
+          <a:prstGeom prst="rect">
+            <a:avLst/>
+          </a:prstGeom>
+          <a:noFill/>
+        </p:spPr>
+        <p:txBody>
+          <a:bodyPr wrap="none">
+            <a:spAutoFit/>
+          </a:bodyPr>
+          <a:lstStyle/>
+          <a:p>
+            <a:pPr>
+              <a:defRPr sz="1100" b="1">
+                <a:solidFill>
+                  <a:srgbClr val="22E3FF"/>
+                </a:solidFill>
+                <a:latin typeface="Consolas"/>
+              </a:defRPr>
+            </a:pPr>
+            <a:r>
+              <a:t>PROBABILITY</a:t>
+            </a:r>
+          </a:p>
+        </p:txBody>
+      </p:sp>
+      <p:sp>
+        <p:nvSpPr>
+          <p:cNvPr id="20" name="Rounded Rectangle 19"/>
+          <p:cNvSpPr/>
+          <p:nvPr/>
+        </p:nvSpPr>
+        <p:spPr>
+          <a:xfrm>
+            <a:off x="6355080" y="4617720"/>
+            <a:ext cx="2670048" cy="658368"/>
+          </a:xfrm>
+          <a:prstGeom prst="roundRect">
+            <a:avLst/>
+          </a:prstGeom>
+          <a:solidFill>
+            <a:srgbClr val="0C1222"/>
+          </a:solidFill>
+          <a:ln w="25400">
+            <a:solidFill>
+              <a:srgbClr val="FF2D95"/>
+            </a:solidFill>
+          </a:ln>
+        </p:spPr>
+        <p:style>
+          <a:lnRef idx="1">
+            <a:schemeClr val="accent1"/>
+          </a:lnRef>
+          <a:fillRef idx="3">
+            <a:schemeClr val="accent1"/>
+          </a:fillRef>
+          <a:effectRef idx="2">
+            <a:schemeClr val="accent1"/>
+          </a:effectRef>
+          <a:fontRef idx="minor">
+            <a:schemeClr val="lt1"/>
+          </a:fontRef>
+        </p:style>
+        <p:txBody>
+          <a:bodyPr rtlCol="0" anchor="ctr"/>
+          <a:lstStyle/>
+          <a:p>
+            <a:pPr algn="ctr"/>
+          </a:p>
+        </p:txBody>
+      </p:sp>
+      <p:sp>
+        <p:nvSpPr>
+          <p:cNvPr id="21" name="TextBox 20"/>
+          <p:cNvSpPr txBox="1"/>
+          <p:nvPr/>
+        </p:nvSpPr>
+        <p:spPr>
+          <a:xfrm>
+            <a:off x="6556248" y="4764024"/>
+            <a:ext cx="2304288" cy="658368"/>
+          </a:xfrm>
+          <a:prstGeom prst="rect">
+            <a:avLst/>
+          </a:prstGeom>
+          <a:noFill/>
+        </p:spPr>
+        <p:txBody>
+          <a:bodyPr wrap="none">
+            <a:spAutoFit/>
+          </a:bodyPr>
+          <a:lstStyle/>
+          <a:p>
+            <a:pPr>
+              <a:defRPr sz="1100" b="1">
+                <a:solidFill>
+                  <a:srgbClr val="FF2D95"/>
+                </a:solidFill>
+                <a:latin typeface="Consolas"/>
+              </a:defRPr>
+            </a:pPr>
+            <a:r>
+              <a:t>ENTERPRISE DATA</a:t>
+            </a:r>
+          </a:p>
+        </p:txBody>
+      </p:sp>
+      <p:sp>
+        <p:nvSpPr>
+          <p:cNvPr id="22" name="TextBox 21"/>
+          <p:cNvSpPr txBox="1"/>
+          <p:nvPr/>
+        </p:nvSpPr>
+        <p:spPr>
+          <a:xfrm>
+            <a:off x="502920" y="6263640"/>
+            <a:ext cx="11185855" cy="411480"/>
+          </a:xfrm>
+          <a:prstGeom prst="rect">
+            <a:avLst/>
+          </a:prstGeom>
+          <a:noFill/>
+        </p:spPr>
+        <p:txBody>
+          <a:bodyPr wrap="square" anchor="t">
+            <a:noAutofit/>
+          </a:bodyPr>
+          <a:lstStyle/>
+          <a:p>
+            <a:pPr algn="l"/>
+            <a:r>
+              <a:rPr sz="1200" b="0">
+                <a:solidFill>
+                  <a:srgbClr val="7A88A3"/>
                 </a:solidFill>
                 <a:latin typeface="Calibri"/>
               </a:rPr>
@@ -3596,7 +3972,7 @@
             <a:avLst/>
           </a:prstGeom>
           <a:solidFill>
-            <a:srgbClr val="0A0F1C"/>
+            <a:srgbClr val="060812"/>
           </a:solidFill>
           <a:ln>
             <a:noFill/>
@@ -3631,15 +4007,15 @@
           <p:nvPr/>
         </p:nvSpPr>
         <p:spPr>
-          <a:xfrm>
-            <a:off x="0" y="0"/>
-            <a:ext cx="12191695" cy="109728"/>
+          <a:xfrm rot="660000">
+            <a:off x="6400800" y="-548640"/>
+            <a:ext cx="6583680" cy="8412480"/>
           </a:xfrm>
           <a:prstGeom prst="rect">
             <a:avLst/>
           </a:prstGeom>
           <a:solidFill>
-            <a:srgbClr val="22D3EE"/>
+            <a:srgbClr val="081022"/>
           </a:solidFill>
           <a:ln>
             <a:noFill/>
@@ -3669,95 +4045,23 @@
       </p:sp>
       <p:sp>
         <p:nvSpPr>
-          <p:cNvPr id="4" name="TextBox 3"/>
-          <p:cNvSpPr txBox="1"/>
+          <p:cNvPr id="4" name="Rectangle 3"/>
+          <p:cNvSpPr/>
           <p:nvPr/>
         </p:nvSpPr>
         <p:spPr>
           <a:xfrm>
-            <a:off x="502920" y="411480"/>
-            <a:ext cx="11185855" cy="320040"/>
+            <a:off x="7635240" y="228600"/>
+            <a:ext cx="54864" cy="6400800"/>
           </a:xfrm>
           <a:prstGeom prst="rect">
             <a:avLst/>
           </a:prstGeom>
-          <a:noFill/>
-        </p:spPr>
-        <p:txBody>
-          <a:bodyPr wrap="square" anchor="t">
-            <a:noAutofit/>
-          </a:bodyPr>
-          <a:lstStyle/>
-          <a:p>
-            <a:pPr algn="l"/>
-            <a:r>
-              <a:rPr sz="1000" b="1">
-                <a:solidFill>
-                  <a:srgbClr val="22D3EE"/>
-                </a:solidFill>
-                <a:latin typeface="Consolas"/>
-              </a:rPr>
-              <a:t>SLIDE 1</a:t>
-            </a:r>
-          </a:p>
-        </p:txBody>
-      </p:sp>
-      <p:sp>
-        <p:nvSpPr>
-          <p:cNvPr id="5" name="TextBox 4"/>
-          <p:cNvSpPr txBox="1"/>
-          <p:nvPr/>
-        </p:nvSpPr>
-        <p:spPr>
-          <a:xfrm>
-            <a:off x="502920" y="777240"/>
-            <a:ext cx="11185855" cy="822960"/>
-          </a:xfrm>
-          <a:prstGeom prst="rect">
-            <a:avLst/>
-          </a:prstGeom>
-          <a:noFill/>
-        </p:spPr>
-        <p:txBody>
-          <a:bodyPr wrap="square" anchor="t">
-            <a:noAutofit/>
-          </a:bodyPr>
-          <a:lstStyle/>
-          <a:p>
-            <a:pPr algn="l"/>
-            <a:r>
-              <a:rPr sz="2600" b="1">
-                <a:solidFill>
-                  <a:srgbClr val="FFFFFF"/>
-                </a:solidFill>
-                <a:latin typeface="Calibri Light"/>
-              </a:rPr>
-              <a:t>THE MARKET PROBLEM</a:t>
-            </a:r>
-          </a:p>
-        </p:txBody>
-      </p:sp>
-      <p:sp>
-        <p:nvSpPr>
-          <p:cNvPr id="6" name="Rounded Rectangle 5"/>
-          <p:cNvSpPr/>
-          <p:nvPr/>
-        </p:nvSpPr>
-        <p:spPr>
-          <a:xfrm>
-            <a:off x="502920" y="1691640"/>
-            <a:ext cx="11185855" cy="4663440"/>
-          </a:xfrm>
-          <a:prstGeom prst="roundRect">
-            <a:avLst/>
-          </a:prstGeom>
           <a:solidFill>
-            <a:srgbClr val="1E293B"/>
+            <a:srgbClr val="FF2D95"/>
           </a:solidFill>
-          <a:ln w="12700">
-            <a:solidFill>
-              <a:srgbClr val="1E293B"/>
-            </a:solidFill>
+          <a:ln>
+            <a:noFill/>
           </a:ln>
         </p:spPr>
         <p:style>
@@ -3784,14 +4088,143 @@
       </p:sp>
       <p:sp>
         <p:nvSpPr>
-          <p:cNvPr id="7" name="TextBox 6"/>
+          <p:cNvPr id="5" name="Rectangle 4"/>
+          <p:cNvSpPr/>
+          <p:nvPr/>
+        </p:nvSpPr>
+        <p:spPr>
+          <a:xfrm>
+            <a:off x="7790688" y="228600"/>
+            <a:ext cx="54864" cy="6400800"/>
+          </a:xfrm>
+          <a:prstGeom prst="rect">
+            <a:avLst/>
+          </a:prstGeom>
+          <a:solidFill>
+            <a:srgbClr val="22E3FF"/>
+          </a:solidFill>
+          <a:ln>
+            <a:noFill/>
+          </a:ln>
+        </p:spPr>
+        <p:style>
+          <a:lnRef idx="1">
+            <a:schemeClr val="accent1"/>
+          </a:lnRef>
+          <a:fillRef idx="3">
+            <a:schemeClr val="accent1"/>
+          </a:fillRef>
+          <a:effectRef idx="2">
+            <a:schemeClr val="accent1"/>
+          </a:effectRef>
+          <a:fontRef idx="minor">
+            <a:schemeClr val="lt1"/>
+          </a:fontRef>
+        </p:style>
+        <p:txBody>
+          <a:bodyPr rtlCol="0" anchor="ctr"/>
+          <a:lstStyle/>
+          <a:p>
+            <a:pPr algn="ctr"/>
+          </a:p>
+        </p:txBody>
+      </p:sp>
+      <p:sp>
+        <p:nvSpPr>
+          <p:cNvPr id="6" name="Rectangle 5"/>
+          <p:cNvSpPr/>
+          <p:nvPr/>
+        </p:nvSpPr>
+        <p:spPr>
+          <a:xfrm>
+            <a:off x="0" y="0"/>
+            <a:ext cx="12191695" cy="164592"/>
+          </a:xfrm>
+          <a:prstGeom prst="rect">
+            <a:avLst/>
+          </a:prstGeom>
+          <a:solidFill>
+            <a:srgbClr val="22E3FF"/>
+          </a:solidFill>
+          <a:ln>
+            <a:noFill/>
+          </a:ln>
+        </p:spPr>
+        <p:style>
+          <a:lnRef idx="1">
+            <a:schemeClr val="accent1"/>
+          </a:lnRef>
+          <a:fillRef idx="3">
+            <a:schemeClr val="accent1"/>
+          </a:fillRef>
+          <a:effectRef idx="2">
+            <a:schemeClr val="accent1"/>
+          </a:effectRef>
+          <a:fontRef idx="minor">
+            <a:schemeClr val="lt1"/>
+          </a:fontRef>
+        </p:style>
+        <p:txBody>
+          <a:bodyPr rtlCol="0" anchor="ctr"/>
+          <a:lstStyle/>
+          <a:p>
+            <a:pPr algn="ctr"/>
+          </a:p>
+        </p:txBody>
+      </p:sp>
+      <p:sp>
+        <p:nvSpPr>
+          <p:cNvPr id="7" name="Rectangle 6"/>
+          <p:cNvSpPr/>
+          <p:nvPr/>
+        </p:nvSpPr>
+        <p:spPr>
+          <a:xfrm>
+            <a:off x="9631375" y="0"/>
+            <a:ext cx="2560320" cy="164592"/>
+          </a:xfrm>
+          <a:prstGeom prst="rect">
+            <a:avLst/>
+          </a:prstGeom>
+          <a:solidFill>
+            <a:srgbClr val="CCFF00"/>
+          </a:solidFill>
+          <a:ln>
+            <a:noFill/>
+          </a:ln>
+        </p:spPr>
+        <p:style>
+          <a:lnRef idx="1">
+            <a:schemeClr val="accent1"/>
+          </a:lnRef>
+          <a:fillRef idx="3">
+            <a:schemeClr val="accent1"/>
+          </a:fillRef>
+          <a:effectRef idx="2">
+            <a:schemeClr val="accent1"/>
+          </a:effectRef>
+          <a:fontRef idx="minor">
+            <a:schemeClr val="lt1"/>
+          </a:fontRef>
+        </p:style>
+        <p:txBody>
+          <a:bodyPr rtlCol="0" anchor="ctr"/>
+          <a:lstStyle/>
+          <a:p>
+            <a:pPr algn="ctr"/>
+          </a:p>
+        </p:txBody>
+      </p:sp>
+      <p:sp>
+        <p:nvSpPr>
+          <p:cNvPr id="8" name="TextBox 7"/>
           <p:cNvSpPr txBox="1"/>
           <p:nvPr/>
         </p:nvSpPr>
         <p:spPr>
           <a:xfrm>
-            <a:off x="822960" y="2011680"/>
-            <a:ext cx="10545775" cy="4160520"/>
+            <a:off x="502920" y="347472"/>
+            <a:ext cx="11185855" cy="365760"/>
           </a:xfrm>
           <a:prstGeom prst="rect">
             <a:avLst/>
@@ -3799,72 +4232,789 @@
           <a:noFill/>
         </p:spPr>
         <p:txBody>
+          <a:bodyPr wrap="square" anchor="t">
+            <a:noAutofit/>
+          </a:bodyPr>
+          <a:lstStyle/>
+          <a:p>
+            <a:pPr algn="l"/>
+            <a:r>
+              <a:rPr sz="1100" b="1">
+                <a:solidFill>
+                  <a:srgbClr val="CCFF00"/>
+                </a:solidFill>
+                <a:latin typeface="Consolas"/>
+              </a:rPr>
+              <a:t>1 / 5</a:t>
+            </a:r>
+          </a:p>
+        </p:txBody>
+      </p:sp>
+      <p:sp>
+        <p:nvSpPr>
+          <p:cNvPr id="9" name="TextBox 8"/>
+          <p:cNvSpPr txBox="1"/>
+          <p:nvPr/>
+        </p:nvSpPr>
+        <p:spPr>
+          <a:xfrm>
+            <a:off x="502920" y="713232"/>
+            <a:ext cx="11185855" cy="914400"/>
+          </a:xfrm>
+          <a:prstGeom prst="rect">
+            <a:avLst/>
+          </a:prstGeom>
+          <a:noFill/>
+        </p:spPr>
+        <p:txBody>
+          <a:bodyPr wrap="square" anchor="t">
+            <a:noAutofit/>
+          </a:bodyPr>
+          <a:lstStyle/>
+          <a:p>
+            <a:pPr algn="l"/>
+            <a:r>
+              <a:rPr sz="3400" b="1">
+                <a:solidFill>
+                  <a:srgbClr val="FFFFFF"/>
+                </a:solidFill>
+                <a:latin typeface="Calibri Light"/>
+              </a:rPr>
+              <a:t>THE PROBLEM</a:t>
+            </a:r>
+          </a:p>
+        </p:txBody>
+      </p:sp>
+      <p:sp>
+        <p:nvSpPr>
+          <p:cNvPr id="10" name="Rectangle 9"/>
+          <p:cNvSpPr/>
+          <p:nvPr/>
+        </p:nvSpPr>
+        <p:spPr>
+          <a:xfrm>
+            <a:off x="502920" y="1719072"/>
+            <a:ext cx="109728" cy="4636008"/>
+          </a:xfrm>
+          <a:prstGeom prst="rect">
+            <a:avLst/>
+          </a:prstGeom>
+          <a:solidFill>
+            <a:srgbClr val="FF2D95"/>
+          </a:solidFill>
+          <a:ln>
+            <a:noFill/>
+          </a:ln>
+        </p:spPr>
+        <p:style>
+          <a:lnRef idx="1">
+            <a:schemeClr val="accent1"/>
+          </a:lnRef>
+          <a:fillRef idx="3">
+            <a:schemeClr val="accent1"/>
+          </a:fillRef>
+          <a:effectRef idx="2">
+            <a:schemeClr val="accent1"/>
+          </a:effectRef>
+          <a:fontRef idx="minor">
+            <a:schemeClr val="lt1"/>
+          </a:fontRef>
+        </p:style>
+        <p:txBody>
+          <a:bodyPr rtlCol="0" anchor="ctr"/>
+          <a:lstStyle/>
+          <a:p>
+            <a:pPr algn="ctr"/>
+          </a:p>
+        </p:txBody>
+      </p:sp>
+      <p:sp>
+        <p:nvSpPr>
+          <p:cNvPr id="11" name="Rounded Rectangle 10"/>
+          <p:cNvSpPr/>
+          <p:nvPr/>
+        </p:nvSpPr>
+        <p:spPr>
+          <a:xfrm>
+            <a:off x="502920" y="1719072"/>
+            <a:ext cx="11185855" cy="4636008"/>
+          </a:xfrm>
+          <a:prstGeom prst="roundRect">
+            <a:avLst/>
+          </a:prstGeom>
+          <a:solidFill>
+            <a:srgbClr val="12182A"/>
+          </a:solidFill>
+          <a:ln w="31750">
+            <a:solidFill>
+              <a:srgbClr val="22E3FF"/>
+            </a:solidFill>
+          </a:ln>
+        </p:spPr>
+        <p:style>
+          <a:lnRef idx="1">
+            <a:schemeClr val="accent1"/>
+          </a:lnRef>
+          <a:fillRef idx="3">
+            <a:schemeClr val="accent1"/>
+          </a:fillRef>
+          <a:effectRef idx="2">
+            <a:schemeClr val="accent1"/>
+          </a:effectRef>
+          <a:fontRef idx="minor">
+            <a:schemeClr val="lt1"/>
+          </a:fontRef>
+        </p:style>
+        <p:txBody>
+          <a:bodyPr rtlCol="0" anchor="ctr"/>
+          <a:lstStyle/>
+          <a:p>
+            <a:pPr algn="ctr"/>
+          </a:p>
+        </p:txBody>
+      </p:sp>
+      <p:sp>
+        <p:nvSpPr>
+          <p:cNvPr id="12" name="TextBox 11"/>
+          <p:cNvSpPr txBox="1"/>
+          <p:nvPr/>
+        </p:nvSpPr>
+        <p:spPr>
+          <a:xfrm>
+            <a:off x="886968" y="2066544"/>
+            <a:ext cx="10472623" cy="4087368"/>
+          </a:xfrm>
+          <a:prstGeom prst="rect">
+            <a:avLst/>
+          </a:prstGeom>
+          <a:noFill/>
+        </p:spPr>
+        <p:txBody>
           <a:bodyPr wrap="square">
             <a:spAutoFit/>
           </a:bodyPr>
           <a:lstStyle/>
           <a:p>
             <a:pPr>
+              <a:lnSpc>
+                <a:spcPct val="110000"/>
+              </a:lnSpc>
               <a:spcAft>
-                <a:spcPts val="800"/>
+                <a:spcPts val="1200"/>
               </a:spcAft>
-              <a:defRPr sz="1300">
-                <a:solidFill>
-                  <a:srgbClr val="94A3B8"/>
-                </a:solidFill>
-                <a:latin typeface="Calibri"/>
-              </a:defRPr>
+              <a:buChar char="•"/>
             </a:pPr>
             <a:r>
-              <a:t>WHO HAS THIS PROBLEM? Heads of supply chain planning and logistics control-tower leads at mid-market and large manufacturers ($100M–$5B revenue), plus ocean-freight and 3PL operations teams serving CPG, automotive, and industrial OEMs. Secondary buyers: procurement risk managers and resilience program owners replacing spreadsheet war rooms.</a:t>
+              <a:rPr b="1" sz="1500">
+                <a:solidFill>
+                  <a:srgbClr val="22E3FF"/>
+                </a:solidFill>
+                <a:latin typeface="Calibri"/>
+              </a:rPr>
+              <a:t>No live link</a:t>
+            </a:r>
+            <a:r>
+              <a:rPr b="0" sz="1500">
+                <a:solidFill>
+                  <a:srgbClr val="C8D4E8"/>
+                </a:solidFill>
+                <a:latin typeface="Calibri"/>
+              </a:rPr>
+              <a:t> — alerts &amp; spreadsheets aren’t tied to plants, suppliers, or in‑transit goods.</a:t>
+            </a:r>
+          </a:p>
+          <a:p>
+            <a:pPr lvl="1">
+              <a:lnSpc>
+                <a:spcPct val="110000"/>
+              </a:lnSpc>
+              <a:spcAft>
+                <a:spcPts val="600"/>
+              </a:spcAft>
+              <a:buChar char="•"/>
+            </a:pPr>
+            <a:r>
+              <a:rPr b="0" sz="1300">
+                <a:solidFill>
+                  <a:srgbClr val="C8D4E8"/>
+                </a:solidFill>
+                <a:latin typeface="Calibri"/>
+              </a:rPr>
+              <a:t>EU: </a:t>
+            </a:r>
+            <a:r>
+              <a:rPr b="1" sz="1300">
+                <a:solidFill>
+                  <a:srgbClr val="22E3FF"/>
+                </a:solidFill>
+                <a:latin typeface="Calibri"/>
+              </a:rPr>
+              <a:t>~59,961</a:t>
+            </a:r>
+            <a:r>
+              <a:rPr b="0" sz="1300">
+                <a:solidFill>
+                  <a:srgbClr val="C8D4E8"/>
+                </a:solidFill>
+                <a:latin typeface="Calibri"/>
+              </a:rPr>
+              <a:t> medium-sized manufacturers (50–249 employees), </a:t>
+            </a:r>
+            <a:r>
+              <a:rPr b="1" sz="1300">
+                <a:solidFill>
+                  <a:srgbClr val="22E3FF"/>
+                </a:solidFill>
+                <a:latin typeface="Calibri"/>
+              </a:rPr>
+              <a:t>2024</a:t>
+            </a:r>
+            <a:r>
+              <a:rPr b="0" sz="1300">
+                <a:solidFill>
+                  <a:srgbClr val="C8D4E8"/>
+                </a:solidFill>
+                <a:latin typeface="Calibri"/>
+              </a:rPr>
+              <a:t> — Statista (stat. 1253133).</a:t>
+            </a:r>
+          </a:p>
+          <a:p>
+            <a:pPr lvl="1">
+              <a:lnSpc>
+                <a:spcPct val="110000"/>
+              </a:lnSpc>
+              <a:spcAft>
+                <a:spcPts val="600"/>
+              </a:spcAft>
+              <a:buChar char="•"/>
+            </a:pPr>
+            <a:r>
+              <a:rPr b="0" sz="1300">
+                <a:solidFill>
+                  <a:srgbClr val="C8D4E8"/>
+                </a:solidFill>
+                <a:latin typeface="Calibri"/>
+              </a:rPr>
+              <a:t>EU manufacturing: </a:t>
+            </a:r>
+            <a:r>
+              <a:rPr b="1" sz="1300">
+                <a:solidFill>
+                  <a:srgbClr val="22E3FF"/>
+                </a:solidFill>
+                <a:latin typeface="Calibri"/>
+              </a:rPr>
+              <a:t>~2.2 million</a:t>
+            </a:r>
+            <a:r>
+              <a:rPr b="0" sz="1300">
+                <a:solidFill>
+                  <a:srgbClr val="C8D4E8"/>
+                </a:solidFill>
+                <a:latin typeface="Calibri"/>
+              </a:rPr>
+              <a:t> enterprises total (</a:t>
+            </a:r>
+            <a:r>
+              <a:rPr b="1" sz="1300">
+                <a:solidFill>
+                  <a:srgbClr val="22E3FF"/>
+                </a:solidFill>
+                <a:latin typeface="Calibri"/>
+              </a:rPr>
+              <a:t>2023</a:t>
+            </a:r>
+            <a:r>
+              <a:rPr b="0" sz="1300">
+                <a:solidFill>
+                  <a:srgbClr val="C8D4E8"/>
+                </a:solidFill>
+                <a:latin typeface="Calibri"/>
+              </a:rPr>
+              <a:t>) — </a:t>
+            </a:r>
+            <a:r>
+              <a:rPr b="1" sz="1300">
+                <a:solidFill>
+                  <a:srgbClr val="22E3FF"/>
+                </a:solidFill>
+                <a:latin typeface="Calibri"/>
+              </a:rPr>
+              <a:t>Eurostat</a:t>
+            </a:r>
+            <a:r>
+              <a:rPr b="0" sz="1300">
+                <a:solidFill>
+                  <a:srgbClr val="C8D4E8"/>
+                </a:solidFill>
+                <a:latin typeface="Calibri"/>
+              </a:rPr>
+              <a:t> (most are micro/small; mid-market = ICP).</a:t>
+            </a:r>
+          </a:p>
+          <a:p>
+            <a:pPr lvl="1">
+              <a:lnSpc>
+                <a:spcPct val="110000"/>
+              </a:lnSpc>
+              <a:spcAft>
+                <a:spcPts val="600"/>
+              </a:spcAft>
+              <a:buChar char="•"/>
+            </a:pPr>
+            <a:r>
+              <a:rPr b="0" sz="1300">
+                <a:solidFill>
+                  <a:srgbClr val="C8D4E8"/>
+                </a:solidFill>
+                <a:latin typeface="Calibri"/>
+              </a:rPr>
+              <a:t>Global </a:t>
+            </a:r>
+            <a:r>
+              <a:rPr b="1" sz="1300">
+                <a:solidFill>
+                  <a:srgbClr val="22E3FF"/>
+                </a:solidFill>
+                <a:latin typeface="Calibri"/>
+              </a:rPr>
+              <a:t>control-tower</a:t>
+            </a:r>
+            <a:r>
+              <a:rPr b="0" sz="1300">
+                <a:solidFill>
+                  <a:srgbClr val="C8D4E8"/>
+                </a:solidFill>
+                <a:latin typeface="Calibri"/>
+              </a:rPr>
+              <a:t> market often quoted </a:t>
+            </a:r>
+            <a:r>
+              <a:rPr b="1" sz="1300">
+                <a:solidFill>
+                  <a:srgbClr val="22E3FF"/>
+                </a:solidFill>
+                <a:latin typeface="Calibri"/>
+              </a:rPr>
+              <a:t>~US$6.8–7.2B (2024–25)</a:t>
+            </a:r>
+            <a:r>
+              <a:rPr b="0" sz="1300">
+                <a:solidFill>
+                  <a:srgbClr val="C8D4E8"/>
+                </a:solidFill>
+                <a:latin typeface="Calibri"/>
+              </a:rPr>
+              <a:t> → </a:t>
+            </a:r>
+            <a:r>
+              <a:rPr b="1" sz="1300">
+                <a:solidFill>
+                  <a:srgbClr val="22E3FF"/>
+                </a:solidFill>
+                <a:latin typeface="Calibri"/>
+              </a:rPr>
+              <a:t>~US$12.7B by 2035</a:t>
+            </a:r>
+            <a:r>
+              <a:rPr b="0" sz="1300">
+                <a:solidFill>
+                  <a:srgbClr val="C8D4E8"/>
+                </a:solidFill>
+                <a:latin typeface="Calibri"/>
+              </a:rPr>
+              <a:t> — analyst summaries (e.g. WiseGuyReports / Industry Today).</a:t>
             </a:r>
           </a:p>
           <a:p>
             <a:pPr>
+              <a:lnSpc>
+                <a:spcPct val="110000"/>
+              </a:lnSpc>
               <a:spcAft>
-                <a:spcPts val="800"/>
+                <a:spcPts val="1200"/>
               </a:spcAft>
-              <a:defRPr sz="1300">
-                <a:solidFill>
-                  <a:srgbClr val="94A3B8"/>
-                </a:solidFill>
-                <a:latin typeface="Calibri"/>
-              </a:defRPr>
+              <a:buChar char="•"/>
             </a:pPr>
             <a:r>
-              <a:t>HOW BIG IS THE MARKET? [EDIT: add SAM — e.g. ~X,000 target accounts in EU+US with offshore suppliers] · [EDIT: attach $B TAM for supply-chain risk / control-tower software with source] · [EDIT: user seats or ARR pool you believe you can capture in 5 years]</a:t>
+              <a:rPr b="1" sz="1500">
+                <a:solidFill>
+                  <a:srgbClr val="22E3FF"/>
+                </a:solidFill>
+                <a:latin typeface="Calibri"/>
+              </a:rPr>
+              <a:t>How it’s tackled today</a:t>
+            </a:r>
+            <a:r>
+              <a:rPr b="0" sz="1500">
+                <a:solidFill>
+                  <a:srgbClr val="C8D4E8"/>
+                </a:solidFill>
+                <a:latin typeface="Calibri"/>
+              </a:rPr>
+              <a:t> — email chains, shared </a:t>
+            </a:r>
+            <a:r>
+              <a:rPr b="1" sz="1500">
+                <a:solidFill>
+                  <a:srgbClr val="22E3FF"/>
+                </a:solidFill>
+                <a:latin typeface="Calibri"/>
+              </a:rPr>
+              <a:t>Excel</a:t>
+            </a:r>
+            <a:r>
+              <a:rPr b="0" sz="1500">
+                <a:solidFill>
+                  <a:srgbClr val="C8D4E8"/>
+                </a:solidFill>
+                <a:latin typeface="Calibri"/>
+              </a:rPr>
+              <a:t> risk registers, and siloed spreadsheets; </a:t>
+            </a:r>
+            <a:r>
+              <a:rPr b="1" sz="1500">
+                <a:solidFill>
+                  <a:srgbClr val="22E3FF"/>
+                </a:solidFill>
+                <a:latin typeface="Calibri"/>
+              </a:rPr>
+              <a:t>no</a:t>
+            </a:r>
+            <a:r>
+              <a:rPr b="0" sz="1500">
+                <a:solidFill>
+                  <a:srgbClr val="C8D4E8"/>
+                </a:solidFill>
+                <a:latin typeface="Calibri"/>
+              </a:rPr>
+              <a:t> single live view across plants &amp; suppliers.</a:t>
+            </a:r>
+          </a:p>
+          <a:p>
+            <a:pPr lvl="1">
+              <a:lnSpc>
+                <a:spcPct val="110000"/>
+              </a:lnSpc>
+              <a:spcAft>
+                <a:spcPts val="600"/>
+              </a:spcAft>
+              <a:buChar char="•"/>
+            </a:pPr>
+            <a:r>
+              <a:rPr b="1" sz="1300">
+                <a:solidFill>
+                  <a:srgbClr val="22E3FF"/>
+                </a:solidFill>
+                <a:latin typeface="Calibri"/>
+              </a:rPr>
+              <a:t>~24–48h</a:t>
+            </a:r>
+            <a:r>
+              <a:rPr b="0" sz="1300">
+                <a:solidFill>
+                  <a:srgbClr val="C8D4E8"/>
+                </a:solidFill>
+                <a:latin typeface="Calibri"/>
+              </a:rPr>
+              <a:t> typical lag to align on exposure &amp; action — manual handoffs, not live signals. </a:t>
+            </a:r>
+            <a:r>
+              <a:rPr b="1" sz="1300">
+                <a:solidFill>
+                  <a:srgbClr val="22E3FF"/>
+                </a:solidFill>
+                <a:latin typeface="Calibri"/>
+              </a:rPr>
+              <a:t>Kinaxis</a:t>
+            </a:r>
+            <a:r>
+              <a:rPr b="0" sz="1300">
+                <a:solidFill>
+                  <a:srgbClr val="C8D4E8"/>
+                </a:solidFill>
+                <a:latin typeface="Calibri"/>
+              </a:rPr>
+              <a:t> research (</a:t>
+            </a:r>
+            <a:r>
+              <a:rPr b="1" sz="1300">
+                <a:solidFill>
+                  <a:srgbClr val="22E3FF"/>
+                </a:solidFill>
+                <a:latin typeface="Calibri"/>
+              </a:rPr>
+              <a:t>2024</a:t>
+            </a:r>
+            <a:r>
+              <a:rPr b="0" sz="1300">
+                <a:solidFill>
+                  <a:srgbClr val="C8D4E8"/>
+                </a:solidFill>
+                <a:latin typeface="Calibri"/>
+              </a:rPr>
+              <a:t>): </a:t>
+            </a:r>
+            <a:r>
+              <a:rPr b="1" sz="1300">
+                <a:solidFill>
+                  <a:srgbClr val="22E3FF"/>
+                </a:solidFill>
+                <a:latin typeface="Calibri"/>
+              </a:rPr>
+              <a:t>83%</a:t>
+            </a:r>
+            <a:r>
+              <a:rPr b="0" sz="1300">
+                <a:solidFill>
+                  <a:srgbClr val="C8D4E8"/>
+                </a:solidFill>
+                <a:latin typeface="Calibri"/>
+              </a:rPr>
+              <a:t> of supply chains </a:t>
+            </a:r>
+            <a:r>
+              <a:rPr b="1" sz="1300">
+                <a:solidFill>
+                  <a:srgbClr val="22E3FF"/>
+                </a:solidFill>
+                <a:latin typeface="Calibri"/>
+              </a:rPr>
+              <a:t>cannot</a:t>
+            </a:r>
+            <a:r>
+              <a:rPr b="0" sz="1300">
+                <a:solidFill>
+                  <a:srgbClr val="C8D4E8"/>
+                </a:solidFill>
+                <a:latin typeface="Calibri"/>
+              </a:rPr>
+              <a:t> respond to disruptions within </a:t>
+            </a:r>
+            <a:r>
+              <a:rPr b="1" sz="1300">
+                <a:solidFill>
+                  <a:srgbClr val="22E3FF"/>
+                </a:solidFill>
+                <a:latin typeface="Calibri"/>
+              </a:rPr>
+              <a:t>24 hours</a:t>
+            </a:r>
+            <a:r>
+              <a:rPr b="0" sz="1300">
+                <a:solidFill>
+                  <a:srgbClr val="C8D4E8"/>
+                </a:solidFill>
+                <a:latin typeface="Calibri"/>
+              </a:rPr>
+              <a:t>.</a:t>
             </a:r>
           </a:p>
           <a:p>
             <a:pPr>
+              <a:lnSpc>
+                <a:spcPct val="110000"/>
+              </a:lnSpc>
               <a:spcAft>
-                <a:spcPts val="800"/>
+                <a:spcPts val="1200"/>
               </a:spcAft>
-              <a:defRPr sz="1300">
-                <a:solidFill>
-                  <a:srgbClr val="94A3B8"/>
-                </a:solidFill>
-                <a:latin typeface="Calibri"/>
-              </a:defRPr>
+              <a:buChar char="•"/>
             </a:pPr>
             <a:r>
-              <a:t>HOW DO THEY SOLVE IT TODAY, AND WHY DOES THAT SUCK? Email chains, Google Alerts, shared Excel risk registers, and generic news dashboards. None of it is wired to their plants, suppliers, active shipments, or fleet positions, so leaders get noise, 24–48h lag, and no shared probability of impact. Enterprise GRC suites are heavy, slow to deploy, and tuned for audit—not daily ops.</a:t>
-            </a:r>
-          </a:p>
-          <a:p>
-            <a:pPr>
+              <a:rPr b="1" sz="1500">
+                <a:solidFill>
+                  <a:srgbClr val="22E3FF"/>
+                </a:solidFill>
+                <a:latin typeface="Calibri"/>
+              </a:rPr>
+              <a:t>Large EU+US pool</a:t>
+            </a:r>
+            <a:r>
+              <a:rPr b="0" sz="1500">
+                <a:solidFill>
+                  <a:srgbClr val="C8D4E8"/>
+                </a:solidFill>
+                <a:latin typeface="Calibri"/>
+              </a:rPr>
+              <a:t> — tens of thousands of addressable mid-market firms; multi‑$B risk / visibility software TAMs.</a:t>
+            </a:r>
+          </a:p>
+          <a:p>
+            <a:pPr lvl="1">
+              <a:lnSpc>
+                <a:spcPct val="110000"/>
+              </a:lnSpc>
               <a:spcAft>
-                <a:spcPts val="800"/>
+                <a:spcPts val="600"/>
               </a:spcAft>
-              <a:defRPr sz="1300">
-                <a:solidFill>
-                  <a:srgbClr val="94A3B8"/>
-                </a:solidFill>
-                <a:latin typeface="Calibri"/>
-              </a:defRPr>
+              <a:buChar char="•"/>
             </a:pPr>
             <a:r>
-              <a:t>Investors fund markets, not features. We are going after the gap between “headline chaos” and “actionable, portfolio-level risk.”</a:t>
+              <a:rPr b="1" sz="1300">
+                <a:solidFill>
+                  <a:srgbClr val="22E3FF"/>
+                </a:solidFill>
+                <a:latin typeface="Calibri"/>
+              </a:rPr>
+              <a:t>BMW</a:t>
+            </a:r>
+            <a:r>
+              <a:rPr b="0" sz="1300">
+                <a:solidFill>
+                  <a:srgbClr val="C8D4E8"/>
+                </a:solidFill>
+                <a:latin typeface="Calibri"/>
+              </a:rPr>
+              <a:t> — </a:t>
+            </a:r>
+            <a:r>
+              <a:rPr b="1" sz="1300">
+                <a:solidFill>
+                  <a:srgbClr val="22E3FF"/>
+                </a:solidFill>
+                <a:latin typeface="Calibri"/>
+              </a:rPr>
+              <a:t>Connected Supply Chain Cockpit</a:t>
+            </a:r>
+            <a:r>
+              <a:rPr b="0" sz="1300">
+                <a:solidFill>
+                  <a:srgbClr val="C8D4E8"/>
+                </a:solidFill>
+                <a:latin typeface="Calibri"/>
+              </a:rPr>
+              <a:t> for 40+ plants &amp; real-time material visibility (public implementation case studies).</a:t>
+            </a:r>
+          </a:p>
+          <a:p>
+            <a:pPr lvl="1">
+              <a:lnSpc>
+                <a:spcPct val="110000"/>
+              </a:lnSpc>
+              <a:spcAft>
+                <a:spcPts val="600"/>
+              </a:spcAft>
+              <a:buChar char="•"/>
+            </a:pPr>
+            <a:r>
+              <a:rPr b="1" sz="1300">
+                <a:solidFill>
+                  <a:srgbClr val="22E3FF"/>
+                </a:solidFill>
+                <a:latin typeface="Calibri"/>
+              </a:rPr>
+              <a:t>Siemens</a:t>
+            </a:r>
+            <a:r>
+              <a:rPr b="0" sz="1300">
+                <a:solidFill>
+                  <a:srgbClr val="C8D4E8"/>
+                </a:solidFill>
+                <a:latin typeface="Calibri"/>
+              </a:rPr>
+              <a:t> — </a:t>
+            </a:r>
+            <a:r>
+              <a:rPr b="1" sz="1300">
+                <a:solidFill>
+                  <a:srgbClr val="22E3FF"/>
+                </a:solidFill>
+                <a:latin typeface="Calibri"/>
+              </a:rPr>
+              <a:t>supply-chain control-tower</a:t>
+            </a:r>
+            <a:r>
+              <a:rPr b="0" sz="1300">
+                <a:solidFill>
+                  <a:srgbClr val="C8D4E8"/>
+                </a:solidFill>
+                <a:latin typeface="Calibri"/>
+              </a:rPr>
+              <a:t> / end-to-end visibility software &amp; white papers (industrial / CP&amp;R).</a:t>
+            </a:r>
+          </a:p>
+          <a:p>
+            <a:pPr lvl="1">
+              <a:lnSpc>
+                <a:spcPct val="110000"/>
+              </a:lnSpc>
+              <a:spcAft>
+                <a:spcPts val="600"/>
+              </a:spcAft>
+              <a:buChar char="•"/>
+            </a:pPr>
+            <a:r>
+              <a:rPr b="1" sz="1300">
+                <a:solidFill>
+                  <a:srgbClr val="22E3FF"/>
+                </a:solidFill>
+                <a:latin typeface="Calibri"/>
+              </a:rPr>
+              <a:t>P&amp;G</a:t>
+            </a:r>
+            <a:r>
+              <a:rPr b="0" sz="1300">
+                <a:solidFill>
+                  <a:srgbClr val="C8D4E8"/>
+                </a:solidFill>
+                <a:latin typeface="Calibri"/>
+              </a:rPr>
+              <a:t>, </a:t>
+            </a:r>
+            <a:r>
+              <a:rPr b="1" sz="1300">
+                <a:solidFill>
+                  <a:srgbClr val="22E3FF"/>
+                </a:solidFill>
+                <a:latin typeface="Calibri"/>
+              </a:rPr>
+              <a:t>Merck</a:t>
+            </a:r>
+            <a:r>
+              <a:rPr b="0" sz="1300">
+                <a:solidFill>
+                  <a:srgbClr val="C8D4E8"/>
+                </a:solidFill>
+                <a:latin typeface="Calibri"/>
+              </a:rPr>
+              <a:t>, </a:t>
+            </a:r>
+            <a:r>
+              <a:rPr b="1" sz="1300">
+                <a:solidFill>
+                  <a:srgbClr val="22E3FF"/>
+                </a:solidFill>
+                <a:latin typeface="Calibri"/>
+              </a:rPr>
+              <a:t>Castrol (BP)</a:t>
+            </a:r>
+            <a:r>
+              <a:rPr b="0" sz="1300">
+                <a:solidFill>
+                  <a:srgbClr val="C8D4E8"/>
+                </a:solidFill>
+                <a:latin typeface="Calibri"/>
+              </a:rPr>
+              <a:t> — named </a:t>
+            </a:r>
+            <a:r>
+              <a:rPr b="1" sz="1300">
+                <a:solidFill>
+                  <a:srgbClr val="22E3FF"/>
+                </a:solidFill>
+                <a:latin typeface="Calibri"/>
+              </a:rPr>
+              <a:t>Kinaxis</a:t>
+            </a:r>
+            <a:r>
+              <a:rPr b="0" sz="1300">
+                <a:solidFill>
+                  <a:srgbClr val="C8D4E8"/>
+                </a:solidFill>
+                <a:latin typeface="Calibri"/>
+              </a:rPr>
+              <a:t> customers for large-scale supply-chain planning &amp; transparency (vendor case studies / press).</a:t>
             </a:r>
           </a:p>
         </p:txBody>
@@ -3902,7 +5052,7 @@
             <a:avLst/>
           </a:prstGeom>
           <a:solidFill>
-            <a:srgbClr val="0A0F1C"/>
+            <a:srgbClr val="060812"/>
           </a:solidFill>
           <a:ln>
             <a:noFill/>
@@ -3937,15 +5087,15 @@
           <p:nvPr/>
         </p:nvSpPr>
         <p:spPr>
-          <a:xfrm>
-            <a:off x="0" y="0"/>
-            <a:ext cx="12191695" cy="109728"/>
+          <a:xfrm rot="660000">
+            <a:off x="6400800" y="-548640"/>
+            <a:ext cx="6583680" cy="8412480"/>
           </a:xfrm>
           <a:prstGeom prst="rect">
             <a:avLst/>
           </a:prstGeom>
           <a:solidFill>
-            <a:srgbClr val="22D3EE"/>
+            <a:srgbClr val="081022"/>
           </a:solidFill>
           <a:ln>
             <a:noFill/>
@@ -3975,95 +5125,23 @@
       </p:sp>
       <p:sp>
         <p:nvSpPr>
-          <p:cNvPr id="4" name="TextBox 3"/>
-          <p:cNvSpPr txBox="1"/>
+          <p:cNvPr id="4" name="Rectangle 3"/>
+          <p:cNvSpPr/>
           <p:nvPr/>
         </p:nvSpPr>
         <p:spPr>
           <a:xfrm>
-            <a:off x="502920" y="411480"/>
-            <a:ext cx="11185855" cy="320040"/>
+            <a:off x="7635240" y="228600"/>
+            <a:ext cx="54864" cy="6400800"/>
           </a:xfrm>
           <a:prstGeom prst="rect">
             <a:avLst/>
           </a:prstGeom>
-          <a:noFill/>
-        </p:spPr>
-        <p:txBody>
-          <a:bodyPr wrap="square" anchor="t">
-            <a:noAutofit/>
-          </a:bodyPr>
-          <a:lstStyle/>
-          <a:p>
-            <a:pPr algn="l"/>
-            <a:r>
-              <a:rPr sz="1000" b="1">
-                <a:solidFill>
-                  <a:srgbClr val="22D3EE"/>
-                </a:solidFill>
-                <a:latin typeface="Consolas"/>
-              </a:rPr>
-              <a:t>SLIDE 2</a:t>
-            </a:r>
-          </a:p>
-        </p:txBody>
-      </p:sp>
-      <p:sp>
-        <p:nvSpPr>
-          <p:cNvPr id="5" name="TextBox 4"/>
-          <p:cNvSpPr txBox="1"/>
-          <p:nvPr/>
-        </p:nvSpPr>
-        <p:spPr>
-          <a:xfrm>
-            <a:off x="502920" y="777240"/>
-            <a:ext cx="11185855" cy="822960"/>
-          </a:xfrm>
-          <a:prstGeom prst="rect">
-            <a:avLst/>
-          </a:prstGeom>
-          <a:noFill/>
-        </p:spPr>
-        <p:txBody>
-          <a:bodyPr wrap="square" anchor="t">
-            <a:noAutofit/>
-          </a:bodyPr>
-          <a:lstStyle/>
-          <a:p>
-            <a:pPr algn="l"/>
-            <a:r>
-              <a:rPr sz="2600" b="1">
-                <a:solidFill>
-                  <a:srgbClr val="FFFFFF"/>
-                </a:solidFill>
-                <a:latin typeface="Calibri Light"/>
-              </a:rPr>
-              <a:t>YOUR SOLUTION</a:t>
-            </a:r>
-          </a:p>
-        </p:txBody>
-      </p:sp>
-      <p:sp>
-        <p:nvSpPr>
-          <p:cNvPr id="6" name="Rounded Rectangle 5"/>
-          <p:cNvSpPr/>
-          <p:nvPr/>
-        </p:nvSpPr>
-        <p:spPr>
-          <a:xfrm>
-            <a:off x="502920" y="1691640"/>
-            <a:ext cx="11185855" cy="4663440"/>
-          </a:xfrm>
-          <a:prstGeom prst="roundRect">
-            <a:avLst/>
-          </a:prstGeom>
           <a:solidFill>
-            <a:srgbClr val="1E293B"/>
+            <a:srgbClr val="FF2D95"/>
           </a:solidFill>
-          <a:ln w="12700">
-            <a:solidFill>
-              <a:srgbClr val="1E293B"/>
-            </a:solidFill>
+          <a:ln>
+            <a:noFill/>
           </a:ln>
         </p:spPr>
         <p:style>
@@ -4090,14 +5168,143 @@
       </p:sp>
       <p:sp>
         <p:nvSpPr>
-          <p:cNvPr id="7" name="TextBox 6"/>
+          <p:cNvPr id="5" name="Rectangle 4"/>
+          <p:cNvSpPr/>
+          <p:nvPr/>
+        </p:nvSpPr>
+        <p:spPr>
+          <a:xfrm>
+            <a:off x="7790688" y="228600"/>
+            <a:ext cx="54864" cy="6400800"/>
+          </a:xfrm>
+          <a:prstGeom prst="rect">
+            <a:avLst/>
+          </a:prstGeom>
+          <a:solidFill>
+            <a:srgbClr val="22E3FF"/>
+          </a:solidFill>
+          <a:ln>
+            <a:noFill/>
+          </a:ln>
+        </p:spPr>
+        <p:style>
+          <a:lnRef idx="1">
+            <a:schemeClr val="accent1"/>
+          </a:lnRef>
+          <a:fillRef idx="3">
+            <a:schemeClr val="accent1"/>
+          </a:fillRef>
+          <a:effectRef idx="2">
+            <a:schemeClr val="accent1"/>
+          </a:effectRef>
+          <a:fontRef idx="minor">
+            <a:schemeClr val="lt1"/>
+          </a:fontRef>
+        </p:style>
+        <p:txBody>
+          <a:bodyPr rtlCol="0" anchor="ctr"/>
+          <a:lstStyle/>
+          <a:p>
+            <a:pPr algn="ctr"/>
+          </a:p>
+        </p:txBody>
+      </p:sp>
+      <p:sp>
+        <p:nvSpPr>
+          <p:cNvPr id="6" name="Rectangle 5"/>
+          <p:cNvSpPr/>
+          <p:nvPr/>
+        </p:nvSpPr>
+        <p:spPr>
+          <a:xfrm>
+            <a:off x="0" y="0"/>
+            <a:ext cx="12191695" cy="164592"/>
+          </a:xfrm>
+          <a:prstGeom prst="rect">
+            <a:avLst/>
+          </a:prstGeom>
+          <a:solidFill>
+            <a:srgbClr val="22E3FF"/>
+          </a:solidFill>
+          <a:ln>
+            <a:noFill/>
+          </a:ln>
+        </p:spPr>
+        <p:style>
+          <a:lnRef idx="1">
+            <a:schemeClr val="accent1"/>
+          </a:lnRef>
+          <a:fillRef idx="3">
+            <a:schemeClr val="accent1"/>
+          </a:fillRef>
+          <a:effectRef idx="2">
+            <a:schemeClr val="accent1"/>
+          </a:effectRef>
+          <a:fontRef idx="minor">
+            <a:schemeClr val="lt1"/>
+          </a:fontRef>
+        </p:style>
+        <p:txBody>
+          <a:bodyPr rtlCol="0" anchor="ctr"/>
+          <a:lstStyle/>
+          <a:p>
+            <a:pPr algn="ctr"/>
+          </a:p>
+        </p:txBody>
+      </p:sp>
+      <p:sp>
+        <p:nvSpPr>
+          <p:cNvPr id="7" name="Rectangle 6"/>
+          <p:cNvSpPr/>
+          <p:nvPr/>
+        </p:nvSpPr>
+        <p:spPr>
+          <a:xfrm>
+            <a:off x="9631375" y="0"/>
+            <a:ext cx="2560320" cy="164592"/>
+          </a:xfrm>
+          <a:prstGeom prst="rect">
+            <a:avLst/>
+          </a:prstGeom>
+          <a:solidFill>
+            <a:srgbClr val="CCFF00"/>
+          </a:solidFill>
+          <a:ln>
+            <a:noFill/>
+          </a:ln>
+        </p:spPr>
+        <p:style>
+          <a:lnRef idx="1">
+            <a:schemeClr val="accent1"/>
+          </a:lnRef>
+          <a:fillRef idx="3">
+            <a:schemeClr val="accent1"/>
+          </a:fillRef>
+          <a:effectRef idx="2">
+            <a:schemeClr val="accent1"/>
+          </a:effectRef>
+          <a:fontRef idx="minor">
+            <a:schemeClr val="lt1"/>
+          </a:fontRef>
+        </p:style>
+        <p:txBody>
+          <a:bodyPr rtlCol="0" anchor="ctr"/>
+          <a:lstStyle/>
+          <a:p>
+            <a:pPr algn="ctr"/>
+          </a:p>
+        </p:txBody>
+      </p:sp>
+      <p:sp>
+        <p:nvSpPr>
+          <p:cNvPr id="8" name="TextBox 7"/>
           <p:cNvSpPr txBox="1"/>
           <p:nvPr/>
         </p:nvSpPr>
         <p:spPr>
           <a:xfrm>
-            <a:off x="822960" y="2011680"/>
-            <a:ext cx="10545775" cy="4160520"/>
+            <a:off x="502920" y="347472"/>
+            <a:ext cx="11185855" cy="365760"/>
           </a:xfrm>
           <a:prstGeom prst="rect">
             <a:avLst/>
@@ -4105,56 +5312,693 @@
           <a:noFill/>
         </p:spPr>
         <p:txBody>
+          <a:bodyPr wrap="square" anchor="t">
+            <a:noAutofit/>
+          </a:bodyPr>
+          <a:lstStyle/>
+          <a:p>
+            <a:pPr algn="l"/>
+            <a:r>
+              <a:rPr sz="1100" b="1">
+                <a:solidFill>
+                  <a:srgbClr val="CCFF00"/>
+                </a:solidFill>
+                <a:latin typeface="Consolas"/>
+              </a:rPr>
+              <a:t>2 / 4</a:t>
+            </a:r>
+          </a:p>
+        </p:txBody>
+      </p:sp>
+      <p:sp>
+        <p:nvSpPr>
+          <p:cNvPr id="9" name="TextBox 8"/>
+          <p:cNvSpPr txBox="1"/>
+          <p:nvPr/>
+        </p:nvSpPr>
+        <p:spPr>
+          <a:xfrm>
+            <a:off x="502920" y="713232"/>
+            <a:ext cx="11185855" cy="914400"/>
+          </a:xfrm>
+          <a:prstGeom prst="rect">
+            <a:avLst/>
+          </a:prstGeom>
+          <a:noFill/>
+        </p:spPr>
+        <p:txBody>
+          <a:bodyPr wrap="square" anchor="t">
+            <a:noAutofit/>
+          </a:bodyPr>
+          <a:lstStyle/>
+          <a:p>
+            <a:pPr algn="l"/>
+            <a:r>
+              <a:rPr sz="3400" b="1">
+                <a:solidFill>
+                  <a:srgbClr val="FFFFFF"/>
+                </a:solidFill>
+                <a:latin typeface="Calibri Light"/>
+              </a:rPr>
+              <a:t>THE SOLUTION — RISCON</a:t>
+            </a:r>
+          </a:p>
+        </p:txBody>
+      </p:sp>
+      <p:sp>
+        <p:nvSpPr>
+          <p:cNvPr id="10" name="Rectangle 9"/>
+          <p:cNvSpPr/>
+          <p:nvPr/>
+        </p:nvSpPr>
+        <p:spPr>
+          <a:xfrm>
+            <a:off x="502920" y="1719072"/>
+            <a:ext cx="109728" cy="4636008"/>
+          </a:xfrm>
+          <a:prstGeom prst="rect">
+            <a:avLst/>
+          </a:prstGeom>
+          <a:solidFill>
+            <a:srgbClr val="FF2D95"/>
+          </a:solidFill>
+          <a:ln>
+            <a:noFill/>
+          </a:ln>
+        </p:spPr>
+        <p:style>
+          <a:lnRef idx="1">
+            <a:schemeClr val="accent1"/>
+          </a:lnRef>
+          <a:fillRef idx="3">
+            <a:schemeClr val="accent1"/>
+          </a:fillRef>
+          <a:effectRef idx="2">
+            <a:schemeClr val="accent1"/>
+          </a:effectRef>
+          <a:fontRef idx="minor">
+            <a:schemeClr val="lt1"/>
+          </a:fontRef>
+        </p:style>
+        <p:txBody>
+          <a:bodyPr rtlCol="0" anchor="ctr"/>
+          <a:lstStyle/>
+          <a:p>
+            <a:pPr algn="ctr"/>
+          </a:p>
+        </p:txBody>
+      </p:sp>
+      <p:sp>
+        <p:nvSpPr>
+          <p:cNvPr id="11" name="Rounded Rectangle 10"/>
+          <p:cNvSpPr/>
+          <p:nvPr/>
+        </p:nvSpPr>
+        <p:spPr>
+          <a:xfrm>
+            <a:off x="502920" y="1719072"/>
+            <a:ext cx="11185855" cy="4636008"/>
+          </a:xfrm>
+          <a:prstGeom prst="roundRect">
+            <a:avLst/>
+          </a:prstGeom>
+          <a:solidFill>
+            <a:srgbClr val="12182A"/>
+          </a:solidFill>
+          <a:ln w="31750">
+            <a:solidFill>
+              <a:srgbClr val="22E3FF"/>
+            </a:solidFill>
+          </a:ln>
+        </p:spPr>
+        <p:style>
+          <a:lnRef idx="1">
+            <a:schemeClr val="accent1"/>
+          </a:lnRef>
+          <a:fillRef idx="3">
+            <a:schemeClr val="accent1"/>
+          </a:fillRef>
+          <a:effectRef idx="2">
+            <a:schemeClr val="accent1"/>
+          </a:effectRef>
+          <a:fontRef idx="minor">
+            <a:schemeClr val="lt1"/>
+          </a:fontRef>
+        </p:style>
+        <p:txBody>
+          <a:bodyPr rtlCol="0" anchor="ctr"/>
+          <a:lstStyle/>
+          <a:p>
+            <a:pPr algn="ctr"/>
+          </a:p>
+        </p:txBody>
+      </p:sp>
+      <p:sp>
+        <p:nvSpPr>
+          <p:cNvPr id="12" name="TextBox 11"/>
+          <p:cNvSpPr txBox="1"/>
+          <p:nvPr/>
+        </p:nvSpPr>
+        <p:spPr>
+          <a:xfrm>
+            <a:off x="886968" y="2066544"/>
+            <a:ext cx="10472623" cy="4087368"/>
+          </a:xfrm>
+          <a:prstGeom prst="rect">
+            <a:avLst/>
+          </a:prstGeom>
+          <a:noFill/>
+        </p:spPr>
+        <p:txBody>
           <a:bodyPr wrap="square">
             <a:spAutoFit/>
           </a:bodyPr>
           <a:lstStyle/>
           <a:p>
             <a:pPr>
+              <a:lnSpc>
+                <a:spcPct val="110000"/>
+              </a:lnSpc>
               <a:spcAft>
-                <a:spcPts val="800"/>
+                <a:spcPts val="1200"/>
               </a:spcAft>
-              <a:defRPr sz="1400">
-                <a:solidFill>
-                  <a:srgbClr val="94A3B8"/>
-                </a:solidFill>
-                <a:latin typeface="Calibri"/>
-              </a:defRPr>
+              <a:buChar char="•"/>
             </a:pPr>
             <a:r>
-              <a:t>ONE SENTENCE: Riscon is an AI-native supply-chain risk cockpit that turns maritime and logistics news into structured signals, scores them against your enterprise footprint and fleet context, and pushes live probability updates to operators.</a:t>
+              <a:rPr b="1" sz="1400">
+                <a:solidFill>
+                  <a:srgbClr val="22E3FF"/>
+                </a:solidFill>
+                <a:latin typeface="Calibri"/>
+              </a:rPr>
+              <a:t>Our wedge</a:t>
+            </a:r>
+            <a:r>
+              <a:rPr b="0" sz="1400">
+                <a:solidFill>
+                  <a:srgbClr val="C8D4E8"/>
+                </a:solidFill>
+                <a:latin typeface="Calibri"/>
+              </a:rPr>
+              <a:t> — </a:t>
+            </a:r>
+            <a:r>
+              <a:rPr b="1" sz="1400">
+                <a:solidFill>
+                  <a:srgbClr val="22E3FF"/>
+                </a:solidFill>
+                <a:latin typeface="Calibri"/>
+              </a:rPr>
+              <a:t>headline noise → portfolio-level risk</a:t>
+            </a:r>
+            <a:r>
+              <a:rPr b="0" sz="1400">
+                <a:solidFill>
+                  <a:srgbClr val="C8D4E8"/>
+                </a:solidFill>
+                <a:latin typeface="Calibri"/>
+              </a:rPr>
+              <a:t> on one live board...</a:t>
             </a:r>
           </a:p>
           <a:p>
             <a:pPr>
+              <a:lnSpc>
+                <a:spcPct val="110000"/>
+              </a:lnSpc>
               <a:spcAft>
-                <a:spcPts val="800"/>
+                <a:spcPts val="1200"/>
               </a:spcAft>
-              <a:defRPr sz="1400">
-                <a:solidFill>
-                  <a:srgbClr val="94A3B8"/>
-                </a:solidFill>
-                <a:latin typeface="Calibri"/>
-              </a:defRPr>
+              <a:buChar char="•"/>
             </a:pPr>
             <a:r>
-              <a:t>WHY ~10× BETTER THAN ALTERNATIVES? Versus alerts + spreadsheets: same-day structured signals tied to sites and suppliers, not detached headlines. Versus legacy resilience suites: faster time-to-value (Docker-ready microservices, API-first), focused UX for the control tower, and continuous scoring instead of quarterly manual assessments. Versus generic LLM chat: productized pipelines, caching, and WebSocket delivery built for ops, not ad-hoc prompts.</a:t>
+              <a:rPr b="1" sz="1400">
+                <a:solidFill>
+                  <a:srgbClr val="22E3FF"/>
+                </a:solidFill>
+                <a:latin typeface="Calibri"/>
+              </a:rPr>
+              <a:t>What Riscon is</a:t>
+            </a:r>
+            <a:r>
+              <a:rPr b="0" sz="1400">
+                <a:solidFill>
+                  <a:srgbClr val="C8D4E8"/>
+                </a:solidFill>
+                <a:latin typeface="Calibri"/>
+              </a:rPr>
+              <a:t> — </a:t>
+            </a:r>
+            <a:r>
+              <a:rPr b="1" sz="1400">
+                <a:solidFill>
+                  <a:srgbClr val="22E3FF"/>
+                </a:solidFill>
+                <a:latin typeface="Calibri"/>
+              </a:rPr>
+              <a:t>Live supply-chain risk cockpit:</a:t>
+            </a:r>
+            <a:r>
+              <a:rPr b="0" sz="1400">
+                <a:solidFill>
+                  <a:srgbClr val="C8D4E8"/>
+                </a:solidFill>
+                <a:latin typeface="Calibri"/>
+              </a:rPr>
+              <a:t> AI </a:t>
+            </a:r>
+            <a:r>
+              <a:rPr b="1" sz="1400">
+                <a:solidFill>
+                  <a:srgbClr val="22E3FF"/>
+                </a:solidFill>
+                <a:latin typeface="Calibri"/>
+              </a:rPr>
+              <a:t>classifies maritime &amp; logistics news in real time</a:t>
+            </a:r>
+            <a:r>
+              <a:rPr b="0" sz="1400">
+                <a:solidFill>
+                  <a:srgbClr val="C8D4E8"/>
+                </a:solidFill>
+                <a:latin typeface="Calibri"/>
+              </a:rPr>
+              <a:t>, </a:t>
+            </a:r>
+            <a:r>
+              <a:rPr b="1" sz="1400">
+                <a:solidFill>
+                  <a:srgbClr val="22E3FF"/>
+                </a:solidFill>
+                <a:latin typeface="Calibri"/>
+              </a:rPr>
+              <a:t>fuses</a:t>
+            </a:r>
+            <a:r>
+              <a:rPr b="0" sz="1400">
+                <a:solidFill>
+                  <a:srgbClr val="C8D4E8"/>
+                </a:solidFill>
+                <a:latin typeface="Calibri"/>
+              </a:rPr>
+              <a:t> it with </a:t>
+            </a:r>
+            <a:r>
+              <a:rPr b="1" sz="1400">
+                <a:solidFill>
+                  <a:srgbClr val="22E3FF"/>
+                </a:solidFill>
+                <a:latin typeface="Calibri"/>
+              </a:rPr>
+              <a:t>your</a:t>
+            </a:r>
+            <a:r>
+              <a:rPr b="0" sz="1400">
+                <a:solidFill>
+                  <a:srgbClr val="C8D4E8"/>
+                </a:solidFill>
+                <a:latin typeface="Calibri"/>
+              </a:rPr>
+              <a:t> plants, suppliers, and </a:t>
+            </a:r>
+            <a:r>
+              <a:rPr b="1" sz="1400">
+                <a:solidFill>
+                  <a:srgbClr val="22E3FF"/>
+                </a:solidFill>
+                <a:latin typeface="Calibri"/>
+              </a:rPr>
+              <a:t>fleet context</a:t>
+            </a:r>
+            <a:r>
+              <a:rPr b="0" sz="1400">
+                <a:solidFill>
+                  <a:srgbClr val="C8D4E8"/>
+                </a:solidFill>
+                <a:latin typeface="Calibri"/>
+              </a:rPr>
+              <a:t>, and </a:t>
+            </a:r>
+            <a:r>
+              <a:rPr b="1" sz="1400">
+                <a:solidFill>
+                  <a:srgbClr val="22E3FF"/>
+                </a:solidFill>
+                <a:latin typeface="Calibri"/>
+              </a:rPr>
+              <a:t>streams probability</a:t>
+            </a:r>
+            <a:r>
+              <a:rPr b="0" sz="1400">
+                <a:solidFill>
+                  <a:srgbClr val="C8D4E8"/>
+                </a:solidFill>
+                <a:latin typeface="Calibri"/>
+              </a:rPr>
+              <a:t> to the control-tower UI (</a:t>
+            </a:r>
+            <a:r>
+              <a:rPr b="1" sz="1400">
+                <a:solidFill>
+                  <a:srgbClr val="22E3FF"/>
+                </a:solidFill>
+                <a:latin typeface="Calibri"/>
+              </a:rPr>
+              <a:t>WebSockets</a:t>
+            </a:r>
+            <a:r>
+              <a:rPr b="0" sz="1400">
+                <a:solidFill>
+                  <a:srgbClr val="C8D4E8"/>
+                </a:solidFill>
+                <a:latin typeface="Calibri"/>
+              </a:rPr>
+              <a:t> — not weekly Excel packs).</a:t>
             </a:r>
           </a:p>
           <a:p>
             <a:pPr>
+              <a:lnSpc>
+                <a:spcPct val="110000"/>
+              </a:lnSpc>
               <a:spcAft>
-                <a:spcPts val="800"/>
+                <a:spcPts val="1200"/>
               </a:spcAft>
-              <a:defRPr sz="1400">
-                <a:solidFill>
-                  <a:srgbClr val="94A3B8"/>
-                </a:solidFill>
-                <a:latin typeface="Calibri"/>
-              </a:defRPr>
+              <a:buChar char="•"/>
             </a:pPr>
             <a:r>
-              <a:t>Keep the demo tight: one screen that shows news → probability → map. That is enough to “get it.”</a:t>
+              <a:rPr b="1" sz="1400">
+                <a:solidFill>
+                  <a:srgbClr val="22E3FF"/>
+                </a:solidFill>
+                <a:latin typeface="Calibri"/>
+              </a:rPr>
+              <a:t>Customer gains</a:t>
+            </a:r>
+            <a:r>
+              <a:rPr b="0" sz="1400">
+                <a:solidFill>
+                  <a:srgbClr val="C8D4E8"/>
+                </a:solidFill>
+                <a:latin typeface="Calibri"/>
+              </a:rPr>
+              <a:t> — why buyers care:</a:t>
+            </a:r>
+          </a:p>
+          <a:p>
+            <a:pPr lvl="1">
+              <a:lnSpc>
+                <a:spcPct val="110000"/>
+              </a:lnSpc>
+              <a:spcAft>
+                <a:spcPts val="600"/>
+              </a:spcAft>
+              <a:buChar char="•"/>
+            </a:pPr>
+            <a:r>
+              <a:rPr b="1" sz="1200">
+                <a:solidFill>
+                  <a:srgbClr val="22E3FF"/>
+                </a:solidFill>
+                <a:latin typeface="Calibri"/>
+              </a:rPr>
+              <a:t>Speed</a:t>
+            </a:r>
+            <a:r>
+              <a:rPr b="0" sz="1200">
+                <a:solidFill>
+                  <a:srgbClr val="C8D4E8"/>
+                </a:solidFill>
+                <a:latin typeface="Calibri"/>
+              </a:rPr>
+              <a:t> — </a:t>
+            </a:r>
+            <a:r>
+              <a:rPr b="1" sz="1200">
+                <a:solidFill>
+                  <a:srgbClr val="22E3FF"/>
+                </a:solidFill>
+                <a:latin typeface="Calibri"/>
+              </a:rPr>
+              <a:t>same-day</a:t>
+            </a:r>
+            <a:r>
+              <a:rPr b="0" sz="1200">
+                <a:solidFill>
+                  <a:srgbClr val="C8D4E8"/>
+                </a:solidFill>
+                <a:latin typeface="Calibri"/>
+              </a:rPr>
+              <a:t>, </a:t>
+            </a:r>
+            <a:r>
+              <a:rPr b="1" sz="1200">
+                <a:solidFill>
+                  <a:srgbClr val="22E3FF"/>
+                </a:solidFill>
+                <a:latin typeface="Calibri"/>
+              </a:rPr>
+              <a:t>site-aware</a:t>
+            </a:r>
+            <a:r>
+              <a:rPr b="0" sz="1200">
+                <a:solidFill>
+                  <a:srgbClr val="C8D4E8"/>
+                </a:solidFill>
+                <a:latin typeface="Calibri"/>
+              </a:rPr>
+              <a:t> signals vs. </a:t>
+            </a:r>
+            <a:r>
+              <a:rPr b="1" sz="1200">
+                <a:solidFill>
+                  <a:srgbClr val="22E3FF"/>
+                </a:solidFill>
+                <a:latin typeface="Calibri"/>
+              </a:rPr>
+              <a:t>24–48h</a:t>
+            </a:r>
+            <a:r>
+              <a:rPr b="0" sz="1200">
+                <a:solidFill>
+                  <a:srgbClr val="C8D4E8"/>
+                </a:solidFill>
+                <a:latin typeface="Calibri"/>
+              </a:rPr>
+              <a:t> email / spreadsheet coordination.</a:t>
+            </a:r>
+          </a:p>
+          <a:p>
+            <a:pPr lvl="1">
+              <a:lnSpc>
+                <a:spcPct val="110000"/>
+              </a:lnSpc>
+              <a:spcAft>
+                <a:spcPts val="600"/>
+              </a:spcAft>
+              <a:buChar char="•"/>
+            </a:pPr>
+            <a:r>
+              <a:rPr b="1" sz="1200">
+                <a:solidFill>
+                  <a:srgbClr val="22E3FF"/>
+                </a:solidFill>
+                <a:latin typeface="Calibri"/>
+              </a:rPr>
+              <a:t>Clarity</a:t>
+            </a:r>
+            <a:r>
+              <a:rPr b="0" sz="1200">
+                <a:solidFill>
+                  <a:srgbClr val="C8D4E8"/>
+                </a:solidFill>
+                <a:latin typeface="Calibri"/>
+              </a:rPr>
+              <a:t> — </a:t>
+            </a:r>
+            <a:r>
+              <a:rPr b="1" sz="1200">
+                <a:solidFill>
+                  <a:srgbClr val="22E3FF"/>
+                </a:solidFill>
+                <a:latin typeface="Calibri"/>
+              </a:rPr>
+              <a:t>which plants &amp; suppliers</a:t>
+            </a:r>
+            <a:r>
+              <a:rPr b="0" sz="1200">
+                <a:solidFill>
+                  <a:srgbClr val="C8D4E8"/>
+                </a:solidFill>
+                <a:latin typeface="Calibri"/>
+              </a:rPr>
+              <a:t> are in the risk zone, not a </a:t>
+            </a:r>
+            <a:r>
+              <a:rPr b="1" sz="1200">
+                <a:solidFill>
+                  <a:srgbClr val="22E3FF"/>
+                </a:solidFill>
+                <a:latin typeface="Calibri"/>
+              </a:rPr>
+              <a:t>generic</a:t>
+            </a:r>
+            <a:r>
+              <a:rPr b="0" sz="1200">
+                <a:solidFill>
+                  <a:srgbClr val="C8D4E8"/>
+                </a:solidFill>
+                <a:latin typeface="Calibri"/>
+              </a:rPr>
+              <a:t> news feed.</a:t>
+            </a:r>
+          </a:p>
+          <a:p>
+            <a:pPr lvl="1">
+              <a:lnSpc>
+                <a:spcPct val="110000"/>
+              </a:lnSpc>
+              <a:spcAft>
+                <a:spcPts val="600"/>
+              </a:spcAft>
+              <a:buChar char="•"/>
+            </a:pPr>
+            <a:r>
+              <a:rPr b="1" sz="1200">
+                <a:solidFill>
+                  <a:srgbClr val="22E3FF"/>
+                </a:solidFill>
+                <a:latin typeface="Calibri"/>
+              </a:rPr>
+              <a:t>Alignment</a:t>
+            </a:r>
+            <a:r>
+              <a:rPr b="0" sz="1200">
+                <a:solidFill>
+                  <a:srgbClr val="C8D4E8"/>
+                </a:solidFill>
+                <a:latin typeface="Calibri"/>
+              </a:rPr>
+              <a:t> — </a:t>
+            </a:r>
+            <a:r>
+              <a:rPr b="1" sz="1200">
+                <a:solidFill>
+                  <a:srgbClr val="22E3FF"/>
+                </a:solidFill>
+                <a:latin typeface="Calibri"/>
+              </a:rPr>
+              <a:t>one map + dashboard</a:t>
+            </a:r>
+            <a:r>
+              <a:rPr b="0" sz="1200">
+                <a:solidFill>
+                  <a:srgbClr val="C8D4E8"/>
+                </a:solidFill>
+                <a:latin typeface="Calibri"/>
+              </a:rPr>
+              <a:t> for </a:t>
+            </a:r>
+            <a:r>
+              <a:rPr b="1" sz="1200">
+                <a:solidFill>
+                  <a:srgbClr val="22E3FF"/>
+                </a:solidFill>
+                <a:latin typeface="Calibri"/>
+              </a:rPr>
+              <a:t>ops, procurement, leadership</a:t>
+            </a:r>
+            <a:r>
+              <a:rPr b="0" sz="1200">
+                <a:solidFill>
+                  <a:srgbClr val="C8D4E8"/>
+                </a:solidFill>
+                <a:latin typeface="Calibri"/>
+              </a:rPr>
+              <a:t> — fewer crisis calls, faster decisions.</a:t>
+            </a:r>
+          </a:p>
+          <a:p>
+            <a:pPr>
+              <a:lnSpc>
+                <a:spcPct val="110000"/>
+              </a:lnSpc>
+              <a:spcAft>
+                <a:spcPts val="1200"/>
+              </a:spcAft>
+              <a:buChar char="•"/>
+            </a:pPr>
+            <a:r>
+              <a:rPr b="1" sz="1400">
+                <a:solidFill>
+                  <a:srgbClr val="22E3FF"/>
+                </a:solidFill>
+                <a:latin typeface="Calibri"/>
+              </a:rPr>
+              <a:t>Proof in the demo</a:t>
+            </a:r>
+            <a:r>
+              <a:rPr b="0" sz="1400">
+                <a:solidFill>
+                  <a:srgbClr val="C8D4E8"/>
+                </a:solidFill>
+                <a:latin typeface="Calibri"/>
+              </a:rPr>
+              <a:t> — </a:t>
+            </a:r>
+            <a:r>
+              <a:rPr b="1" sz="1400">
+                <a:solidFill>
+                  <a:srgbClr val="22E3FF"/>
+                </a:solidFill>
+                <a:latin typeface="Calibri"/>
+              </a:rPr>
+              <a:t>news → probability → map</a:t>
+            </a:r>
+            <a:r>
+              <a:rPr b="0" sz="1400">
+                <a:solidFill>
+                  <a:srgbClr val="C8D4E8"/>
+                </a:solidFill>
+                <a:latin typeface="Calibri"/>
+              </a:rPr>
+              <a:t> in one screen · </a:t>
+            </a:r>
+            <a:r>
+              <a:rPr b="1" sz="1400">
+                <a:solidFill>
+                  <a:srgbClr val="22E3FF"/>
+                </a:solidFill>
+                <a:latin typeface="Calibri"/>
+              </a:rPr>
+              <a:t>Docker</a:t>
+            </a:r>
+            <a:r>
+              <a:rPr b="0" sz="1400">
+                <a:solidFill>
+                  <a:srgbClr val="C8D4E8"/>
+                </a:solidFill>
+                <a:latin typeface="Calibri"/>
+              </a:rPr>
+              <a:t> microservices (Spring, React, agents) for </a:t>
+            </a:r>
+            <a:r>
+              <a:rPr b="1" sz="1400">
+                <a:solidFill>
+                  <a:srgbClr val="22E3FF"/>
+                </a:solidFill>
+                <a:latin typeface="Calibri"/>
+              </a:rPr>
+              <a:t>fast pilots</a:t>
+            </a:r>
+            <a:r>
+              <a:rPr b="0" sz="1400">
+                <a:solidFill>
+                  <a:srgbClr val="C8D4E8"/>
+                </a:solidFill>
+                <a:latin typeface="Calibri"/>
+              </a:rPr>
+              <a:t>.</a:t>
             </a:r>
           </a:p>
         </p:txBody>
@@ -4192,7 +6036,7 @@
             <a:avLst/>
           </a:prstGeom>
           <a:solidFill>
-            <a:srgbClr val="0A0F1C"/>
+            <a:srgbClr val="060812"/>
           </a:solidFill>
           <a:ln>
             <a:noFill/>
@@ -4227,15 +6071,15 @@
           <p:nvPr/>
         </p:nvSpPr>
         <p:spPr>
-          <a:xfrm>
-            <a:off x="0" y="0"/>
-            <a:ext cx="12191695" cy="109728"/>
+          <a:xfrm rot="660000">
+            <a:off x="6400800" y="-548640"/>
+            <a:ext cx="6583680" cy="8412480"/>
           </a:xfrm>
           <a:prstGeom prst="rect">
             <a:avLst/>
           </a:prstGeom>
           <a:solidFill>
-            <a:srgbClr val="22D3EE"/>
+            <a:srgbClr val="081022"/>
           </a:solidFill>
           <a:ln>
             <a:noFill/>
@@ -4265,95 +6109,23 @@
       </p:sp>
       <p:sp>
         <p:nvSpPr>
-          <p:cNvPr id="4" name="TextBox 3"/>
-          <p:cNvSpPr txBox="1"/>
+          <p:cNvPr id="4" name="Rectangle 3"/>
+          <p:cNvSpPr/>
           <p:nvPr/>
         </p:nvSpPr>
         <p:spPr>
           <a:xfrm>
-            <a:off x="502920" y="411480"/>
-            <a:ext cx="11185855" cy="320040"/>
+            <a:off x="7635240" y="228600"/>
+            <a:ext cx="54864" cy="6400800"/>
           </a:xfrm>
           <a:prstGeom prst="rect">
             <a:avLst/>
           </a:prstGeom>
-          <a:noFill/>
-        </p:spPr>
-        <p:txBody>
-          <a:bodyPr wrap="square" anchor="t">
-            <a:noAutofit/>
-          </a:bodyPr>
-          <a:lstStyle/>
-          <a:p>
-            <a:pPr algn="l"/>
-            <a:r>
-              <a:rPr sz="1000" b="1">
-                <a:solidFill>
-                  <a:srgbClr val="22D3EE"/>
-                </a:solidFill>
-                <a:latin typeface="Consolas"/>
-              </a:rPr>
-              <a:t>SLIDE 3</a:t>
-            </a:r>
-          </a:p>
-        </p:txBody>
-      </p:sp>
-      <p:sp>
-        <p:nvSpPr>
-          <p:cNvPr id="5" name="TextBox 4"/>
-          <p:cNvSpPr txBox="1"/>
-          <p:nvPr/>
-        </p:nvSpPr>
-        <p:spPr>
-          <a:xfrm>
-            <a:off x="502920" y="777240"/>
-            <a:ext cx="11185855" cy="822960"/>
-          </a:xfrm>
-          <a:prstGeom prst="rect">
-            <a:avLst/>
-          </a:prstGeom>
-          <a:noFill/>
-        </p:spPr>
-        <p:txBody>
-          <a:bodyPr wrap="square" anchor="t">
-            <a:noAutofit/>
-          </a:bodyPr>
-          <a:lstStyle/>
-          <a:p>
-            <a:pPr algn="l"/>
-            <a:r>
-              <a:rPr sz="2600" b="1">
-                <a:solidFill>
-                  <a:srgbClr val="FFFFFF"/>
-                </a:solidFill>
-                <a:latin typeface="Calibri Light"/>
-              </a:rPr>
-              <a:t>BUSINESS MODEL</a:t>
-            </a:r>
-          </a:p>
-        </p:txBody>
-      </p:sp>
-      <p:sp>
-        <p:nvSpPr>
-          <p:cNvPr id="6" name="Rounded Rectangle 5"/>
-          <p:cNvSpPr/>
-          <p:nvPr/>
-        </p:nvSpPr>
-        <p:spPr>
-          <a:xfrm>
-            <a:off x="502920" y="1691640"/>
-            <a:ext cx="11185855" cy="4663440"/>
-          </a:xfrm>
-          <a:prstGeom prst="roundRect">
-            <a:avLst/>
-          </a:prstGeom>
           <a:solidFill>
-            <a:srgbClr val="1E293B"/>
+            <a:srgbClr val="FF2D95"/>
           </a:solidFill>
-          <a:ln w="12700">
-            <a:solidFill>
-              <a:srgbClr val="1E293B"/>
-            </a:solidFill>
+          <a:ln>
+            <a:noFill/>
           </a:ln>
         </p:spPr>
         <p:style>
@@ -4380,14 +6152,143 @@
       </p:sp>
       <p:sp>
         <p:nvSpPr>
-          <p:cNvPr id="7" name="TextBox 6"/>
+          <p:cNvPr id="5" name="Rectangle 4"/>
+          <p:cNvSpPr/>
+          <p:nvPr/>
+        </p:nvSpPr>
+        <p:spPr>
+          <a:xfrm>
+            <a:off x="7790688" y="228600"/>
+            <a:ext cx="54864" cy="6400800"/>
+          </a:xfrm>
+          <a:prstGeom prst="rect">
+            <a:avLst/>
+          </a:prstGeom>
+          <a:solidFill>
+            <a:srgbClr val="22E3FF"/>
+          </a:solidFill>
+          <a:ln>
+            <a:noFill/>
+          </a:ln>
+        </p:spPr>
+        <p:style>
+          <a:lnRef idx="1">
+            <a:schemeClr val="accent1"/>
+          </a:lnRef>
+          <a:fillRef idx="3">
+            <a:schemeClr val="accent1"/>
+          </a:fillRef>
+          <a:effectRef idx="2">
+            <a:schemeClr val="accent1"/>
+          </a:effectRef>
+          <a:fontRef idx="minor">
+            <a:schemeClr val="lt1"/>
+          </a:fontRef>
+        </p:style>
+        <p:txBody>
+          <a:bodyPr rtlCol="0" anchor="ctr"/>
+          <a:lstStyle/>
+          <a:p>
+            <a:pPr algn="ctr"/>
+          </a:p>
+        </p:txBody>
+      </p:sp>
+      <p:sp>
+        <p:nvSpPr>
+          <p:cNvPr id="6" name="Rectangle 5"/>
+          <p:cNvSpPr/>
+          <p:nvPr/>
+        </p:nvSpPr>
+        <p:spPr>
+          <a:xfrm>
+            <a:off x="0" y="0"/>
+            <a:ext cx="12191695" cy="164592"/>
+          </a:xfrm>
+          <a:prstGeom prst="rect">
+            <a:avLst/>
+          </a:prstGeom>
+          <a:solidFill>
+            <a:srgbClr val="22E3FF"/>
+          </a:solidFill>
+          <a:ln>
+            <a:noFill/>
+          </a:ln>
+        </p:spPr>
+        <p:style>
+          <a:lnRef idx="1">
+            <a:schemeClr val="accent1"/>
+          </a:lnRef>
+          <a:fillRef idx="3">
+            <a:schemeClr val="accent1"/>
+          </a:fillRef>
+          <a:effectRef idx="2">
+            <a:schemeClr val="accent1"/>
+          </a:effectRef>
+          <a:fontRef idx="minor">
+            <a:schemeClr val="lt1"/>
+          </a:fontRef>
+        </p:style>
+        <p:txBody>
+          <a:bodyPr rtlCol="0" anchor="ctr"/>
+          <a:lstStyle/>
+          <a:p>
+            <a:pPr algn="ctr"/>
+          </a:p>
+        </p:txBody>
+      </p:sp>
+      <p:sp>
+        <p:nvSpPr>
+          <p:cNvPr id="7" name="Rectangle 6"/>
+          <p:cNvSpPr/>
+          <p:nvPr/>
+        </p:nvSpPr>
+        <p:spPr>
+          <a:xfrm>
+            <a:off x="9631375" y="0"/>
+            <a:ext cx="2560320" cy="164592"/>
+          </a:xfrm>
+          <a:prstGeom prst="rect">
+            <a:avLst/>
+          </a:prstGeom>
+          <a:solidFill>
+            <a:srgbClr val="CCFF00"/>
+          </a:solidFill>
+          <a:ln>
+            <a:noFill/>
+          </a:ln>
+        </p:spPr>
+        <p:style>
+          <a:lnRef idx="1">
+            <a:schemeClr val="accent1"/>
+          </a:lnRef>
+          <a:fillRef idx="3">
+            <a:schemeClr val="accent1"/>
+          </a:fillRef>
+          <a:effectRef idx="2">
+            <a:schemeClr val="accent1"/>
+          </a:effectRef>
+          <a:fontRef idx="minor">
+            <a:schemeClr val="lt1"/>
+          </a:fontRef>
+        </p:style>
+        <p:txBody>
+          <a:bodyPr rtlCol="0" anchor="ctr"/>
+          <a:lstStyle/>
+          <a:p>
+            <a:pPr algn="ctr"/>
+          </a:p>
+        </p:txBody>
+      </p:sp>
+      <p:sp>
+        <p:nvSpPr>
+          <p:cNvPr id="8" name="TextBox 7"/>
           <p:cNvSpPr txBox="1"/>
           <p:nvPr/>
         </p:nvSpPr>
         <p:spPr>
           <a:xfrm>
-            <a:off x="822960" y="2011680"/>
-            <a:ext cx="10545775" cy="4160520"/>
+            <a:off x="502920" y="347472"/>
+            <a:ext cx="11185855" cy="365760"/>
           </a:xfrm>
           <a:prstGeom prst="rect">
             <a:avLst/>
@@ -4395,56 +6296,618 @@
           <a:noFill/>
         </p:spPr>
         <p:txBody>
+          <a:bodyPr wrap="square" anchor="t">
+            <a:noAutofit/>
+          </a:bodyPr>
+          <a:lstStyle/>
+          <a:p>
+            <a:pPr algn="l"/>
+            <a:r>
+              <a:rPr sz="1100" b="1">
+                <a:solidFill>
+                  <a:srgbClr val="CCFF00"/>
+                </a:solidFill>
+                <a:latin typeface="Consolas"/>
+              </a:rPr>
+              <a:t>3 / 5</a:t>
+            </a:r>
+          </a:p>
+        </p:txBody>
+      </p:sp>
+      <p:sp>
+        <p:nvSpPr>
+          <p:cNvPr id="9" name="TextBox 8"/>
+          <p:cNvSpPr txBox="1"/>
+          <p:nvPr/>
+        </p:nvSpPr>
+        <p:spPr>
+          <a:xfrm>
+            <a:off x="502920" y="713232"/>
+            <a:ext cx="11185855" cy="914400"/>
+          </a:xfrm>
+          <a:prstGeom prst="rect">
+            <a:avLst/>
+          </a:prstGeom>
+          <a:noFill/>
+        </p:spPr>
+        <p:txBody>
+          <a:bodyPr wrap="square" anchor="t">
+            <a:noAutofit/>
+          </a:bodyPr>
+          <a:lstStyle/>
+          <a:p>
+            <a:pPr algn="l"/>
+            <a:r>
+              <a:rPr sz="3400" b="1">
+                <a:solidFill>
+                  <a:srgbClr val="FFFFFF"/>
+                </a:solidFill>
+                <a:latin typeface="Calibri Light"/>
+              </a:rPr>
+              <a:t>REVENUE · GO-TO-MARKET</a:t>
+            </a:r>
+          </a:p>
+        </p:txBody>
+      </p:sp>
+      <p:sp>
+        <p:nvSpPr>
+          <p:cNvPr id="10" name="Rectangle 9"/>
+          <p:cNvSpPr/>
+          <p:nvPr/>
+        </p:nvSpPr>
+        <p:spPr>
+          <a:xfrm>
+            <a:off x="502920" y="1719072"/>
+            <a:ext cx="109728" cy="4636008"/>
+          </a:xfrm>
+          <a:prstGeom prst="rect">
+            <a:avLst/>
+          </a:prstGeom>
+          <a:solidFill>
+            <a:srgbClr val="FF2D95"/>
+          </a:solidFill>
+          <a:ln>
+            <a:noFill/>
+          </a:ln>
+        </p:spPr>
+        <p:style>
+          <a:lnRef idx="1">
+            <a:schemeClr val="accent1"/>
+          </a:lnRef>
+          <a:fillRef idx="3">
+            <a:schemeClr val="accent1"/>
+          </a:fillRef>
+          <a:effectRef idx="2">
+            <a:schemeClr val="accent1"/>
+          </a:effectRef>
+          <a:fontRef idx="minor">
+            <a:schemeClr val="lt1"/>
+          </a:fontRef>
+        </p:style>
+        <p:txBody>
+          <a:bodyPr rtlCol="0" anchor="ctr"/>
+          <a:lstStyle/>
+          <a:p>
+            <a:pPr algn="ctr"/>
+          </a:p>
+        </p:txBody>
+      </p:sp>
+      <p:sp>
+        <p:nvSpPr>
+          <p:cNvPr id="11" name="Rounded Rectangle 10"/>
+          <p:cNvSpPr/>
+          <p:nvPr/>
+        </p:nvSpPr>
+        <p:spPr>
+          <a:xfrm>
+            <a:off x="502920" y="1719072"/>
+            <a:ext cx="11185855" cy="4636008"/>
+          </a:xfrm>
+          <a:prstGeom prst="roundRect">
+            <a:avLst/>
+          </a:prstGeom>
+          <a:solidFill>
+            <a:srgbClr val="12182A"/>
+          </a:solidFill>
+          <a:ln w="31750">
+            <a:solidFill>
+              <a:srgbClr val="22E3FF"/>
+            </a:solidFill>
+          </a:ln>
+        </p:spPr>
+        <p:style>
+          <a:lnRef idx="1">
+            <a:schemeClr val="accent1"/>
+          </a:lnRef>
+          <a:fillRef idx="3">
+            <a:schemeClr val="accent1"/>
+          </a:fillRef>
+          <a:effectRef idx="2">
+            <a:schemeClr val="accent1"/>
+          </a:effectRef>
+          <a:fontRef idx="minor">
+            <a:schemeClr val="lt1"/>
+          </a:fontRef>
+        </p:style>
+        <p:txBody>
+          <a:bodyPr rtlCol="0" anchor="ctr"/>
+          <a:lstStyle/>
+          <a:p>
+            <a:pPr algn="ctr"/>
+          </a:p>
+        </p:txBody>
+      </p:sp>
+      <p:sp>
+        <p:nvSpPr>
+          <p:cNvPr id="12" name="TextBox 11"/>
+          <p:cNvSpPr txBox="1"/>
+          <p:nvPr/>
+        </p:nvSpPr>
+        <p:spPr>
+          <a:xfrm>
+            <a:off x="886968" y="2066544"/>
+            <a:ext cx="10472623" cy="4087368"/>
+          </a:xfrm>
+          <a:prstGeom prst="rect">
+            <a:avLst/>
+          </a:prstGeom>
+          <a:noFill/>
+        </p:spPr>
+        <p:txBody>
           <a:bodyPr wrap="square">
             <a:spAutoFit/>
           </a:bodyPr>
           <a:lstStyle/>
           <a:p>
             <a:pPr>
+              <a:lnSpc>
+                <a:spcPct val="110000"/>
+              </a:lnSpc>
               <a:spcAft>
-                <a:spcPts val="800"/>
+                <a:spcPts val="1200"/>
               </a:spcAft>
-              <a:defRPr sz="1300">
-                <a:solidFill>
-                  <a:srgbClr val="94A3B8"/>
-                </a:solidFill>
-                <a:latin typeface="Calibri"/>
-              </a:defRPr>
+              <a:buChar char="•"/>
             </a:pPr>
             <a:r>
-              <a:t>WHO PAYS? VP / Director Supply Chain, Chief Procurement Officer, Head of Logistics, and increasingly Chief Risk (operational resilience budget). Second line: 3PLs and 4PLs who resell “white-label” risk visibility to shippers.</a:t>
+              <a:rPr b="1" sz="1400">
+                <a:solidFill>
+                  <a:srgbClr val="22E3FF"/>
+                </a:solidFill>
+                <a:latin typeface="Calibri"/>
+              </a:rPr>
+              <a:t>Who buys</a:t>
+            </a:r>
+          </a:p>
+          <a:p>
+            <a:pPr lvl="1">
+              <a:lnSpc>
+                <a:spcPct val="110000"/>
+              </a:lnSpc>
+              <a:spcAft>
+                <a:spcPts val="600"/>
+              </a:spcAft>
+              <a:buChar char="•"/>
+            </a:pPr>
+            <a:r>
+              <a:rPr b="0" sz="1200">
+                <a:solidFill>
+                  <a:srgbClr val="C8D4E8"/>
+                </a:solidFill>
+                <a:latin typeface="Calibri"/>
+              </a:rPr>
+              <a:t>VP Supply Chain / CPO / Head of Logistics; </a:t>
+            </a:r>
+            <a:r>
+              <a:rPr b="1" sz="1200">
+                <a:solidFill>
+                  <a:srgbClr val="22E3FF"/>
+                </a:solidFill>
+                <a:latin typeface="Calibri"/>
+              </a:rPr>
+              <a:t>3PLs / 4PLs</a:t>
+            </a:r>
+            <a:r>
+              <a:rPr b="0" sz="1200">
+                <a:solidFill>
+                  <a:srgbClr val="C8D4E8"/>
+                </a:solidFill>
+                <a:latin typeface="Calibri"/>
+              </a:rPr>
+              <a:t> later for </a:t>
+            </a:r>
+            <a:r>
+              <a:rPr b="1" sz="1200">
+                <a:solidFill>
+                  <a:srgbClr val="22E3FF"/>
+                </a:solidFill>
+                <a:latin typeface="Calibri"/>
+              </a:rPr>
+              <a:t>white-label</a:t>
+            </a:r>
+            <a:r>
+              <a:rPr b="0" sz="1200">
+                <a:solidFill>
+                  <a:srgbClr val="C8D4E8"/>
+                </a:solidFill>
+                <a:latin typeface="Calibri"/>
+              </a:rPr>
+              <a:t> risk views to shippers.</a:t>
             </a:r>
           </a:p>
           <a:p>
             <a:pPr>
+              <a:lnSpc>
+                <a:spcPct val="110000"/>
+              </a:lnSpc>
               <a:spcAft>
-                <a:spcPts val="800"/>
+                <a:spcPts val="1200"/>
               </a:spcAft>
-              <a:defRPr sz="1300">
-                <a:solidFill>
-                  <a:srgbClr val="94A3B8"/>
-                </a:solidFill>
-                <a:latin typeface="Calibri"/>
-              </a:defRPr>
+              <a:buChar char="•"/>
             </a:pPr>
             <a:r>
-              <a:t>HOW MUCH WOULD THEY PAY? [EDIT: pick anchor] Example framing: $25–75 per named user / month for the team tier, or $18k–60k annual platform fee for mid-market (10–50 sites) with minimums. Enterprise above that with SSO, SLAs, and custom data feeds.</a:t>
+              <a:rPr b="1" sz="1400">
+                <a:solidFill>
+                  <a:srgbClr val="22E3FF"/>
+                </a:solidFill>
+                <a:latin typeface="Calibri"/>
+              </a:rPr>
+              <a:t>Pricing</a:t>
+            </a:r>
+            <a:r>
+              <a:rPr b="0" sz="1400">
+                <a:solidFill>
+                  <a:srgbClr val="C8D4E8"/>
+                </a:solidFill>
+                <a:latin typeface="Calibri"/>
+              </a:rPr>
+              <a:t> — anchors (tune to ICP)</a:t>
+            </a:r>
+          </a:p>
+          <a:p>
+            <a:pPr lvl="1">
+              <a:lnSpc>
+                <a:spcPct val="110000"/>
+              </a:lnSpc>
+              <a:spcAft>
+                <a:spcPts val="600"/>
+              </a:spcAft>
+              <a:buChar char="•"/>
+            </a:pPr>
+            <a:r>
+              <a:rPr b="1" sz="1200">
+                <a:solidFill>
+                  <a:srgbClr val="22E3FF"/>
+                </a:solidFill>
+                <a:latin typeface="Calibri"/>
+              </a:rPr>
+              <a:t>~$25–75/user/mo</a:t>
+            </a:r>
+            <a:r>
+              <a:rPr b="0" sz="1200">
+                <a:solidFill>
+                  <a:srgbClr val="C8D4E8"/>
+                </a:solidFill>
+                <a:latin typeface="Calibri"/>
+              </a:rPr>
+              <a:t> team tier </a:t>
+            </a:r>
+            <a:r>
+              <a:rPr b="1" sz="1200">
+                <a:solidFill>
+                  <a:srgbClr val="22E3FF"/>
+                </a:solidFill>
+                <a:latin typeface="Calibri"/>
+              </a:rPr>
+              <a:t>or</a:t>
+            </a:r>
+            <a:r>
+              <a:rPr b="0" sz="1200">
+                <a:solidFill>
+                  <a:srgbClr val="C8D4E8"/>
+                </a:solidFill>
+                <a:latin typeface="Calibri"/>
+              </a:rPr>
+              <a:t> </a:t>
+            </a:r>
+            <a:r>
+              <a:rPr b="1" sz="1200">
+                <a:solidFill>
+                  <a:srgbClr val="22E3FF"/>
+                </a:solidFill>
+                <a:latin typeface="Calibri"/>
+              </a:rPr>
+              <a:t>~$18k–60k/yr</a:t>
+            </a:r>
+            <a:r>
+              <a:rPr b="0" sz="1200">
+                <a:solidFill>
+                  <a:srgbClr val="C8D4E8"/>
+                </a:solidFill>
+                <a:latin typeface="Calibri"/>
+              </a:rPr>
+              <a:t> platform for mid-market (10–50 sites) + minimums.</a:t>
             </a:r>
           </a:p>
           <a:p>
             <a:pPr>
+              <a:lnSpc>
+                <a:spcPct val="110000"/>
+              </a:lnSpc>
               <a:spcAft>
-                <a:spcPts val="800"/>
+                <a:spcPts val="1200"/>
               </a:spcAft>
-              <a:defRPr sz="1300">
-                <a:solidFill>
-                  <a:srgbClr val="94A3B8"/>
-                </a:solidFill>
-                <a:latin typeface="Calibri"/>
-              </a:defRPr>
+              <a:buChar char="•"/>
             </a:pPr>
             <a:r>
-              <a:t>UNIT ECONOMICS (ILLUSTRATIVE — REPLACE WITH YOUR MODEL): Assume $40k ACV, 75% gross margin after cloud + LLM API usage. If news enrichment costs ~$[EDIT] per active customer per month and hosting ~$[EDIT], target CAC payback in &lt;12 months via inside sales. Show consumption caps on AI to protect margin.</a:t>
+              <a:rPr b="1" sz="1400">
+                <a:solidFill>
+                  <a:srgbClr val="22E3FF"/>
+                </a:solidFill>
+                <a:latin typeface="Calibri"/>
+              </a:rPr>
+              <a:t>Economics</a:t>
+            </a:r>
+            <a:r>
+              <a:rPr b="0" sz="1400">
+                <a:solidFill>
+                  <a:srgbClr val="C8D4E8"/>
+                </a:solidFill>
+                <a:latin typeface="Calibri"/>
+              </a:rPr>
+              <a:t> (illustrative)</a:t>
+            </a:r>
+          </a:p>
+          <a:p>
+            <a:pPr lvl="1">
+              <a:lnSpc>
+                <a:spcPct val="110000"/>
+              </a:lnSpc>
+              <a:spcAft>
+                <a:spcPts val="600"/>
+              </a:spcAft>
+              <a:buChar char="•"/>
+            </a:pPr>
+            <a:r>
+              <a:rPr b="1" sz="1200">
+                <a:solidFill>
+                  <a:srgbClr val="22E3FF"/>
+                </a:solidFill>
+                <a:latin typeface="Calibri"/>
+              </a:rPr>
+              <a:t>~$40k ACV</a:t>
+            </a:r>
+            <a:r>
+              <a:rPr b="0" sz="1200">
+                <a:solidFill>
+                  <a:srgbClr val="C8D4E8"/>
+                </a:solidFill>
+                <a:latin typeface="Calibri"/>
+              </a:rPr>
+              <a:t>, </a:t>
+            </a:r>
+            <a:r>
+              <a:rPr b="1" sz="1200">
+                <a:solidFill>
+                  <a:srgbClr val="22E3FF"/>
+                </a:solidFill>
+                <a:latin typeface="Calibri"/>
+              </a:rPr>
+              <a:t>~75%</a:t>
+            </a:r>
+            <a:r>
+              <a:rPr b="0" sz="1200">
+                <a:solidFill>
+                  <a:srgbClr val="C8D4E8"/>
+                </a:solidFill>
+                <a:latin typeface="Calibri"/>
+              </a:rPr>
+              <a:t> gross margin after cloud + LLM; </a:t>
+            </a:r>
+            <a:r>
+              <a:rPr b="1" sz="1200">
+                <a:solidFill>
+                  <a:srgbClr val="22E3FF"/>
+                </a:solidFill>
+                <a:latin typeface="Calibri"/>
+              </a:rPr>
+              <a:t>cap</a:t>
+            </a:r>
+            <a:r>
+              <a:rPr b="0" sz="1200">
+                <a:solidFill>
+                  <a:srgbClr val="C8D4E8"/>
+                </a:solidFill>
+                <a:latin typeface="Calibri"/>
+              </a:rPr>
+              <a:t> AI usage; </a:t>
+            </a:r>
+            <a:r>
+              <a:rPr b="1" sz="1200">
+                <a:solidFill>
+                  <a:srgbClr val="22E3FF"/>
+                </a:solidFill>
+                <a:latin typeface="Calibri"/>
+              </a:rPr>
+              <a:t>&lt;12 mo</a:t>
+            </a:r>
+            <a:r>
+              <a:rPr b="0" sz="1200">
+                <a:solidFill>
+                  <a:srgbClr val="C8D4E8"/>
+                </a:solidFill>
+                <a:latin typeface="Calibri"/>
+              </a:rPr>
+              <a:t> CAC payback via inside sales + pilots.</a:t>
+            </a:r>
+          </a:p>
+          <a:p>
+            <a:pPr>
+              <a:lnSpc>
+                <a:spcPct val="110000"/>
+              </a:lnSpc>
+              <a:spcAft>
+                <a:spcPts val="1200"/>
+              </a:spcAft>
+              <a:buChar char="•"/>
+            </a:pPr>
+            <a:r>
+              <a:rPr b="1" sz="1400">
+                <a:solidFill>
+                  <a:srgbClr val="22E3FF"/>
+                </a:solidFill>
+                <a:latin typeface="Calibri"/>
+              </a:rPr>
+              <a:t>First wins</a:t>
+            </a:r>
+            <a:r>
+              <a:rPr b="0" sz="1400">
+                <a:solidFill>
+                  <a:srgbClr val="C8D4E8"/>
+                </a:solidFill>
+                <a:latin typeface="Calibri"/>
+              </a:rPr>
+              <a:t> — GTM</a:t>
+            </a:r>
+          </a:p>
+          <a:p>
+            <a:pPr lvl="1">
+              <a:lnSpc>
+                <a:spcPct val="110000"/>
+              </a:lnSpc>
+              <a:spcAft>
+                <a:spcPts val="600"/>
+              </a:spcAft>
+              <a:buChar char="•"/>
+            </a:pPr>
+            <a:r>
+              <a:rPr b="1" sz="1200">
+                <a:solidFill>
+                  <a:srgbClr val="22E3FF"/>
+                </a:solidFill>
+                <a:latin typeface="Calibri"/>
+              </a:rPr>
+              <a:t>Manufacturers</a:t>
+            </a:r>
+            <a:r>
+              <a:rPr b="0" sz="1200">
+                <a:solidFill>
+                  <a:srgbClr val="C8D4E8"/>
+                </a:solidFill>
+                <a:latin typeface="Calibri"/>
+              </a:rPr>
+              <a:t> — intros via </a:t>
+            </a:r>
+            <a:r>
+              <a:rPr b="1" sz="1200">
+                <a:solidFill>
+                  <a:srgbClr val="22E3FF"/>
+                </a:solidFill>
+                <a:latin typeface="Calibri"/>
+              </a:rPr>
+              <a:t>VDMA / IHK / trade shows</a:t>
+            </a:r>
+            <a:r>
+              <a:rPr b="0" sz="1200">
+                <a:solidFill>
+                  <a:srgbClr val="C8D4E8"/>
+                </a:solidFill>
+                <a:latin typeface="Calibri"/>
+              </a:rPr>
+              <a:t>; </a:t>
+            </a:r>
+            <a:r>
+              <a:rPr b="1" sz="1200">
+                <a:solidFill>
+                  <a:srgbClr val="22E3FF"/>
+                </a:solidFill>
+                <a:latin typeface="Calibri"/>
+              </a:rPr>
+              <a:t>30-day pilots</a:t>
+            </a:r>
+            <a:r>
+              <a:rPr b="0" sz="1200">
+                <a:solidFill>
+                  <a:srgbClr val="C8D4E8"/>
+                </a:solidFill>
+                <a:latin typeface="Calibri"/>
+              </a:rPr>
+              <a:t>.</a:t>
+            </a:r>
+          </a:p>
+          <a:p>
+            <a:pPr lvl="1">
+              <a:lnSpc>
+                <a:spcPct val="110000"/>
+              </a:lnSpc>
+              <a:spcAft>
+                <a:spcPts val="600"/>
+              </a:spcAft>
+              <a:buChar char="•"/>
+            </a:pPr>
+            <a:r>
+              <a:rPr b="1" sz="1200">
+                <a:solidFill>
+                  <a:srgbClr val="22E3FF"/>
+                </a:solidFill>
+                <a:latin typeface="Calibri"/>
+              </a:rPr>
+              <a:t>3PL</a:t>
+            </a:r>
+            <a:r>
+              <a:rPr b="0" sz="1200">
+                <a:solidFill>
+                  <a:srgbClr val="C8D4E8"/>
+                </a:solidFill>
+                <a:latin typeface="Calibri"/>
+              </a:rPr>
+              <a:t> partners — co-branded </a:t>
+            </a:r>
+            <a:r>
+              <a:rPr b="1" sz="1200">
+                <a:solidFill>
+                  <a:srgbClr val="22E3FF"/>
+                </a:solidFill>
+                <a:latin typeface="Calibri"/>
+              </a:rPr>
+              <a:t>shipper risk</a:t>
+            </a:r>
+            <a:r>
+              <a:rPr b="0" sz="1200">
+                <a:solidFill>
+                  <a:srgbClr val="C8D4E8"/>
+                </a:solidFill>
+                <a:latin typeface="Calibri"/>
+              </a:rPr>
+              <a:t> widget.</a:t>
+            </a:r>
+          </a:p>
+          <a:p>
+            <a:pPr lvl="1">
+              <a:lnSpc>
+                <a:spcPct val="110000"/>
+              </a:lnSpc>
+              <a:spcAft>
+                <a:spcPts val="600"/>
+              </a:spcAft>
+              <a:buChar char="•"/>
+            </a:pPr>
+            <a:r>
+              <a:rPr b="1" sz="1200">
+                <a:solidFill>
+                  <a:srgbClr val="22E3FF"/>
+                </a:solidFill>
+                <a:latin typeface="Calibri"/>
+              </a:rPr>
+              <a:t>One public case</a:t>
+            </a:r>
+            <a:r>
+              <a:rPr b="0" sz="1200">
+                <a:solidFill>
+                  <a:srgbClr val="C8D4E8"/>
+                </a:solidFill>
+                <a:latin typeface="Calibri"/>
+              </a:rPr>
+              <a:t> — “alert → action in minutes.” [EDIT: your distribution].</a:t>
             </a:r>
           </a:p>
         </p:txBody>
@@ -4482,7 +6945,7 @@
             <a:avLst/>
           </a:prstGeom>
           <a:solidFill>
-            <a:srgbClr val="0A0F1C"/>
+            <a:srgbClr val="060812"/>
           </a:solidFill>
           <a:ln>
             <a:noFill/>
@@ -4517,15 +6980,15 @@
           <p:nvPr/>
         </p:nvSpPr>
         <p:spPr>
-          <a:xfrm>
-            <a:off x="0" y="0"/>
-            <a:ext cx="12191695" cy="109728"/>
+          <a:xfrm rot="660000">
+            <a:off x="6400800" y="-548640"/>
+            <a:ext cx="6583680" cy="8412480"/>
           </a:xfrm>
           <a:prstGeom prst="rect">
             <a:avLst/>
           </a:prstGeom>
           <a:solidFill>
-            <a:srgbClr val="22D3EE"/>
+            <a:srgbClr val="081022"/>
           </a:solidFill>
           <a:ln>
             <a:noFill/>
@@ -4555,95 +7018,23 @@
       </p:sp>
       <p:sp>
         <p:nvSpPr>
-          <p:cNvPr id="4" name="TextBox 3"/>
-          <p:cNvSpPr txBox="1"/>
+          <p:cNvPr id="4" name="Rectangle 3"/>
+          <p:cNvSpPr/>
           <p:nvPr/>
         </p:nvSpPr>
         <p:spPr>
           <a:xfrm>
-            <a:off x="502920" y="411480"/>
-            <a:ext cx="11185855" cy="320040"/>
+            <a:off x="7635240" y="228600"/>
+            <a:ext cx="54864" cy="6400800"/>
           </a:xfrm>
           <a:prstGeom prst="rect">
             <a:avLst/>
           </a:prstGeom>
-          <a:noFill/>
-        </p:spPr>
-        <p:txBody>
-          <a:bodyPr wrap="square" anchor="t">
-            <a:noAutofit/>
-          </a:bodyPr>
-          <a:lstStyle/>
-          <a:p>
-            <a:pPr algn="l"/>
-            <a:r>
-              <a:rPr sz="1000" b="1">
-                <a:solidFill>
-                  <a:srgbClr val="22D3EE"/>
-                </a:solidFill>
-                <a:latin typeface="Consolas"/>
-              </a:rPr>
-              <a:t>SLIDE 4</a:t>
-            </a:r>
-          </a:p>
-        </p:txBody>
-      </p:sp>
-      <p:sp>
-        <p:nvSpPr>
-          <p:cNvPr id="5" name="TextBox 4"/>
-          <p:cNvSpPr txBox="1"/>
-          <p:nvPr/>
-        </p:nvSpPr>
-        <p:spPr>
-          <a:xfrm>
-            <a:off x="502920" y="777240"/>
-            <a:ext cx="11185855" cy="822960"/>
-          </a:xfrm>
-          <a:prstGeom prst="rect">
-            <a:avLst/>
-          </a:prstGeom>
-          <a:noFill/>
-        </p:spPr>
-        <p:txBody>
-          <a:bodyPr wrap="square" anchor="t">
-            <a:noAutofit/>
-          </a:bodyPr>
-          <a:lstStyle/>
-          <a:p>
-            <a:pPr algn="l"/>
-            <a:r>
-              <a:rPr sz="2600" b="1">
-                <a:solidFill>
-                  <a:srgbClr val="FFFFFF"/>
-                </a:solidFill>
-                <a:latin typeface="Calibri Light"/>
-              </a:rPr>
-              <a:t>GO-TO-MARKET PLAN</a:t>
-            </a:r>
-          </a:p>
-        </p:txBody>
-      </p:sp>
-      <p:sp>
-        <p:nvSpPr>
-          <p:cNvPr id="6" name="Rounded Rectangle 5"/>
-          <p:cNvSpPr/>
-          <p:nvPr/>
-        </p:nvSpPr>
-        <p:spPr>
-          <a:xfrm>
-            <a:off x="502920" y="1691640"/>
-            <a:ext cx="11185855" cy="4663440"/>
-          </a:xfrm>
-          <a:prstGeom prst="roundRect">
-            <a:avLst/>
-          </a:prstGeom>
           <a:solidFill>
-            <a:srgbClr val="1E293B"/>
+            <a:srgbClr val="FF2D95"/>
           </a:solidFill>
-          <a:ln w="12700">
-            <a:solidFill>
-              <a:srgbClr val="1E293B"/>
-            </a:solidFill>
+          <a:ln>
+            <a:noFill/>
           </a:ln>
         </p:spPr>
         <p:style>
@@ -4670,14 +7061,143 @@
       </p:sp>
       <p:sp>
         <p:nvSpPr>
-          <p:cNvPr id="7" name="TextBox 6"/>
+          <p:cNvPr id="5" name="Rectangle 4"/>
+          <p:cNvSpPr/>
+          <p:nvPr/>
+        </p:nvSpPr>
+        <p:spPr>
+          <a:xfrm>
+            <a:off x="7790688" y="228600"/>
+            <a:ext cx="54864" cy="6400800"/>
+          </a:xfrm>
+          <a:prstGeom prst="rect">
+            <a:avLst/>
+          </a:prstGeom>
+          <a:solidFill>
+            <a:srgbClr val="22E3FF"/>
+          </a:solidFill>
+          <a:ln>
+            <a:noFill/>
+          </a:ln>
+        </p:spPr>
+        <p:style>
+          <a:lnRef idx="1">
+            <a:schemeClr val="accent1"/>
+          </a:lnRef>
+          <a:fillRef idx="3">
+            <a:schemeClr val="accent1"/>
+          </a:fillRef>
+          <a:effectRef idx="2">
+            <a:schemeClr val="accent1"/>
+          </a:effectRef>
+          <a:fontRef idx="minor">
+            <a:schemeClr val="lt1"/>
+          </a:fontRef>
+        </p:style>
+        <p:txBody>
+          <a:bodyPr rtlCol="0" anchor="ctr"/>
+          <a:lstStyle/>
+          <a:p>
+            <a:pPr algn="ctr"/>
+          </a:p>
+        </p:txBody>
+      </p:sp>
+      <p:sp>
+        <p:nvSpPr>
+          <p:cNvPr id="6" name="Rectangle 5"/>
+          <p:cNvSpPr/>
+          <p:nvPr/>
+        </p:nvSpPr>
+        <p:spPr>
+          <a:xfrm>
+            <a:off x="0" y="0"/>
+            <a:ext cx="12191695" cy="164592"/>
+          </a:xfrm>
+          <a:prstGeom prst="rect">
+            <a:avLst/>
+          </a:prstGeom>
+          <a:solidFill>
+            <a:srgbClr val="22E3FF"/>
+          </a:solidFill>
+          <a:ln>
+            <a:noFill/>
+          </a:ln>
+        </p:spPr>
+        <p:style>
+          <a:lnRef idx="1">
+            <a:schemeClr val="accent1"/>
+          </a:lnRef>
+          <a:fillRef idx="3">
+            <a:schemeClr val="accent1"/>
+          </a:fillRef>
+          <a:effectRef idx="2">
+            <a:schemeClr val="accent1"/>
+          </a:effectRef>
+          <a:fontRef idx="minor">
+            <a:schemeClr val="lt1"/>
+          </a:fontRef>
+        </p:style>
+        <p:txBody>
+          <a:bodyPr rtlCol="0" anchor="ctr"/>
+          <a:lstStyle/>
+          <a:p>
+            <a:pPr algn="ctr"/>
+          </a:p>
+        </p:txBody>
+      </p:sp>
+      <p:sp>
+        <p:nvSpPr>
+          <p:cNvPr id="7" name="Rectangle 6"/>
+          <p:cNvSpPr/>
+          <p:nvPr/>
+        </p:nvSpPr>
+        <p:spPr>
+          <a:xfrm>
+            <a:off x="9631375" y="0"/>
+            <a:ext cx="2560320" cy="164592"/>
+          </a:xfrm>
+          <a:prstGeom prst="rect">
+            <a:avLst/>
+          </a:prstGeom>
+          <a:solidFill>
+            <a:srgbClr val="CCFF00"/>
+          </a:solidFill>
+          <a:ln>
+            <a:noFill/>
+          </a:ln>
+        </p:spPr>
+        <p:style>
+          <a:lnRef idx="1">
+            <a:schemeClr val="accent1"/>
+          </a:lnRef>
+          <a:fillRef idx="3">
+            <a:schemeClr val="accent1"/>
+          </a:fillRef>
+          <a:effectRef idx="2">
+            <a:schemeClr val="accent1"/>
+          </a:effectRef>
+          <a:fontRef idx="minor">
+            <a:schemeClr val="lt1"/>
+          </a:fontRef>
+        </p:style>
+        <p:txBody>
+          <a:bodyPr rtlCol="0" anchor="ctr"/>
+          <a:lstStyle/>
+          <a:p>
+            <a:pPr algn="ctr"/>
+          </a:p>
+        </p:txBody>
+      </p:sp>
+      <p:sp>
+        <p:nvSpPr>
+          <p:cNvPr id="8" name="TextBox 7"/>
           <p:cNvSpPr txBox="1"/>
           <p:nvPr/>
         </p:nvSpPr>
         <p:spPr>
           <a:xfrm>
-            <a:off x="822960" y="2011680"/>
-            <a:ext cx="10545775" cy="4160520"/>
+            <a:off x="502920" y="347472"/>
+            <a:ext cx="11185855" cy="365760"/>
           </a:xfrm>
           <a:prstGeom prst="rect">
             <a:avLst/>
@@ -4685,56 +7205,477 @@
           <a:noFill/>
         </p:spPr>
         <p:txBody>
+          <a:bodyPr wrap="square" anchor="t">
+            <a:noAutofit/>
+          </a:bodyPr>
+          <a:lstStyle/>
+          <a:p>
+            <a:pPr algn="l"/>
+            <a:r>
+              <a:rPr sz="1100" b="1">
+                <a:solidFill>
+                  <a:srgbClr val="CCFF00"/>
+                </a:solidFill>
+                <a:latin typeface="Consolas"/>
+              </a:rPr>
+              <a:t>4 / 5</a:t>
+            </a:r>
+          </a:p>
+        </p:txBody>
+      </p:sp>
+      <p:sp>
+        <p:nvSpPr>
+          <p:cNvPr id="9" name="TextBox 8"/>
+          <p:cNvSpPr txBox="1"/>
+          <p:nvPr/>
+        </p:nvSpPr>
+        <p:spPr>
+          <a:xfrm>
+            <a:off x="502920" y="713232"/>
+            <a:ext cx="11185855" cy="914400"/>
+          </a:xfrm>
+          <a:prstGeom prst="rect">
+            <a:avLst/>
+          </a:prstGeom>
+          <a:noFill/>
+        </p:spPr>
+        <p:txBody>
+          <a:bodyPr wrap="square" anchor="t">
+            <a:noAutofit/>
+          </a:bodyPr>
+          <a:lstStyle/>
+          <a:p>
+            <a:pPr algn="l"/>
+            <a:r>
+              <a:rPr sz="3400" b="1">
+                <a:solidFill>
+                  <a:srgbClr val="FFFFFF"/>
+                </a:solidFill>
+                <a:latin typeface="Calibri Light"/>
+              </a:rPr>
+              <a:t>TEAM — VECTOR DEVS</a:t>
+            </a:r>
+          </a:p>
+        </p:txBody>
+      </p:sp>
+      <p:sp>
+        <p:nvSpPr>
+          <p:cNvPr id="10" name="Rectangle 9"/>
+          <p:cNvSpPr/>
+          <p:nvPr/>
+        </p:nvSpPr>
+        <p:spPr>
+          <a:xfrm>
+            <a:off x="502920" y="1719072"/>
+            <a:ext cx="109728" cy="4636008"/>
+          </a:xfrm>
+          <a:prstGeom prst="rect">
+            <a:avLst/>
+          </a:prstGeom>
+          <a:solidFill>
+            <a:srgbClr val="FF2D95"/>
+          </a:solidFill>
+          <a:ln>
+            <a:noFill/>
+          </a:ln>
+        </p:spPr>
+        <p:style>
+          <a:lnRef idx="1">
+            <a:schemeClr val="accent1"/>
+          </a:lnRef>
+          <a:fillRef idx="3">
+            <a:schemeClr val="accent1"/>
+          </a:fillRef>
+          <a:effectRef idx="2">
+            <a:schemeClr val="accent1"/>
+          </a:effectRef>
+          <a:fontRef idx="minor">
+            <a:schemeClr val="lt1"/>
+          </a:fontRef>
+        </p:style>
+        <p:txBody>
+          <a:bodyPr rtlCol="0" anchor="ctr"/>
+          <a:lstStyle/>
+          <a:p>
+            <a:pPr algn="ctr"/>
+          </a:p>
+        </p:txBody>
+      </p:sp>
+      <p:sp>
+        <p:nvSpPr>
+          <p:cNvPr id="11" name="Rounded Rectangle 10"/>
+          <p:cNvSpPr/>
+          <p:nvPr/>
+        </p:nvSpPr>
+        <p:spPr>
+          <a:xfrm>
+            <a:off x="502920" y="1719072"/>
+            <a:ext cx="11185855" cy="4636008"/>
+          </a:xfrm>
+          <a:prstGeom prst="roundRect">
+            <a:avLst/>
+          </a:prstGeom>
+          <a:solidFill>
+            <a:srgbClr val="12182A"/>
+          </a:solidFill>
+          <a:ln w="31750">
+            <a:solidFill>
+              <a:srgbClr val="22E3FF"/>
+            </a:solidFill>
+          </a:ln>
+        </p:spPr>
+        <p:style>
+          <a:lnRef idx="1">
+            <a:schemeClr val="accent1"/>
+          </a:lnRef>
+          <a:fillRef idx="3">
+            <a:schemeClr val="accent1"/>
+          </a:fillRef>
+          <a:effectRef idx="2">
+            <a:schemeClr val="accent1"/>
+          </a:effectRef>
+          <a:fontRef idx="minor">
+            <a:schemeClr val="lt1"/>
+          </a:fontRef>
+        </p:style>
+        <p:txBody>
+          <a:bodyPr rtlCol="0" anchor="ctr"/>
+          <a:lstStyle/>
+          <a:p>
+            <a:pPr algn="ctr"/>
+          </a:p>
+        </p:txBody>
+      </p:sp>
+      <p:sp>
+        <p:nvSpPr>
+          <p:cNvPr id="12" name="TextBox 11"/>
+          <p:cNvSpPr txBox="1"/>
+          <p:nvPr/>
+        </p:nvSpPr>
+        <p:spPr>
+          <a:xfrm>
+            <a:off x="886968" y="2066544"/>
+            <a:ext cx="10472623" cy="4087368"/>
+          </a:xfrm>
+          <a:prstGeom prst="rect">
+            <a:avLst/>
+          </a:prstGeom>
+          <a:noFill/>
+        </p:spPr>
+        <p:txBody>
           <a:bodyPr wrap="square">
             <a:spAutoFit/>
           </a:bodyPr>
           <a:lstStyle/>
           <a:p>
             <a:pPr>
+              <a:lnSpc>
+                <a:spcPct val="110000"/>
+              </a:lnSpc>
               <a:spcAft>
-                <a:spcPts val="800"/>
+                <a:spcPts val="1200"/>
               </a:spcAft>
-              <a:defRPr sz="1400">
-                <a:solidFill>
-                  <a:srgbClr val="94A3B8"/>
-                </a:solidFill>
-                <a:latin typeface="Calibri"/>
-              </a:defRPr>
+              <a:buChar char="•"/>
             </a:pPr>
             <a:r>
-              <a:t>FIRST 10 CUSTOMERS (BE SPECIFIC — REPLACE WITH YOUR LIST): (1) DM or warm intro to 30 heads of logistics in [EDIT: e.g. German automotive supplier association members]. (2) Offer free 30-day pilot to 5 mid-market manufacturers you can reach via [EDIT: e.g. IHK / VDMA events]. (3) Partner pitch to 2 regional 3PLs for a co-branded “shipper risk” widget. (4) Publish one public case: “From alert to action in 15 minutes.”</a:t>
-            </a:r>
-          </a:p>
-          <a:p>
-            <a:pPr>
+              <a:rPr b="1" sz="1400">
+                <a:solidFill>
+                  <a:srgbClr val="22E3FF"/>
+                </a:solidFill>
+                <a:latin typeface="Calibri"/>
+              </a:rPr>
+              <a:t>Why we</a:t>
+            </a:r>
+            <a:r>
+              <a:rPr b="0" sz="1400">
+                <a:solidFill>
+                  <a:srgbClr val="C8D4E8"/>
+                </a:solidFill>
+                <a:latin typeface="Calibri"/>
+              </a:rPr>
+              <a:t> — execution &amp; team</a:t>
+            </a:r>
+          </a:p>
+          <a:p>
+            <a:pPr lvl="1">
+              <a:lnSpc>
+                <a:spcPct val="110000"/>
+              </a:lnSpc>
               <a:spcAft>
-                <a:spcPts val="800"/>
+                <a:spcPts val="600"/>
               </a:spcAft>
-              <a:defRPr sz="1400">
-                <a:solidFill>
-                  <a:srgbClr val="94A3B8"/>
-                </a:solidFill>
-                <a:latin typeface="Calibri"/>
-              </a:defRPr>
+              <a:buChar char="•"/>
             </a:pPr>
             <a:r>
-              <a:t>DISTRIBUTION ADVANTAGE: [EDIT — e.g. existing enterprise relationships, open-source community, alumni network, niche newsletter, or integration into WMS/TMS partner marketplace]. What is repeatable beyond “posting on LinkedIn”?</a:t>
-            </a:r>
-          </a:p>
-          <a:p>
-            <a:pPr>
+              <a:rPr b="1" sz="1200">
+                <a:solidFill>
+                  <a:srgbClr val="22E3FF"/>
+                </a:solidFill>
+                <a:latin typeface="Calibri"/>
+              </a:rPr>
+              <a:t>Vector Devs</a:t>
+            </a:r>
+            <a:r>
+              <a:rPr b="0" sz="1200">
+                <a:solidFill>
+                  <a:srgbClr val="C8D4E8"/>
+                </a:solidFill>
+                <a:latin typeface="Calibri"/>
+              </a:rPr>
+              <a:t> — </a:t>
+            </a:r>
+            <a:r>
+              <a:rPr b="1" sz="1200">
+                <a:solidFill>
+                  <a:srgbClr val="22E3FF"/>
+                </a:solidFill>
+                <a:latin typeface="Calibri"/>
+              </a:rPr>
+              <a:t>3 developers</a:t>
+            </a:r>
+            <a:r>
+              <a:rPr b="0" sz="1200">
+                <a:solidFill>
+                  <a:srgbClr val="C8D4E8"/>
+                </a:solidFill>
+                <a:latin typeface="Calibri"/>
+              </a:rPr>
+              <a:t>, </a:t>
+            </a:r>
+            <a:r>
+              <a:rPr b="1" sz="1200">
+                <a:solidFill>
+                  <a:srgbClr val="22E3FF"/>
+                </a:solidFill>
+                <a:latin typeface="Calibri"/>
+              </a:rPr>
+              <a:t>dream team</a:t>
+            </a:r>
+            <a:r>
+              <a:rPr b="0" sz="1200">
+                <a:solidFill>
+                  <a:srgbClr val="C8D4E8"/>
+                </a:solidFill>
+                <a:latin typeface="Calibri"/>
+              </a:rPr>
+              <a:t>: </a:t>
+            </a:r>
+            <a:r>
+              <a:rPr b="1" sz="1200">
+                <a:solidFill>
+                  <a:srgbClr val="22E3FF"/>
+                </a:solidFill>
+                <a:latin typeface="Calibri"/>
+              </a:rPr>
+              <a:t>deep experience</a:t>
+            </a:r>
+            <a:r>
+              <a:rPr b="0" sz="1200">
+                <a:solidFill>
+                  <a:srgbClr val="C8D4E8"/>
+                </a:solidFill>
+                <a:latin typeface="Calibri"/>
+              </a:rPr>
+              <a:t>, </a:t>
+            </a:r>
+            <a:r>
+              <a:rPr b="1" sz="1200">
+                <a:solidFill>
+                  <a:srgbClr val="22E3FF"/>
+                </a:solidFill>
+                <a:latin typeface="Calibri"/>
+              </a:rPr>
+              <a:t>rapid prototyping</a:t>
+            </a:r>
+            <a:r>
+              <a:rPr b="0" sz="1200">
+                <a:solidFill>
+                  <a:srgbClr val="C8D4E8"/>
+                </a:solidFill>
+                <a:latin typeface="Calibri"/>
+              </a:rPr>
+              <a:t>, end-to-end ownership.</a:t>
+            </a:r>
+          </a:p>
+          <a:p>
+            <a:pPr lvl="1">
+              <a:lnSpc>
+                <a:spcPct val="110000"/>
+              </a:lnSpc>
               <a:spcAft>
-                <a:spcPts val="800"/>
+                <a:spcPts val="600"/>
               </a:spcAft>
-              <a:defRPr sz="1400">
-                <a:solidFill>
-                  <a:srgbClr val="94A3B8"/>
-                </a:solidFill>
-                <a:latin typeface="Calibri"/>
-              </a:defRPr>
+              <a:buChar char="•"/>
             </a:pPr>
             <a:r>
-              <a:t>WHY SWITCH FROM THE STATUS QUO? They leave when weekly executive reviews still start with “did anyone see the news about…” Switch when Riscon shows probability by site/supplier on a live board their CEO can trust. Offer side-by-side pilot vs. current alert inbox for 4 weeks.</a:t>
+              <a:rPr b="1" sz="1200">
+                <a:solidFill>
+                  <a:srgbClr val="22E3FF"/>
+                </a:solidFill>
+                <a:latin typeface="Calibri"/>
+              </a:rPr>
+              <a:t>Hackathon build:</a:t>
+            </a:r>
+            <a:r>
+              <a:rPr b="0" sz="1200">
+                <a:solidFill>
+                  <a:srgbClr val="C8D4E8"/>
+                </a:solidFill>
+                <a:latin typeface="Calibri"/>
+              </a:rPr>
+              <a:t> full stack — agents, probability service, React dashboard, Docker — </a:t>
+            </a:r>
+            <a:r>
+              <a:rPr b="1" sz="1200">
+                <a:solidFill>
+                  <a:srgbClr val="22E3FF"/>
+                </a:solidFill>
+                <a:latin typeface="Calibri"/>
+              </a:rPr>
+              <a:t>delivered in 27.5 hours</a:t>
+            </a:r>
+            <a:r>
+              <a:rPr b="0" sz="1200">
+                <a:solidFill>
+                  <a:srgbClr val="C8D4E8"/>
+                </a:solidFill>
+                <a:latin typeface="Calibri"/>
+              </a:rPr>
+              <a:t> (not slides only — </a:t>
+            </a:r>
+            <a:r>
+              <a:rPr b="1" sz="1200">
+                <a:solidFill>
+                  <a:srgbClr val="22E3FF"/>
+                </a:solidFill>
+                <a:latin typeface="Calibri"/>
+              </a:rPr>
+              <a:t>shipped</a:t>
+            </a:r>
+            <a:r>
+              <a:rPr b="0" sz="1200">
+                <a:solidFill>
+                  <a:srgbClr val="C8D4E8"/>
+                </a:solidFill>
+                <a:latin typeface="Calibri"/>
+              </a:rPr>
+              <a:t>).</a:t>
+            </a:r>
+          </a:p>
+          <a:p>
+            <a:pPr lvl="1">
+              <a:lnSpc>
+                <a:spcPct val="110000"/>
+              </a:lnSpc>
+              <a:spcAft>
+                <a:spcPts val="600"/>
+              </a:spcAft>
+              <a:buChar char="•"/>
+            </a:pPr>
+            <a:r>
+              <a:rPr b="1" sz="1200">
+                <a:solidFill>
+                  <a:srgbClr val="22E3FF"/>
+                </a:solidFill>
+                <a:latin typeface="Calibri"/>
+              </a:rPr>
+              <a:t>Meet the team</a:t>
+            </a:r>
+            <a:r>
+              <a:rPr b="0" sz="1200">
+                <a:solidFill>
+                  <a:srgbClr val="C8D4E8"/>
+                </a:solidFill>
+                <a:latin typeface="Calibri"/>
+              </a:rPr>
+              <a:t> (LinkedIn)</a:t>
+            </a:r>
+          </a:p>
+          <a:p>
+            <a:pPr lvl="2">
+              <a:lnSpc>
+                <a:spcPct val="110000"/>
+              </a:lnSpc>
+              <a:spcAft>
+                <a:spcPts val="400"/>
+              </a:spcAft>
+              <a:buChar char="•"/>
+            </a:pPr>
+            <a:r>
+              <a:rPr b="1" sz="1000">
+                <a:solidFill>
+                  <a:srgbClr val="22E3FF"/>
+                </a:solidFill>
+                <a:latin typeface="Calibri"/>
+              </a:rPr>
+              <a:t>Balaji Vengatesh M</a:t>
+            </a:r>
+            <a:r>
+              <a:rPr b="0" sz="1000">
+                <a:solidFill>
+                  <a:srgbClr val="C8D4E8"/>
+                </a:solidFill>
+                <a:latin typeface="Calibri"/>
+              </a:rPr>
+              <a:t> — https://www.linkedin.com/in/balaji-vengatesh-m-3b871151/</a:t>
+            </a:r>
+          </a:p>
+          <a:p>
+            <a:pPr lvl="2">
+              <a:lnSpc>
+                <a:spcPct val="110000"/>
+              </a:lnSpc>
+              <a:spcAft>
+                <a:spcPts val="400"/>
+              </a:spcAft>
+              <a:buChar char="•"/>
+            </a:pPr>
+            <a:r>
+              <a:rPr b="1" sz="1000">
+                <a:solidFill>
+                  <a:srgbClr val="22E3FF"/>
+                </a:solidFill>
+                <a:latin typeface="Calibri"/>
+              </a:rPr>
+              <a:t>Sven Schmeckenbecher</a:t>
+            </a:r>
+            <a:r>
+              <a:rPr b="0" sz="1000">
+                <a:solidFill>
+                  <a:srgbClr val="C8D4E8"/>
+                </a:solidFill>
+                <a:latin typeface="Calibri"/>
+              </a:rPr>
+              <a:t> — https://www.linkedin.com/in/sven-schmeckenbecher</a:t>
+            </a:r>
+          </a:p>
+          <a:p>
+            <a:pPr lvl="2">
+              <a:lnSpc>
+                <a:spcPct val="110000"/>
+              </a:lnSpc>
+              <a:spcAft>
+                <a:spcPts val="400"/>
+              </a:spcAft>
+              <a:buChar char="•"/>
+            </a:pPr>
+            <a:r>
+              <a:rPr b="1" sz="1000">
+                <a:solidFill>
+                  <a:srgbClr val="22E3FF"/>
+                </a:solidFill>
+                <a:latin typeface="Calibri"/>
+              </a:rPr>
+              <a:t>Sreekanth Kata</a:t>
+            </a:r>
+            <a:r>
+              <a:rPr b="0" sz="1000">
+                <a:solidFill>
+                  <a:srgbClr val="C8D4E8"/>
+                </a:solidFill>
+                <a:latin typeface="Calibri"/>
+              </a:rPr>
+              <a:t> — https://www.linkedin.com/in/sreekanth-kata-3096471bb/</a:t>
             </a:r>
           </a:p>
         </p:txBody>
@@ -4772,7 +7713,7 @@
             <a:avLst/>
           </a:prstGeom>
           <a:solidFill>
-            <a:srgbClr val="0A0F1C"/>
+            <a:srgbClr val="060812"/>
           </a:solidFill>
           <a:ln>
             <a:noFill/>
@@ -4807,15 +7748,15 @@
           <p:nvPr/>
         </p:nvSpPr>
         <p:spPr>
-          <a:xfrm>
-            <a:off x="0" y="0"/>
-            <a:ext cx="12191695" cy="109728"/>
+          <a:xfrm rot="660000">
+            <a:off x="6400800" y="-548640"/>
+            <a:ext cx="6583680" cy="8412480"/>
           </a:xfrm>
           <a:prstGeom prst="rect">
             <a:avLst/>
           </a:prstGeom>
           <a:solidFill>
-            <a:srgbClr val="22D3EE"/>
+            <a:srgbClr val="081022"/>
           </a:solidFill>
           <a:ln>
             <a:noFill/>
@@ -4845,95 +7786,23 @@
       </p:sp>
       <p:sp>
         <p:nvSpPr>
-          <p:cNvPr id="4" name="TextBox 3"/>
-          <p:cNvSpPr txBox="1"/>
+          <p:cNvPr id="4" name="Rectangle 3"/>
+          <p:cNvSpPr/>
           <p:nvPr/>
         </p:nvSpPr>
         <p:spPr>
           <a:xfrm>
-            <a:off x="502920" y="411480"/>
-            <a:ext cx="11185855" cy="320040"/>
+            <a:off x="7635240" y="228600"/>
+            <a:ext cx="54864" cy="6400800"/>
           </a:xfrm>
           <a:prstGeom prst="rect">
             <a:avLst/>
           </a:prstGeom>
-          <a:noFill/>
-        </p:spPr>
-        <p:txBody>
-          <a:bodyPr wrap="square" anchor="t">
-            <a:noAutofit/>
-          </a:bodyPr>
-          <a:lstStyle/>
-          <a:p>
-            <a:pPr algn="l"/>
-            <a:r>
-              <a:rPr sz="1000" b="1">
-                <a:solidFill>
-                  <a:srgbClr val="22D3EE"/>
-                </a:solidFill>
-                <a:latin typeface="Consolas"/>
-              </a:rPr>
-              <a:t>SLIDE 5</a:t>
-            </a:r>
-          </a:p>
-        </p:txBody>
-      </p:sp>
-      <p:sp>
-        <p:nvSpPr>
-          <p:cNvPr id="5" name="TextBox 4"/>
-          <p:cNvSpPr txBox="1"/>
-          <p:nvPr/>
-        </p:nvSpPr>
-        <p:spPr>
-          <a:xfrm>
-            <a:off x="502920" y="777240"/>
-            <a:ext cx="11185855" cy="822960"/>
-          </a:xfrm>
-          <a:prstGeom prst="rect">
-            <a:avLst/>
-          </a:prstGeom>
-          <a:noFill/>
-        </p:spPr>
-        <p:txBody>
-          <a:bodyPr wrap="square" anchor="t">
-            <a:noAutofit/>
-          </a:bodyPr>
-          <a:lstStyle/>
-          <a:p>
-            <a:pPr algn="l"/>
-            <a:r>
-              <a:rPr sz="2600" b="1">
-                <a:solidFill>
-                  <a:srgbClr val="FFFFFF"/>
-                </a:solidFill>
-                <a:latin typeface="Calibri Light"/>
-              </a:rPr>
-              <a:t>WHY YOU · WHY NOW</a:t>
-            </a:r>
-          </a:p>
-        </p:txBody>
-      </p:sp>
-      <p:sp>
-        <p:nvSpPr>
-          <p:cNvPr id="6" name="Rounded Rectangle 5"/>
-          <p:cNvSpPr/>
-          <p:nvPr/>
-        </p:nvSpPr>
-        <p:spPr>
-          <a:xfrm>
-            <a:off x="502920" y="1691640"/>
-            <a:ext cx="11185855" cy="4663440"/>
-          </a:xfrm>
-          <a:prstGeom prst="roundRect">
-            <a:avLst/>
-          </a:prstGeom>
           <a:solidFill>
-            <a:srgbClr val="1E293B"/>
+            <a:srgbClr val="FF2D95"/>
           </a:solidFill>
-          <a:ln w="12700">
-            <a:solidFill>
-              <a:srgbClr val="1E293B"/>
-            </a:solidFill>
+          <a:ln>
+            <a:noFill/>
           </a:ln>
         </p:spPr>
         <p:style>
@@ -4960,14 +7829,143 @@
       </p:sp>
       <p:sp>
         <p:nvSpPr>
-          <p:cNvPr id="7" name="TextBox 6"/>
+          <p:cNvPr id="5" name="Rectangle 4"/>
+          <p:cNvSpPr/>
+          <p:nvPr/>
+        </p:nvSpPr>
+        <p:spPr>
+          <a:xfrm>
+            <a:off x="7790688" y="228600"/>
+            <a:ext cx="54864" cy="6400800"/>
+          </a:xfrm>
+          <a:prstGeom prst="rect">
+            <a:avLst/>
+          </a:prstGeom>
+          <a:solidFill>
+            <a:srgbClr val="22E3FF"/>
+          </a:solidFill>
+          <a:ln>
+            <a:noFill/>
+          </a:ln>
+        </p:spPr>
+        <p:style>
+          <a:lnRef idx="1">
+            <a:schemeClr val="accent1"/>
+          </a:lnRef>
+          <a:fillRef idx="3">
+            <a:schemeClr val="accent1"/>
+          </a:fillRef>
+          <a:effectRef idx="2">
+            <a:schemeClr val="accent1"/>
+          </a:effectRef>
+          <a:fontRef idx="minor">
+            <a:schemeClr val="lt1"/>
+          </a:fontRef>
+        </p:style>
+        <p:txBody>
+          <a:bodyPr rtlCol="0" anchor="ctr"/>
+          <a:lstStyle/>
+          <a:p>
+            <a:pPr algn="ctr"/>
+          </a:p>
+        </p:txBody>
+      </p:sp>
+      <p:sp>
+        <p:nvSpPr>
+          <p:cNvPr id="6" name="Rectangle 5"/>
+          <p:cNvSpPr/>
+          <p:nvPr/>
+        </p:nvSpPr>
+        <p:spPr>
+          <a:xfrm>
+            <a:off x="0" y="0"/>
+            <a:ext cx="12191695" cy="164592"/>
+          </a:xfrm>
+          <a:prstGeom prst="rect">
+            <a:avLst/>
+          </a:prstGeom>
+          <a:solidFill>
+            <a:srgbClr val="22E3FF"/>
+          </a:solidFill>
+          <a:ln>
+            <a:noFill/>
+          </a:ln>
+        </p:spPr>
+        <p:style>
+          <a:lnRef idx="1">
+            <a:schemeClr val="accent1"/>
+          </a:lnRef>
+          <a:fillRef idx="3">
+            <a:schemeClr val="accent1"/>
+          </a:fillRef>
+          <a:effectRef idx="2">
+            <a:schemeClr val="accent1"/>
+          </a:effectRef>
+          <a:fontRef idx="minor">
+            <a:schemeClr val="lt1"/>
+          </a:fontRef>
+        </p:style>
+        <p:txBody>
+          <a:bodyPr rtlCol="0" anchor="ctr"/>
+          <a:lstStyle/>
+          <a:p>
+            <a:pPr algn="ctr"/>
+          </a:p>
+        </p:txBody>
+      </p:sp>
+      <p:sp>
+        <p:nvSpPr>
+          <p:cNvPr id="7" name="Rectangle 6"/>
+          <p:cNvSpPr/>
+          <p:nvPr/>
+        </p:nvSpPr>
+        <p:spPr>
+          <a:xfrm>
+            <a:off x="9631375" y="0"/>
+            <a:ext cx="2560320" cy="164592"/>
+          </a:xfrm>
+          <a:prstGeom prst="rect">
+            <a:avLst/>
+          </a:prstGeom>
+          <a:solidFill>
+            <a:srgbClr val="CCFF00"/>
+          </a:solidFill>
+          <a:ln>
+            <a:noFill/>
+          </a:ln>
+        </p:spPr>
+        <p:style>
+          <a:lnRef idx="1">
+            <a:schemeClr val="accent1"/>
+          </a:lnRef>
+          <a:fillRef idx="3">
+            <a:schemeClr val="accent1"/>
+          </a:fillRef>
+          <a:effectRef idx="2">
+            <a:schemeClr val="accent1"/>
+          </a:effectRef>
+          <a:fontRef idx="minor">
+            <a:schemeClr val="lt1"/>
+          </a:fontRef>
+        </p:style>
+        <p:txBody>
+          <a:bodyPr rtlCol="0" anchor="ctr"/>
+          <a:lstStyle/>
+          <a:p>
+            <a:pPr algn="ctr"/>
+          </a:p>
+        </p:txBody>
+      </p:sp>
+      <p:sp>
+        <p:nvSpPr>
+          <p:cNvPr id="8" name="TextBox 7"/>
           <p:cNvSpPr txBox="1"/>
           <p:nvPr/>
         </p:nvSpPr>
         <p:spPr>
           <a:xfrm>
-            <a:off x="822960" y="2011680"/>
-            <a:ext cx="10545775" cy="4160520"/>
+            <a:off x="502920" y="347472"/>
+            <a:ext cx="11185855" cy="365760"/>
           </a:xfrm>
           <a:prstGeom prst="rect">
             <a:avLst/>
@@ -4975,56 +7973,741 @@
           <a:noFill/>
         </p:spPr>
         <p:txBody>
+          <a:bodyPr wrap="square" anchor="t">
+            <a:noAutofit/>
+          </a:bodyPr>
+          <a:lstStyle/>
+          <a:p>
+            <a:pPr algn="l"/>
+            <a:r>
+              <a:rPr sz="1100" b="1">
+                <a:solidFill>
+                  <a:srgbClr val="CCFF00"/>
+                </a:solidFill>
+                <a:latin typeface="Consolas"/>
+              </a:rPr>
+              <a:t>5 / 5</a:t>
+            </a:r>
+          </a:p>
+        </p:txBody>
+      </p:sp>
+      <p:sp>
+        <p:nvSpPr>
+          <p:cNvPr id="9" name="TextBox 8"/>
+          <p:cNvSpPr txBox="1"/>
+          <p:nvPr/>
+        </p:nvSpPr>
+        <p:spPr>
+          <a:xfrm>
+            <a:off x="502920" y="713232"/>
+            <a:ext cx="11185855" cy="914400"/>
+          </a:xfrm>
+          <a:prstGeom prst="rect">
+            <a:avLst/>
+          </a:prstGeom>
+          <a:noFill/>
+        </p:spPr>
+        <p:txBody>
+          <a:bodyPr wrap="square" anchor="t">
+            <a:noAutofit/>
+          </a:bodyPr>
+          <a:lstStyle/>
+          <a:p>
+            <a:pPr algn="l"/>
+            <a:r>
+              <a:rPr sz="3400" b="1">
+                <a:solidFill>
+                  <a:srgbClr val="FFFFFF"/>
+                </a:solidFill>
+                <a:latin typeface="Calibri Light"/>
+              </a:rPr>
+              <a:t>WHY NOW</a:t>
+            </a:r>
+          </a:p>
+        </p:txBody>
+      </p:sp>
+      <p:sp>
+        <p:nvSpPr>
+          <p:cNvPr id="10" name="Rectangle 9"/>
+          <p:cNvSpPr/>
+          <p:nvPr/>
+        </p:nvSpPr>
+        <p:spPr>
+          <a:xfrm>
+            <a:off x="502920" y="1719072"/>
+            <a:ext cx="109728" cy="4636008"/>
+          </a:xfrm>
+          <a:prstGeom prst="rect">
+            <a:avLst/>
+          </a:prstGeom>
+          <a:solidFill>
+            <a:srgbClr val="FF2D95"/>
+          </a:solidFill>
+          <a:ln>
+            <a:noFill/>
+          </a:ln>
+        </p:spPr>
+        <p:style>
+          <a:lnRef idx="1">
+            <a:schemeClr val="accent1"/>
+          </a:lnRef>
+          <a:fillRef idx="3">
+            <a:schemeClr val="accent1"/>
+          </a:fillRef>
+          <a:effectRef idx="2">
+            <a:schemeClr val="accent1"/>
+          </a:effectRef>
+          <a:fontRef idx="minor">
+            <a:schemeClr val="lt1"/>
+          </a:fontRef>
+        </p:style>
+        <p:txBody>
+          <a:bodyPr rtlCol="0" anchor="ctr"/>
+          <a:lstStyle/>
+          <a:p>
+            <a:pPr algn="ctr"/>
+          </a:p>
+        </p:txBody>
+      </p:sp>
+      <p:sp>
+        <p:nvSpPr>
+          <p:cNvPr id="11" name="Rounded Rectangle 10"/>
+          <p:cNvSpPr/>
+          <p:nvPr/>
+        </p:nvSpPr>
+        <p:spPr>
+          <a:xfrm>
+            <a:off x="502920" y="1719072"/>
+            <a:ext cx="11185855" cy="4636008"/>
+          </a:xfrm>
+          <a:prstGeom prst="roundRect">
+            <a:avLst/>
+          </a:prstGeom>
+          <a:solidFill>
+            <a:srgbClr val="12182A"/>
+          </a:solidFill>
+          <a:ln w="31750">
+            <a:solidFill>
+              <a:srgbClr val="22E3FF"/>
+            </a:solidFill>
+          </a:ln>
+        </p:spPr>
+        <p:style>
+          <a:lnRef idx="1">
+            <a:schemeClr val="accent1"/>
+          </a:lnRef>
+          <a:fillRef idx="3">
+            <a:schemeClr val="accent1"/>
+          </a:fillRef>
+          <a:effectRef idx="2">
+            <a:schemeClr val="accent1"/>
+          </a:effectRef>
+          <a:fontRef idx="minor">
+            <a:schemeClr val="lt1"/>
+          </a:fontRef>
+        </p:style>
+        <p:txBody>
+          <a:bodyPr rtlCol="0" anchor="ctr"/>
+          <a:lstStyle/>
+          <a:p>
+            <a:pPr algn="ctr"/>
+          </a:p>
+        </p:txBody>
+      </p:sp>
+      <p:sp>
+        <p:nvSpPr>
+          <p:cNvPr id="12" name="TextBox 11"/>
+          <p:cNvSpPr txBox="1"/>
+          <p:nvPr/>
+        </p:nvSpPr>
+        <p:spPr>
+          <a:xfrm>
+            <a:off x="886968" y="2066544"/>
+            <a:ext cx="10472623" cy="4087368"/>
+          </a:xfrm>
+          <a:prstGeom prst="rect">
+            <a:avLst/>
+          </a:prstGeom>
+          <a:noFill/>
+        </p:spPr>
+        <p:txBody>
           <a:bodyPr wrap="square">
             <a:spAutoFit/>
           </a:bodyPr>
           <a:lstStyle/>
           <a:p>
             <a:pPr>
+              <a:lnSpc>
+                <a:spcPct val="110000"/>
+              </a:lnSpc>
               <a:spcAft>
-                <a:spcPts val="800"/>
+                <a:spcPts val="1200"/>
               </a:spcAft>
-              <a:defRPr sz="1300">
-                <a:solidFill>
-                  <a:srgbClr val="94A3B8"/>
-                </a:solidFill>
-                <a:latin typeface="Calibri"/>
-              </a:defRPr>
+              <a:buChar char="•"/>
             </a:pPr>
             <a:r>
-              <a:t>WHY YOU? [EDIT: team bullets — domain years in supply chain / logistics, shipped ML or data products, enterprise sales experience, design for ops]. Vector-Devs built an end-to-stack reference: Spring Boot agents, probability service, React operations UI, Docker compose — proof you can ship, not only slide.</a:t>
-            </a:r>
-          </a:p>
-          <a:p>
-            <a:pPr>
+              <a:rPr b="1" sz="1400">
+                <a:solidFill>
+                  <a:srgbClr val="22E3FF"/>
+                </a:solidFill>
+                <a:latin typeface="Calibri"/>
+              </a:rPr>
+              <a:t>Market + geopolitical urgency</a:t>
+            </a:r>
+          </a:p>
+          <a:p>
+            <a:pPr lvl="1">
+              <a:lnSpc>
+                <a:spcPct val="110000"/>
+              </a:lnSpc>
               <a:spcAft>
-                <a:spcPts val="800"/>
+                <a:spcPts val="600"/>
               </a:spcAft>
-              <a:defRPr sz="1300">
-                <a:solidFill>
-                  <a:srgbClr val="94A3B8"/>
-                </a:solidFill>
-                <a:latin typeface="Calibri"/>
-              </a:defRPr>
+              <a:buChar char="•"/>
             </a:pPr>
             <a:r>
-              <a:t>FULL-TIME IF IT TRACTIONS? [EDIT: Yes / timeline — e.g. “All founders commit to full-time on $XM ARR or institutional seed.”]</a:t>
-            </a:r>
-          </a:p>
-          <a:p>
-            <a:pPr>
+              <a:rPr b="1" sz="1200">
+                <a:solidFill>
+                  <a:srgbClr val="22E3FF"/>
+                </a:solidFill>
+                <a:latin typeface="Calibri"/>
+              </a:rPr>
+              <a:t>Middle East / Iran tensions</a:t>
+            </a:r>
+            <a:r>
+              <a:rPr b="0" sz="1200">
+                <a:solidFill>
+                  <a:srgbClr val="C8D4E8"/>
+                </a:solidFill>
+                <a:latin typeface="Calibri"/>
+              </a:rPr>
+              <a:t> — escalations have </a:t>
+            </a:r>
+            <a:r>
+              <a:rPr b="1" sz="1200">
+                <a:solidFill>
+                  <a:srgbClr val="22E3FF"/>
+                </a:solidFill>
+                <a:latin typeface="Calibri"/>
+              </a:rPr>
+              <a:t>raised maritime supply-chain risk</a:t>
+            </a:r>
+            <a:r>
+              <a:rPr b="0" sz="1200">
+                <a:solidFill>
+                  <a:srgbClr val="C8D4E8"/>
+                </a:solidFill>
+                <a:latin typeface="Calibri"/>
+              </a:rPr>
+              <a:t> (e.g. </a:t>
+            </a:r>
+            <a:r>
+              <a:rPr b="1" sz="1200">
+                <a:solidFill>
+                  <a:srgbClr val="22E3FF"/>
+                </a:solidFill>
+                <a:latin typeface="Calibri"/>
+              </a:rPr>
+              <a:t>Strait of Hormuz</a:t>
+            </a:r>
+            <a:r>
+              <a:rPr b="0" sz="1200">
+                <a:solidFill>
+                  <a:srgbClr val="C8D4E8"/>
+                </a:solidFill>
+                <a:latin typeface="Calibri"/>
+              </a:rPr>
+              <a:t> chokepoint, </a:t>
+            </a:r>
+            <a:r>
+              <a:rPr b="1" sz="1200">
+                <a:solidFill>
+                  <a:srgbClr val="22E3FF"/>
+                </a:solidFill>
+                <a:latin typeface="Calibri"/>
+              </a:rPr>
+              <a:t>war-risk insurance</a:t>
+            </a:r>
+            <a:r>
+              <a:rPr b="0" sz="1200">
+                <a:solidFill>
+                  <a:srgbClr val="C8D4E8"/>
+                </a:solidFill>
+                <a:latin typeface="Calibri"/>
+              </a:rPr>
+              <a:t> &amp; </a:t>
+            </a:r>
+            <a:r>
+              <a:rPr b="1" sz="1200">
+                <a:solidFill>
+                  <a:srgbClr val="22E3FF"/>
+                </a:solidFill>
+                <a:latin typeface="Calibri"/>
+              </a:rPr>
+              <a:t>freight</a:t>
+            </a:r>
+            <a:r>
+              <a:rPr b="0" sz="1200">
+                <a:solidFill>
+                  <a:srgbClr val="C8D4E8"/>
+                </a:solidFill>
+                <a:latin typeface="Calibri"/>
+              </a:rPr>
+              <a:t> repricing, </a:t>
+            </a:r>
+            <a:r>
+              <a:rPr b="1" sz="1200">
+                <a:solidFill>
+                  <a:srgbClr val="22E3FF"/>
+                </a:solidFill>
+                <a:latin typeface="Calibri"/>
+              </a:rPr>
+              <a:t>carrier rerouting</a:t>
+            </a:r>
+            <a:r>
+              <a:rPr b="0" sz="1200">
+                <a:solidFill>
+                  <a:srgbClr val="C8D4E8"/>
+                </a:solidFill>
+                <a:latin typeface="Calibri"/>
+              </a:rPr>
+              <a:t>). </a:t>
+            </a:r>
+            <a:r>
+              <a:rPr b="1" sz="1200">
+                <a:solidFill>
+                  <a:srgbClr val="22E3FF"/>
+                </a:solidFill>
+                <a:latin typeface="Calibri"/>
+              </a:rPr>
+              <a:t>Global trade &amp; energy</a:t>
+            </a:r>
+            <a:r>
+              <a:rPr b="0" sz="1200">
+                <a:solidFill>
+                  <a:srgbClr val="C8D4E8"/>
+                </a:solidFill>
+                <a:latin typeface="Calibri"/>
+              </a:rPr>
+              <a:t> flows get </a:t>
+            </a:r>
+            <a:r>
+              <a:rPr b="1" sz="1200">
+                <a:solidFill>
+                  <a:srgbClr val="22E3FF"/>
+                </a:solidFill>
+                <a:latin typeface="Calibri"/>
+              </a:rPr>
+              <a:t>scrutiny</a:t>
+            </a:r>
+            <a:r>
+              <a:rPr b="0" sz="1200">
+                <a:solidFill>
+                  <a:srgbClr val="C8D4E8"/>
+                </a:solidFill>
+                <a:latin typeface="Calibri"/>
+              </a:rPr>
+              <a:t>; coverage in </a:t>
+            </a:r>
+            <a:r>
+              <a:rPr b="1" sz="1200">
+                <a:solidFill>
+                  <a:srgbClr val="22E3FF"/>
+                </a:solidFill>
+                <a:latin typeface="Calibri"/>
+              </a:rPr>
+              <a:t>Reuters</a:t>
+            </a:r>
+            <a:r>
+              <a:rPr b="0" sz="1200">
+                <a:solidFill>
+                  <a:srgbClr val="C8D4E8"/>
+                </a:solidFill>
+                <a:latin typeface="Calibri"/>
+              </a:rPr>
+              <a:t>, </a:t>
+            </a:r>
+            <a:r>
+              <a:rPr b="1" sz="1200">
+                <a:solidFill>
+                  <a:srgbClr val="22E3FF"/>
+                </a:solidFill>
+                <a:latin typeface="Calibri"/>
+              </a:rPr>
+              <a:t>CNBC</a:t>
+            </a:r>
+            <a:r>
+              <a:rPr b="0" sz="1200">
+                <a:solidFill>
+                  <a:srgbClr val="C8D4E8"/>
+                </a:solidFill>
+                <a:latin typeface="Calibri"/>
+              </a:rPr>
+              <a:t>, </a:t>
+            </a:r>
+            <a:r>
+              <a:rPr b="1" sz="1200">
+                <a:solidFill>
+                  <a:srgbClr val="22E3FF"/>
+                </a:solidFill>
+                <a:latin typeface="Calibri"/>
+              </a:rPr>
+              <a:t>Foreign Policy</a:t>
+            </a:r>
+            <a:r>
+              <a:rPr b="0" sz="1200">
+                <a:solidFill>
+                  <a:srgbClr val="C8D4E8"/>
+                </a:solidFill>
+                <a:latin typeface="Calibri"/>
+              </a:rPr>
+              <a:t>, </a:t>
+            </a:r>
+            <a:r>
+              <a:rPr b="1" sz="1200">
+                <a:solidFill>
+                  <a:srgbClr val="22E3FF"/>
+                </a:solidFill>
+                <a:latin typeface="Calibri"/>
+              </a:rPr>
+              <a:t>Janes</a:t>
+            </a:r>
+            <a:r>
+              <a:rPr b="0" sz="1200">
+                <a:solidFill>
+                  <a:srgbClr val="C8D4E8"/>
+                </a:solidFill>
+                <a:latin typeface="Calibri"/>
+              </a:rPr>
+              <a:t> (2025–26) shows </a:t>
+            </a:r>
+            <a:r>
+              <a:rPr b="1" sz="1200">
+                <a:solidFill>
+                  <a:srgbClr val="22E3FF"/>
+                </a:solidFill>
+                <a:latin typeface="Calibri"/>
+              </a:rPr>
+              <a:t>shipping</a:t>
+            </a:r>
+            <a:r>
+              <a:rPr b="0" sz="1200">
+                <a:solidFill>
+                  <a:srgbClr val="C8D4E8"/>
+                </a:solidFill>
+                <a:latin typeface="Calibri"/>
+              </a:rPr>
+              <a:t> and </a:t>
+            </a:r>
+            <a:r>
+              <a:rPr b="1" sz="1200">
+                <a:solidFill>
+                  <a:srgbClr val="22E3FF"/>
+                </a:solidFill>
+                <a:latin typeface="Calibri"/>
+              </a:rPr>
+              <a:t>boards</a:t>
+            </a:r>
+            <a:r>
+              <a:rPr b="0" sz="1200">
+                <a:solidFill>
+                  <a:srgbClr val="C8D4E8"/>
+                </a:solidFill>
+                <a:latin typeface="Calibri"/>
+              </a:rPr>
+              <a:t> treating disruption as </a:t>
+            </a:r>
+            <a:r>
+              <a:rPr b="1" sz="1200">
+                <a:solidFill>
+                  <a:srgbClr val="22E3FF"/>
+                </a:solidFill>
+                <a:latin typeface="Calibri"/>
+              </a:rPr>
+              <a:t>immediate</a:t>
+            </a:r>
+            <a:r>
+              <a:rPr b="0" sz="1200">
+                <a:solidFill>
+                  <a:srgbClr val="C8D4E8"/>
+                </a:solidFill>
+                <a:latin typeface="Calibri"/>
+              </a:rPr>
+              <a:t>, not theoretical.</a:t>
+            </a:r>
+          </a:p>
+          <a:p>
+            <a:pPr lvl="1">
+              <a:lnSpc>
+                <a:spcPct val="110000"/>
+              </a:lnSpc>
               <a:spcAft>
-                <a:spcPts val="800"/>
+                <a:spcPts val="600"/>
               </a:spcAft>
-              <a:defRPr sz="1300">
-                <a:solidFill>
-                  <a:srgbClr val="94A3B8"/>
-                </a:solidFill>
-                <a:latin typeface="Calibri"/>
-              </a:defRPr>
+              <a:buChar char="•"/>
             </a:pPr>
             <a:r>
-              <a:t>WHY NOW? Geopolitical volatility, near-shoring pressure, and insurer / board demand for operational resilience are expanding budgets. LLM costs and APIs finally allow affordable per-article classification at scale. Incumbents are not optimized for real-time, map-first workflows.</a:t>
+              <a:rPr b="1" sz="1200">
+                <a:solidFill>
+                  <a:srgbClr val="22E3FF"/>
+                </a:solidFill>
+                <a:latin typeface="Calibri"/>
+              </a:rPr>
+              <a:t>Customer sensitivity</a:t>
+            </a:r>
+            <a:r>
+              <a:rPr b="0" sz="1200">
+                <a:solidFill>
+                  <a:srgbClr val="C8D4E8"/>
+                </a:solidFill>
+                <a:latin typeface="Calibri"/>
+              </a:rPr>
+              <a:t> — teams need </a:t>
+            </a:r>
+            <a:r>
+              <a:rPr b="1" sz="1200">
+                <a:solidFill>
+                  <a:srgbClr val="22E3FF"/>
+                </a:solidFill>
+                <a:latin typeface="Calibri"/>
+              </a:rPr>
+              <a:t>live</a:t>
+            </a:r>
+            <a:r>
+              <a:rPr b="0" sz="1200">
+                <a:solidFill>
+                  <a:srgbClr val="C8D4E8"/>
+                </a:solidFill>
+                <a:latin typeface="Calibri"/>
+              </a:rPr>
+              <a:t> visibility into </a:t>
+            </a:r>
+            <a:r>
+              <a:rPr b="1" sz="1200">
+                <a:solidFill>
+                  <a:srgbClr val="22E3FF"/>
+                </a:solidFill>
+                <a:latin typeface="Calibri"/>
+              </a:rPr>
+              <a:t>suppliers, lanes, and sites</a:t>
+            </a:r>
+            <a:r>
+              <a:rPr b="0" sz="1200">
+                <a:solidFill>
+                  <a:srgbClr val="C8D4E8"/>
+                </a:solidFill>
+                <a:latin typeface="Calibri"/>
+              </a:rPr>
+              <a:t> when </a:t>
+            </a:r>
+            <a:r>
+              <a:rPr b="1" sz="1200">
+                <a:solidFill>
+                  <a:srgbClr val="22E3FF"/>
+                </a:solidFill>
+                <a:latin typeface="Calibri"/>
+              </a:rPr>
+              <a:t>geopolitical shocks</a:t>
+            </a:r>
+            <a:r>
+              <a:rPr b="0" sz="1200">
+                <a:solidFill>
+                  <a:srgbClr val="C8D4E8"/>
+                </a:solidFill>
+                <a:latin typeface="Calibri"/>
+              </a:rPr>
+              <a:t> hit; </a:t>
+            </a:r>
+            <a:r>
+              <a:rPr b="1" sz="1200">
+                <a:solidFill>
+                  <a:srgbClr val="22E3FF"/>
+                </a:solidFill>
+                <a:latin typeface="Calibri"/>
+              </a:rPr>
+              <a:t>Excel + email</a:t>
+            </a:r>
+            <a:r>
+              <a:rPr b="0" sz="1200">
+                <a:solidFill>
+                  <a:srgbClr val="C8D4E8"/>
+                </a:solidFill>
+                <a:latin typeface="Calibri"/>
+              </a:rPr>
+              <a:t> cannot keep pace. </a:t>
+            </a:r>
+            <a:r>
+              <a:rPr b="1" sz="1200">
+                <a:solidFill>
+                  <a:srgbClr val="22E3FF"/>
+                </a:solidFill>
+                <a:latin typeface="Calibri"/>
+              </a:rPr>
+              <a:t>Riscon</a:t>
+            </a:r>
+            <a:r>
+              <a:rPr b="0" sz="1200">
+                <a:solidFill>
+                  <a:srgbClr val="C8D4E8"/>
+                </a:solidFill>
+                <a:latin typeface="Calibri"/>
+              </a:rPr>
+              <a:t> maps news → </a:t>
+            </a:r>
+            <a:r>
+              <a:rPr b="1" sz="1200">
+                <a:solidFill>
+                  <a:srgbClr val="22E3FF"/>
+                </a:solidFill>
+                <a:latin typeface="Calibri"/>
+              </a:rPr>
+              <a:t>probability</a:t>
+            </a:r>
+            <a:r>
+              <a:rPr b="0" sz="1200">
+                <a:solidFill>
+                  <a:srgbClr val="C8D4E8"/>
+                </a:solidFill>
+                <a:latin typeface="Calibri"/>
+              </a:rPr>
+              <a:t> → </a:t>
+            </a:r>
+            <a:r>
+              <a:rPr b="1" sz="1200">
+                <a:solidFill>
+                  <a:srgbClr val="22E3FF"/>
+                </a:solidFill>
+                <a:latin typeface="Calibri"/>
+              </a:rPr>
+              <a:t>your</a:t>
+            </a:r>
+            <a:r>
+              <a:rPr b="0" sz="1200">
+                <a:solidFill>
+                  <a:srgbClr val="C8D4E8"/>
+                </a:solidFill>
+                <a:latin typeface="Calibri"/>
+              </a:rPr>
+              <a:t> footprint.</a:t>
+            </a:r>
+          </a:p>
+          <a:p>
+            <a:pPr lvl="1">
+              <a:lnSpc>
+                <a:spcPct val="110000"/>
+              </a:lnSpc>
+              <a:spcAft>
+                <a:spcPts val="600"/>
+              </a:spcAft>
+              <a:buChar char="•"/>
+            </a:pPr>
+            <a:r>
+              <a:rPr b="1" sz="1200">
+                <a:solidFill>
+                  <a:srgbClr val="22E3FF"/>
+                </a:solidFill>
+                <a:latin typeface="Calibri"/>
+              </a:rPr>
+              <a:t>Tech window</a:t>
+            </a:r>
+            <a:r>
+              <a:rPr b="0" sz="1200">
+                <a:solidFill>
+                  <a:srgbClr val="C8D4E8"/>
+                </a:solidFill>
+                <a:latin typeface="Calibri"/>
+              </a:rPr>
+              <a:t> — </a:t>
+            </a:r>
+            <a:r>
+              <a:rPr b="1" sz="1200">
+                <a:solidFill>
+                  <a:srgbClr val="22E3FF"/>
+                </a:solidFill>
+                <a:latin typeface="Calibri"/>
+              </a:rPr>
+              <a:t>LLM APIs</a:t>
+            </a:r>
+            <a:r>
+              <a:rPr b="0" sz="1200">
+                <a:solidFill>
+                  <a:srgbClr val="C8D4E8"/>
+                </a:solidFill>
+                <a:latin typeface="Calibri"/>
+              </a:rPr>
+              <a:t> make real-time classification affordable; </a:t>
+            </a:r>
+            <a:r>
+              <a:rPr b="1" sz="1200">
+                <a:solidFill>
+                  <a:srgbClr val="22E3FF"/>
+                </a:solidFill>
+                <a:latin typeface="Calibri"/>
+              </a:rPr>
+              <a:t>resilience</a:t>
+            </a:r>
+            <a:r>
+              <a:rPr b="0" sz="1200">
+                <a:solidFill>
+                  <a:srgbClr val="C8D4E8"/>
+                </a:solidFill>
+                <a:latin typeface="Calibri"/>
+              </a:rPr>
+              <a:t> budgets and </a:t>
+            </a:r>
+            <a:r>
+              <a:rPr b="1" sz="1200">
+                <a:solidFill>
+                  <a:srgbClr val="22E3FF"/>
+                </a:solidFill>
+                <a:latin typeface="Calibri"/>
+              </a:rPr>
+              <a:t>board</a:t>
+            </a:r>
+            <a:r>
+              <a:rPr b="0" sz="1200">
+                <a:solidFill>
+                  <a:srgbClr val="C8D4E8"/>
+                </a:solidFill>
+                <a:latin typeface="Calibri"/>
+              </a:rPr>
+              <a:t> pressure are up; incumbents still aren’t </a:t>
+            </a:r>
+            <a:r>
+              <a:rPr b="1" sz="1200">
+                <a:solidFill>
+                  <a:srgbClr val="22E3FF"/>
+                </a:solidFill>
+                <a:latin typeface="Calibri"/>
+              </a:rPr>
+              <a:t>map-first</a:t>
+            </a:r>
+            <a:r>
+              <a:rPr b="0" sz="1200">
+                <a:solidFill>
+                  <a:srgbClr val="C8D4E8"/>
+                </a:solidFill>
+                <a:latin typeface="Calibri"/>
+              </a:rPr>
+              <a:t> — room for a </a:t>
+            </a:r>
+            <a:r>
+              <a:rPr b="1" sz="1200">
+                <a:solidFill>
+                  <a:srgbClr val="22E3FF"/>
+                </a:solidFill>
+                <a:latin typeface="Calibri"/>
+              </a:rPr>
+              <a:t>focused</a:t>
+            </a:r>
+            <a:r>
+              <a:rPr b="0" sz="1200">
+                <a:solidFill>
+                  <a:srgbClr val="C8D4E8"/>
+                </a:solidFill>
+                <a:latin typeface="Calibri"/>
+              </a:rPr>
+              <a:t> control tower.</a:t>
             </a:r>
           </a:p>
         </p:txBody>
@@ -5062,7 +8745,7 @@
             <a:avLst/>
           </a:prstGeom>
           <a:solidFill>
-            <a:srgbClr val="0A0F1C"/>
+            <a:srgbClr val="060812"/>
           </a:solidFill>
           <a:ln>
             <a:noFill/>
@@ -5097,15 +8780,15 @@
           <p:nvPr/>
         </p:nvSpPr>
         <p:spPr>
-          <a:xfrm>
-            <a:off x="0" y="0"/>
-            <a:ext cx="12191695" cy="109728"/>
+          <a:xfrm rot="660000">
+            <a:off x="6400800" y="-548640"/>
+            <a:ext cx="6583680" cy="8412480"/>
           </a:xfrm>
           <a:prstGeom prst="rect">
             <a:avLst/>
           </a:prstGeom>
           <a:solidFill>
-            <a:srgbClr val="22D3EE"/>
+            <a:srgbClr val="081022"/>
           </a:solidFill>
           <a:ln>
             <a:noFill/>
@@ -5135,14 +8818,186 @@
       </p:sp>
       <p:sp>
         <p:nvSpPr>
-          <p:cNvPr id="4" name="TextBox 3"/>
+          <p:cNvPr id="4" name="Rectangle 3"/>
+          <p:cNvSpPr/>
+          <p:nvPr/>
+        </p:nvSpPr>
+        <p:spPr>
+          <a:xfrm>
+            <a:off x="7635240" y="228600"/>
+            <a:ext cx="54864" cy="6400800"/>
+          </a:xfrm>
+          <a:prstGeom prst="rect">
+            <a:avLst/>
+          </a:prstGeom>
+          <a:solidFill>
+            <a:srgbClr val="FF2D95"/>
+          </a:solidFill>
+          <a:ln>
+            <a:noFill/>
+          </a:ln>
+        </p:spPr>
+        <p:style>
+          <a:lnRef idx="1">
+            <a:schemeClr val="accent1"/>
+          </a:lnRef>
+          <a:fillRef idx="3">
+            <a:schemeClr val="accent1"/>
+          </a:fillRef>
+          <a:effectRef idx="2">
+            <a:schemeClr val="accent1"/>
+          </a:effectRef>
+          <a:fontRef idx="minor">
+            <a:schemeClr val="lt1"/>
+          </a:fontRef>
+        </p:style>
+        <p:txBody>
+          <a:bodyPr rtlCol="0" anchor="ctr"/>
+          <a:lstStyle/>
+          <a:p>
+            <a:pPr algn="ctr"/>
+          </a:p>
+        </p:txBody>
+      </p:sp>
+      <p:sp>
+        <p:nvSpPr>
+          <p:cNvPr id="5" name="Rectangle 4"/>
+          <p:cNvSpPr/>
+          <p:nvPr/>
+        </p:nvSpPr>
+        <p:spPr>
+          <a:xfrm>
+            <a:off x="7790688" y="228600"/>
+            <a:ext cx="54864" cy="6400800"/>
+          </a:xfrm>
+          <a:prstGeom prst="rect">
+            <a:avLst/>
+          </a:prstGeom>
+          <a:solidFill>
+            <a:srgbClr val="22E3FF"/>
+          </a:solidFill>
+          <a:ln>
+            <a:noFill/>
+          </a:ln>
+        </p:spPr>
+        <p:style>
+          <a:lnRef idx="1">
+            <a:schemeClr val="accent1"/>
+          </a:lnRef>
+          <a:fillRef idx="3">
+            <a:schemeClr val="accent1"/>
+          </a:fillRef>
+          <a:effectRef idx="2">
+            <a:schemeClr val="accent1"/>
+          </a:effectRef>
+          <a:fontRef idx="minor">
+            <a:schemeClr val="lt1"/>
+          </a:fontRef>
+        </p:style>
+        <p:txBody>
+          <a:bodyPr rtlCol="0" anchor="ctr"/>
+          <a:lstStyle/>
+          <a:p>
+            <a:pPr algn="ctr"/>
+          </a:p>
+        </p:txBody>
+      </p:sp>
+      <p:sp>
+        <p:nvSpPr>
+          <p:cNvPr id="6" name="Rectangle 5"/>
+          <p:cNvSpPr/>
+          <p:nvPr/>
+        </p:nvSpPr>
+        <p:spPr>
+          <a:xfrm>
+            <a:off x="0" y="0"/>
+            <a:ext cx="12191695" cy="164592"/>
+          </a:xfrm>
+          <a:prstGeom prst="rect">
+            <a:avLst/>
+          </a:prstGeom>
+          <a:solidFill>
+            <a:srgbClr val="FF2D95"/>
+          </a:solidFill>
+          <a:ln>
+            <a:noFill/>
+          </a:ln>
+        </p:spPr>
+        <p:style>
+          <a:lnRef idx="1">
+            <a:schemeClr val="accent1"/>
+          </a:lnRef>
+          <a:fillRef idx="3">
+            <a:schemeClr val="accent1"/>
+          </a:fillRef>
+          <a:effectRef idx="2">
+            <a:schemeClr val="accent1"/>
+          </a:effectRef>
+          <a:fontRef idx="minor">
+            <a:schemeClr val="lt1"/>
+          </a:fontRef>
+        </p:style>
+        <p:txBody>
+          <a:bodyPr rtlCol="0" anchor="ctr"/>
+          <a:lstStyle/>
+          <a:p>
+            <a:pPr algn="ctr"/>
+          </a:p>
+        </p:txBody>
+      </p:sp>
+      <p:sp>
+        <p:nvSpPr>
+          <p:cNvPr id="7" name="Rectangle 6"/>
+          <p:cNvSpPr/>
+          <p:nvPr/>
+        </p:nvSpPr>
+        <p:spPr>
+          <a:xfrm>
+            <a:off x="9631375" y="0"/>
+            <a:ext cx="2560320" cy="164592"/>
+          </a:xfrm>
+          <a:prstGeom prst="rect">
+            <a:avLst/>
+          </a:prstGeom>
+          <a:solidFill>
+            <a:srgbClr val="CCFF00"/>
+          </a:solidFill>
+          <a:ln>
+            <a:noFill/>
+          </a:ln>
+        </p:spPr>
+        <p:style>
+          <a:lnRef idx="1">
+            <a:schemeClr val="accent1"/>
+          </a:lnRef>
+          <a:fillRef idx="3">
+            <a:schemeClr val="accent1"/>
+          </a:fillRef>
+          <a:effectRef idx="2">
+            <a:schemeClr val="accent1"/>
+          </a:effectRef>
+          <a:fontRef idx="minor">
+            <a:schemeClr val="lt1"/>
+          </a:fontRef>
+        </p:style>
+        <p:txBody>
+          <a:bodyPr rtlCol="0" anchor="ctr"/>
+          <a:lstStyle/>
+          <a:p>
+            <a:pPr algn="ctr"/>
+          </a:p>
+        </p:txBody>
+      </p:sp>
+      <p:sp>
+        <p:nvSpPr>
+          <p:cNvPr id="8" name="TextBox 7"/>
           <p:cNvSpPr txBox="1"/>
           <p:nvPr/>
         </p:nvSpPr>
         <p:spPr>
           <a:xfrm>
-            <a:off x="502920" y="2651760"/>
-            <a:ext cx="11185855" cy="1097280"/>
+            <a:off x="502920" y="2148840"/>
+            <a:ext cx="11185855" cy="1234440"/>
           </a:xfrm>
           <a:prstGeom prst="rect">
             <a:avLst/>
@@ -5157,7 +9012,7 @@
           <a:p>
             <a:pPr algn="ctr"/>
             <a:r>
-              <a:rPr sz="4400" b="1">
+              <a:rPr sz="5200" b="1">
                 <a:solidFill>
                   <a:srgbClr val="FFFFFF"/>
                 </a:solidFill>
@@ -5170,14 +9025,14 @@
       </p:sp>
       <p:sp>
         <p:nvSpPr>
-          <p:cNvPr id="5" name="TextBox 4"/>
+          <p:cNvPr id="9" name="TextBox 8"/>
           <p:cNvSpPr txBox="1"/>
           <p:nvPr/>
         </p:nvSpPr>
         <p:spPr>
           <a:xfrm>
-            <a:off x="502920" y="3794760"/>
-            <a:ext cx="11185855" cy="548640"/>
+            <a:off x="502920" y="3520440"/>
+            <a:ext cx="11185855" cy="594360"/>
           </a:xfrm>
           <a:prstGeom prst="rect">
             <a:avLst/>
@@ -5192,27 +9047,27 @@
           <a:p>
             <a:pPr algn="ctr"/>
             <a:r>
-              <a:rPr sz="2000" b="1">
-                <a:solidFill>
-                  <a:srgbClr val="22D3EE"/>
+              <a:rPr sz="2600" b="1">
+                <a:solidFill>
+                  <a:srgbClr val="CCFF00"/>
                 </a:solidFill>
                 <a:latin typeface="Consolas"/>
               </a:rPr>
-              <a:t>Q &amp; A</a:t>
-            </a:r>
-          </a:p>
-        </p:txBody>
-      </p:sp>
-      <p:sp>
-        <p:nvSpPr>
-          <p:cNvPr id="6" name="TextBox 5"/>
+              <a:t>QUESTIONS?</a:t>
+            </a:r>
+          </a:p>
+        </p:txBody>
+      </p:sp>
+      <p:sp>
+        <p:nvSpPr>
+          <p:cNvPr id="10" name="TextBox 9"/>
           <p:cNvSpPr txBox="1"/>
           <p:nvPr/>
         </p:nvSpPr>
         <p:spPr>
           <a:xfrm>
-            <a:off x="502920" y="4572000"/>
-            <a:ext cx="11185855" cy="731520"/>
+            <a:off x="502920" y="4343400"/>
+            <a:ext cx="11185855" cy="777240"/>
           </a:xfrm>
           <a:prstGeom prst="rect">
             <a:avLst/>
@@ -5227,11 +9082,11 @@
           <a:p>
             <a:pPr algn="ctr"/>
             <a:r>
-              <a:rPr sz="1400" b="0">
-                <a:solidFill>
-                  <a:srgbClr val="94A3B8"/>
-                </a:solidFill>
-                <a:latin typeface="Calibri"/>
+              <a:rPr sz="1500" b="1">
+                <a:solidFill>
+                  <a:srgbClr val="22E3FF"/>
+                </a:solidFill>
+                <a:latin typeface="Consolas"/>
               </a:rPr>
               <a:t>github.com/Vector-Devs/CursorHackathon</a:t>
             </a:r>

--- a/pitch-deck/CursorHackathon-Pitch.pptx
+++ b/pitch-deck/CursorHackathon-Pitch.pptx
@@ -3939,6 +3939,30 @@
           </a:p>
         </p:txBody>
       </p:sp>
+      <p:pic>
+        <p:nvPicPr>
+          <p:cNvPr id="23" name="Picture 22" descr="riscon-mark-slide.png"/>
+          <p:cNvPicPr>
+            <a:picLocks noChangeAspect="1"/>
+          </p:cNvPicPr>
+          <p:nvPr/>
+        </p:nvPicPr>
+        <p:blipFill>
+          <a:blip r:embed="rId2"/>
+          <a:stretch>
+            <a:fillRect/>
+          </a:stretch>
+        </p:blipFill>
+        <p:spPr>
+          <a:xfrm>
+            <a:off x="10116007" y="502920"/>
+            <a:ext cx="1572768" cy="1572768"/>
+          </a:xfrm>
+          <a:prstGeom prst="rect">
+            <a:avLst/>
+          </a:prstGeom>
+        </p:spPr>
+      </p:pic>
     </p:spTree>
   </p:cSld>
   <p:clrMapOvr>
@@ -4259,7 +4283,7 @@
         <p:spPr>
           <a:xfrm>
             <a:off x="502920" y="713232"/>
-            <a:ext cx="11185855" cy="914400"/>
+            <a:ext cx="11185855" cy="658368"/>
           </a:xfrm>
           <a:prstGeom prst="rect">
             <a:avLst/>
@@ -4274,7 +4298,7 @@
           <a:p>
             <a:pPr algn="l"/>
             <a:r>
-              <a:rPr sz="3400" b="1">
+              <a:rPr sz="3000" b="1">
                 <a:solidFill>
                   <a:srgbClr val="FFFFFF"/>
                 </a:solidFill>
@@ -4293,8 +4317,8 @@
         </p:nvSpPr>
         <p:spPr>
           <a:xfrm>
-            <a:off x="502920" y="1719072"/>
-            <a:ext cx="109728" cy="4636008"/>
+            <a:off x="502920" y="1426464"/>
+            <a:ext cx="109728" cy="4270248"/>
           </a:xfrm>
           <a:prstGeom prst="rect">
             <a:avLst/>
@@ -4336,8 +4360,8 @@
         </p:nvSpPr>
         <p:spPr>
           <a:xfrm>
-            <a:off x="502920" y="1719072"/>
-            <a:ext cx="11185855" cy="4636008"/>
+            <a:off x="502920" y="1426464"/>
+            <a:ext cx="11185855" cy="4270248"/>
           </a:xfrm>
           <a:prstGeom prst="roundRect">
             <a:avLst/>
@@ -4381,8 +4405,8 @@
         </p:nvSpPr>
         <p:spPr>
           <a:xfrm>
-            <a:off x="886968" y="2066544"/>
-            <a:ext cx="10472623" cy="4087368"/>
+            <a:off x="886968" y="1773936"/>
+            <a:ext cx="10472623" cy="3831336"/>
           </a:xfrm>
           <a:prstGeom prst="rect">
             <a:avLst/>
@@ -5019,6 +5043,148 @@
           </a:p>
         </p:txBody>
       </p:sp>
+      <p:sp>
+        <p:nvSpPr>
+          <p:cNvPr id="13" name="TextBox 12"/>
+          <p:cNvSpPr txBox="1"/>
+          <p:nvPr/>
+        </p:nvSpPr>
+        <p:spPr>
+          <a:xfrm>
+            <a:off x="7253935" y="5705857"/>
+            <a:ext cx="4434840" cy="649223"/>
+          </a:xfrm>
+          <a:prstGeom prst="rect">
+            <a:avLst/>
+          </a:prstGeom>
+          <a:noFill/>
+        </p:spPr>
+        <p:txBody>
+          <a:bodyPr wrap="square" anchor="b">
+            <a:noAutofit/>
+          </a:bodyPr>
+          <a:lstStyle/>
+          <a:p>
+            <a:pPr algn="r">
+              <a:lnSpc>
+                <a:spcPct val="100000"/>
+              </a:lnSpc>
+              <a:spcAft>
+                <a:spcPts val="0"/>
+              </a:spcAft>
+            </a:pPr>
+            <a:r>
+              <a:rPr sz="800">
+                <a:solidFill>
+                  <a:srgbClr val="7A88A3"/>
+                </a:solidFill>
+                <a:latin typeface="Calibri"/>
+              </a:rPr>
+              <a:t>CP&amp;R — Commercial products &amp; raw materials (industrial)</a:t>
+            </a:r>
+          </a:p>
+          <a:p>
+            <a:pPr algn="r">
+              <a:lnSpc>
+                <a:spcPct val="100000"/>
+              </a:lnSpc>
+              <a:spcAft>
+                <a:spcPts val="0"/>
+              </a:spcAft>
+            </a:pPr>
+            <a:r>
+              <a:rPr sz="800">
+                <a:solidFill>
+                  <a:srgbClr val="7A88A3"/>
+                </a:solidFill>
+                <a:latin typeface="Calibri"/>
+              </a:rPr>
+              <a:t>EU — European Union</a:t>
+            </a:r>
+          </a:p>
+          <a:p>
+            <a:pPr algn="r">
+              <a:lnSpc>
+                <a:spcPct val="100000"/>
+              </a:lnSpc>
+              <a:spcAft>
+                <a:spcPts val="0"/>
+              </a:spcAft>
+            </a:pPr>
+            <a:r>
+              <a:rPr sz="800">
+                <a:solidFill>
+                  <a:srgbClr val="7A88A3"/>
+                </a:solidFill>
+                <a:latin typeface="Calibri"/>
+              </a:rPr>
+              <a:t>ICP — Ideal customer profile</a:t>
+            </a:r>
+          </a:p>
+          <a:p>
+            <a:pPr algn="r">
+              <a:lnSpc>
+                <a:spcPct val="100000"/>
+              </a:lnSpc>
+              <a:spcAft>
+                <a:spcPts val="0"/>
+              </a:spcAft>
+            </a:pPr>
+            <a:r>
+              <a:rPr sz="800">
+                <a:solidFill>
+                  <a:srgbClr val="7A88A3"/>
+                </a:solidFill>
+                <a:latin typeface="Calibri"/>
+              </a:rPr>
+              <a:t>TAM — Total addressable market</a:t>
+            </a:r>
+          </a:p>
+          <a:p>
+            <a:pPr algn="r">
+              <a:lnSpc>
+                <a:spcPct val="100000"/>
+              </a:lnSpc>
+              <a:spcAft>
+                <a:spcPts val="0"/>
+              </a:spcAft>
+            </a:pPr>
+            <a:r>
+              <a:rPr sz="800">
+                <a:solidFill>
+                  <a:srgbClr val="7A88A3"/>
+                </a:solidFill>
+                <a:latin typeface="Calibri"/>
+              </a:rPr>
+              <a:t>US — United States</a:t>
+            </a:r>
+          </a:p>
+        </p:txBody>
+      </p:sp>
+      <p:pic>
+        <p:nvPicPr>
+          <p:cNvPr id="14" name="Picture 13" descr="riscon-mark-slide.png"/>
+          <p:cNvPicPr>
+            <a:picLocks noChangeAspect="1"/>
+          </p:cNvPicPr>
+          <p:nvPr/>
+        </p:nvPicPr>
+        <p:blipFill>
+          <a:blip r:embed="rId2"/>
+          <a:stretch>
+            <a:fillRect/>
+          </a:stretch>
+        </p:blipFill>
+        <p:spPr>
+          <a:xfrm>
+            <a:off x="10756087" y="502920"/>
+            <a:ext cx="932688" cy="932688"/>
+          </a:xfrm>
+          <a:prstGeom prst="rect">
+            <a:avLst/>
+          </a:prstGeom>
+        </p:spPr>
+      </p:pic>
     </p:spTree>
   </p:cSld>
   <p:clrMapOvr>
@@ -5374,7 +5540,7 @@
         <p:spPr>
           <a:xfrm>
             <a:off x="502920" y="1719072"/>
-            <a:ext cx="109728" cy="4636008"/>
+            <a:ext cx="109728" cy="3977639"/>
           </a:xfrm>
           <a:prstGeom prst="rect">
             <a:avLst/>
@@ -5417,7 +5583,7 @@
         <p:spPr>
           <a:xfrm>
             <a:off x="502920" y="1719072"/>
-            <a:ext cx="11185855" cy="4636008"/>
+            <a:ext cx="11185855" cy="3977640"/>
           </a:xfrm>
           <a:prstGeom prst="roundRect">
             <a:avLst/>
@@ -5462,7 +5628,7 @@
         <p:spPr>
           <a:xfrm>
             <a:off x="886968" y="2066544"/>
-            <a:ext cx="10472623" cy="4087368"/>
+            <a:ext cx="10472623" cy="3429000"/>
           </a:xfrm>
           <a:prstGeom prst="rect">
             <a:avLst/>
@@ -6003,6 +6169,91 @@
           </a:p>
         </p:txBody>
       </p:sp>
+      <p:sp>
+        <p:nvSpPr>
+          <p:cNvPr id="13" name="TextBox 12"/>
+          <p:cNvSpPr txBox="1"/>
+          <p:nvPr/>
+        </p:nvSpPr>
+        <p:spPr>
+          <a:xfrm>
+            <a:off x="7253935" y="6029554"/>
+            <a:ext cx="4434840" cy="325526"/>
+          </a:xfrm>
+          <a:prstGeom prst="rect">
+            <a:avLst/>
+          </a:prstGeom>
+          <a:noFill/>
+        </p:spPr>
+        <p:txBody>
+          <a:bodyPr wrap="square" anchor="b">
+            <a:noAutofit/>
+          </a:bodyPr>
+          <a:lstStyle/>
+          <a:p>
+            <a:pPr algn="r">
+              <a:lnSpc>
+                <a:spcPct val="100000"/>
+              </a:lnSpc>
+              <a:spcAft>
+                <a:spcPts val="0"/>
+              </a:spcAft>
+            </a:pPr>
+            <a:r>
+              <a:rPr sz="800">
+                <a:solidFill>
+                  <a:srgbClr val="7A88A3"/>
+                </a:solidFill>
+                <a:latin typeface="Calibri"/>
+              </a:rPr>
+              <a:t>AI — Artificial intelligence</a:t>
+            </a:r>
+          </a:p>
+          <a:p>
+            <a:pPr algn="r">
+              <a:lnSpc>
+                <a:spcPct val="100000"/>
+              </a:lnSpc>
+              <a:spcAft>
+                <a:spcPts val="0"/>
+              </a:spcAft>
+            </a:pPr>
+            <a:r>
+              <a:rPr sz="800">
+                <a:solidFill>
+                  <a:srgbClr val="7A88A3"/>
+                </a:solidFill>
+                <a:latin typeface="Calibri"/>
+              </a:rPr>
+              <a:t>UI — User interface</a:t>
+            </a:r>
+          </a:p>
+        </p:txBody>
+      </p:sp>
+      <p:pic>
+        <p:nvPicPr>
+          <p:cNvPr id="14" name="Picture 13" descr="riscon-mark-slide.png"/>
+          <p:cNvPicPr>
+            <a:picLocks noChangeAspect="1"/>
+          </p:cNvPicPr>
+          <p:nvPr/>
+        </p:nvPicPr>
+        <p:blipFill>
+          <a:blip r:embed="rId2"/>
+          <a:stretch>
+            <a:fillRect/>
+          </a:stretch>
+        </p:blipFill>
+        <p:spPr>
+          <a:xfrm>
+            <a:off x="10756087" y="502920"/>
+            <a:ext cx="932688" cy="932688"/>
+          </a:xfrm>
+          <a:prstGeom prst="rect">
+            <a:avLst/>
+          </a:prstGeom>
+        </p:spPr>
+      </p:pic>
     </p:spTree>
   </p:cSld>
   <p:clrMapOvr>
@@ -6358,7 +6609,7 @@
         <p:spPr>
           <a:xfrm>
             <a:off x="502920" y="1719072"/>
-            <a:ext cx="109728" cy="4636008"/>
+            <a:ext cx="109728" cy="3977639"/>
           </a:xfrm>
           <a:prstGeom prst="rect">
             <a:avLst/>
@@ -6401,7 +6652,7 @@
         <p:spPr>
           <a:xfrm>
             <a:off x="502920" y="1719072"/>
-            <a:ext cx="11185855" cy="4636008"/>
+            <a:ext cx="11185855" cy="3977640"/>
           </a:xfrm>
           <a:prstGeom prst="roundRect">
             <a:avLst/>
@@ -6446,7 +6697,7 @@
         <p:spPr>
           <a:xfrm>
             <a:off x="886968" y="2066544"/>
-            <a:ext cx="10472623" cy="4087368"/>
+            <a:ext cx="10472623" cy="3429000"/>
           </a:xfrm>
           <a:prstGeom prst="rect">
             <a:avLst/>
@@ -6912,6 +7163,262 @@
           </a:p>
         </p:txBody>
       </p:sp>
+      <p:sp>
+        <p:nvSpPr>
+          <p:cNvPr id="13" name="TextBox 12"/>
+          <p:cNvSpPr txBox="1"/>
+          <p:nvPr/>
+        </p:nvSpPr>
+        <p:spPr>
+          <a:xfrm>
+            <a:off x="7253935" y="5058463"/>
+            <a:ext cx="4434840" cy="1296617"/>
+          </a:xfrm>
+          <a:prstGeom prst="rect">
+            <a:avLst/>
+          </a:prstGeom>
+          <a:noFill/>
+        </p:spPr>
+        <p:txBody>
+          <a:bodyPr wrap="square" anchor="b">
+            <a:noAutofit/>
+          </a:bodyPr>
+          <a:lstStyle/>
+          <a:p>
+            <a:pPr algn="r">
+              <a:lnSpc>
+                <a:spcPct val="100000"/>
+              </a:lnSpc>
+              <a:spcAft>
+                <a:spcPts val="0"/>
+              </a:spcAft>
+            </a:pPr>
+            <a:r>
+              <a:rPr sz="800">
+                <a:solidFill>
+                  <a:srgbClr val="7A88A3"/>
+                </a:solidFill>
+                <a:latin typeface="Calibri"/>
+              </a:rPr>
+              <a:t>3PL — Third-party logistics</a:t>
+            </a:r>
+          </a:p>
+          <a:p>
+            <a:pPr algn="r">
+              <a:lnSpc>
+                <a:spcPct val="100000"/>
+              </a:lnSpc>
+              <a:spcAft>
+                <a:spcPts val="0"/>
+              </a:spcAft>
+            </a:pPr>
+            <a:r>
+              <a:rPr sz="800">
+                <a:solidFill>
+                  <a:srgbClr val="7A88A3"/>
+                </a:solidFill>
+                <a:latin typeface="Calibri"/>
+              </a:rPr>
+              <a:t>4PL — Fourth-party logistics</a:t>
+            </a:r>
+          </a:p>
+          <a:p>
+            <a:pPr algn="r">
+              <a:lnSpc>
+                <a:spcPct val="100000"/>
+              </a:lnSpc>
+              <a:spcAft>
+                <a:spcPts val="0"/>
+              </a:spcAft>
+            </a:pPr>
+            <a:r>
+              <a:rPr sz="800">
+                <a:solidFill>
+                  <a:srgbClr val="7A88A3"/>
+                </a:solidFill>
+                <a:latin typeface="Calibri"/>
+              </a:rPr>
+              <a:t>ACV — Annual contract value</a:t>
+            </a:r>
+          </a:p>
+          <a:p>
+            <a:pPr algn="r">
+              <a:lnSpc>
+                <a:spcPct val="100000"/>
+              </a:lnSpc>
+              <a:spcAft>
+                <a:spcPts val="0"/>
+              </a:spcAft>
+            </a:pPr>
+            <a:r>
+              <a:rPr sz="800">
+                <a:solidFill>
+                  <a:srgbClr val="7A88A3"/>
+                </a:solidFill>
+                <a:latin typeface="Calibri"/>
+              </a:rPr>
+              <a:t>AI — Artificial intelligence</a:t>
+            </a:r>
+          </a:p>
+          <a:p>
+            <a:pPr algn="r">
+              <a:lnSpc>
+                <a:spcPct val="100000"/>
+              </a:lnSpc>
+              <a:spcAft>
+                <a:spcPts val="0"/>
+              </a:spcAft>
+            </a:pPr>
+            <a:r>
+              <a:rPr sz="800">
+                <a:solidFill>
+                  <a:srgbClr val="7A88A3"/>
+                </a:solidFill>
+                <a:latin typeface="Calibri"/>
+              </a:rPr>
+              <a:t>CAC — Customer acquisition cost</a:t>
+            </a:r>
+          </a:p>
+          <a:p>
+            <a:pPr algn="r">
+              <a:lnSpc>
+                <a:spcPct val="100000"/>
+              </a:lnSpc>
+              <a:spcAft>
+                <a:spcPts val="0"/>
+              </a:spcAft>
+            </a:pPr>
+            <a:r>
+              <a:rPr sz="800">
+                <a:solidFill>
+                  <a:srgbClr val="7A88A3"/>
+                </a:solidFill>
+                <a:latin typeface="Calibri"/>
+              </a:rPr>
+              <a:t>CPO — Chief procurement officer</a:t>
+            </a:r>
+          </a:p>
+          <a:p>
+            <a:pPr algn="r">
+              <a:lnSpc>
+                <a:spcPct val="100000"/>
+              </a:lnSpc>
+              <a:spcAft>
+                <a:spcPts val="0"/>
+              </a:spcAft>
+            </a:pPr>
+            <a:r>
+              <a:rPr sz="800">
+                <a:solidFill>
+                  <a:srgbClr val="7A88A3"/>
+                </a:solidFill>
+                <a:latin typeface="Calibri"/>
+              </a:rPr>
+              <a:t>GTM — Go-to-market</a:t>
+            </a:r>
+          </a:p>
+          <a:p>
+            <a:pPr algn="r">
+              <a:lnSpc>
+                <a:spcPct val="100000"/>
+              </a:lnSpc>
+              <a:spcAft>
+                <a:spcPts val="0"/>
+              </a:spcAft>
+            </a:pPr>
+            <a:r>
+              <a:rPr sz="800">
+                <a:solidFill>
+                  <a:srgbClr val="7A88A3"/>
+                </a:solidFill>
+                <a:latin typeface="Calibri"/>
+              </a:rPr>
+              <a:t>ICP — Ideal customer profile</a:t>
+            </a:r>
+          </a:p>
+          <a:p>
+            <a:pPr algn="r">
+              <a:lnSpc>
+                <a:spcPct val="100000"/>
+              </a:lnSpc>
+              <a:spcAft>
+                <a:spcPts val="0"/>
+              </a:spcAft>
+            </a:pPr>
+            <a:r>
+              <a:rPr sz="800">
+                <a:solidFill>
+                  <a:srgbClr val="7A88A3"/>
+                </a:solidFill>
+                <a:latin typeface="Calibri"/>
+              </a:rPr>
+              <a:t>IHK — Chamber of Commerce and Industry (Germany)</a:t>
+            </a:r>
+          </a:p>
+          <a:p>
+            <a:pPr algn="r">
+              <a:lnSpc>
+                <a:spcPct val="100000"/>
+              </a:lnSpc>
+              <a:spcAft>
+                <a:spcPts val="0"/>
+              </a:spcAft>
+            </a:pPr>
+            <a:r>
+              <a:rPr sz="800">
+                <a:solidFill>
+                  <a:srgbClr val="7A88A3"/>
+                </a:solidFill>
+                <a:latin typeface="Calibri"/>
+              </a:rPr>
+              <a:t>LLM — Large language model</a:t>
+            </a:r>
+          </a:p>
+          <a:p>
+            <a:pPr algn="r">
+              <a:lnSpc>
+                <a:spcPct val="100000"/>
+              </a:lnSpc>
+              <a:spcAft>
+                <a:spcPts val="0"/>
+              </a:spcAft>
+            </a:pPr>
+            <a:r>
+              <a:rPr sz="800">
+                <a:solidFill>
+                  <a:srgbClr val="7A88A3"/>
+                </a:solidFill>
+                <a:latin typeface="Calibri"/>
+              </a:rPr>
+              <a:t>VDMA — German Engineering Federation (Verband)</a:t>
+            </a:r>
+          </a:p>
+        </p:txBody>
+      </p:sp>
+      <p:pic>
+        <p:nvPicPr>
+          <p:cNvPr id="14" name="Picture 13" descr="riscon-mark-slide.png"/>
+          <p:cNvPicPr>
+            <a:picLocks noChangeAspect="1"/>
+          </p:cNvPicPr>
+          <p:nvPr/>
+        </p:nvPicPr>
+        <p:blipFill>
+          <a:blip r:embed="rId2"/>
+          <a:stretch>
+            <a:fillRect/>
+          </a:stretch>
+        </p:blipFill>
+        <p:spPr>
+          <a:xfrm>
+            <a:off x="10756087" y="502920"/>
+            <a:ext cx="932688" cy="932688"/>
+          </a:xfrm>
+          <a:prstGeom prst="rect">
+            <a:avLst/>
+          </a:prstGeom>
+        </p:spPr>
+      </p:pic>
     </p:spTree>
   </p:cSld>
   <p:clrMapOvr>
@@ -7680,6 +8187,30 @@
           </a:p>
         </p:txBody>
       </p:sp>
+      <p:pic>
+        <p:nvPicPr>
+          <p:cNvPr id="13" name="Picture 12" descr="riscon-mark-slide.png"/>
+          <p:cNvPicPr>
+            <a:picLocks noChangeAspect="1"/>
+          </p:cNvPicPr>
+          <p:nvPr/>
+        </p:nvPicPr>
+        <p:blipFill>
+          <a:blip r:embed="rId2"/>
+          <a:stretch>
+            <a:fillRect/>
+          </a:stretch>
+        </p:blipFill>
+        <p:spPr>
+          <a:xfrm>
+            <a:off x="10756087" y="502920"/>
+            <a:ext cx="932688" cy="932688"/>
+          </a:xfrm>
+          <a:prstGeom prst="rect">
+            <a:avLst/>
+          </a:prstGeom>
+        </p:spPr>
+      </p:pic>
     </p:spTree>
   </p:cSld>
   <p:clrMapOvr>
@@ -8035,7 +8566,7 @@
         <p:spPr>
           <a:xfrm>
             <a:off x="502920" y="1719072"/>
-            <a:ext cx="109728" cy="4636008"/>
+            <a:ext cx="109728" cy="3977639"/>
           </a:xfrm>
           <a:prstGeom prst="rect">
             <a:avLst/>
@@ -8078,7 +8609,7 @@
         <p:spPr>
           <a:xfrm>
             <a:off x="502920" y="1719072"/>
-            <a:ext cx="11185855" cy="4636008"/>
+            <a:ext cx="11185855" cy="3977640"/>
           </a:xfrm>
           <a:prstGeom prst="roundRect">
             <a:avLst/>
@@ -8123,7 +8654,7 @@
         <p:spPr>
           <a:xfrm>
             <a:off x="886968" y="2066544"/>
-            <a:ext cx="10472623" cy="4087368"/>
+            <a:ext cx="10472623" cy="3429000"/>
           </a:xfrm>
           <a:prstGeom prst="rect">
             <a:avLst/>
@@ -8712,6 +9243,91 @@
           </a:p>
         </p:txBody>
       </p:sp>
+      <p:sp>
+        <p:nvSpPr>
+          <p:cNvPr id="13" name="TextBox 12"/>
+          <p:cNvSpPr txBox="1"/>
+          <p:nvPr/>
+        </p:nvSpPr>
+        <p:spPr>
+          <a:xfrm>
+            <a:off x="7253935" y="6029554"/>
+            <a:ext cx="4434840" cy="325526"/>
+          </a:xfrm>
+          <a:prstGeom prst="rect">
+            <a:avLst/>
+          </a:prstGeom>
+          <a:noFill/>
+        </p:spPr>
+        <p:txBody>
+          <a:bodyPr wrap="square" anchor="b">
+            <a:noAutofit/>
+          </a:bodyPr>
+          <a:lstStyle/>
+          <a:p>
+            <a:pPr algn="r">
+              <a:lnSpc>
+                <a:spcPct val="100000"/>
+              </a:lnSpc>
+              <a:spcAft>
+                <a:spcPts val="0"/>
+              </a:spcAft>
+            </a:pPr>
+            <a:r>
+              <a:rPr sz="800">
+                <a:solidFill>
+                  <a:srgbClr val="7A88A3"/>
+                </a:solidFill>
+                <a:latin typeface="Calibri"/>
+              </a:rPr>
+              <a:t>API — Application programming interface</a:t>
+            </a:r>
+          </a:p>
+          <a:p>
+            <a:pPr algn="r">
+              <a:lnSpc>
+                <a:spcPct val="100000"/>
+              </a:lnSpc>
+              <a:spcAft>
+                <a:spcPts val="0"/>
+              </a:spcAft>
+            </a:pPr>
+            <a:r>
+              <a:rPr sz="800">
+                <a:solidFill>
+                  <a:srgbClr val="7A88A3"/>
+                </a:solidFill>
+                <a:latin typeface="Calibri"/>
+              </a:rPr>
+              <a:t>LLM — Large language model</a:t>
+            </a:r>
+          </a:p>
+        </p:txBody>
+      </p:sp>
+      <p:pic>
+        <p:nvPicPr>
+          <p:cNvPr id="14" name="Picture 13" descr="riscon-mark-slide.png"/>
+          <p:cNvPicPr>
+            <a:picLocks noChangeAspect="1"/>
+          </p:cNvPicPr>
+          <p:nvPr/>
+        </p:nvPicPr>
+        <p:blipFill>
+          <a:blip r:embed="rId2"/>
+          <a:stretch>
+            <a:fillRect/>
+          </a:stretch>
+        </p:blipFill>
+        <p:spPr>
+          <a:xfrm>
+            <a:off x="10756087" y="502920"/>
+            <a:ext cx="932688" cy="932688"/>
+          </a:xfrm>
+          <a:prstGeom prst="rect">
+            <a:avLst/>
+          </a:prstGeom>
+        </p:spPr>
+      </p:pic>
     </p:spTree>
   </p:cSld>
   <p:clrMapOvr>
@@ -9093,6 +9709,30 @@
           </a:p>
         </p:txBody>
       </p:sp>
+      <p:pic>
+        <p:nvPicPr>
+          <p:cNvPr id="11" name="Picture 10" descr="riscon-mark-slide.png"/>
+          <p:cNvPicPr>
+            <a:picLocks noChangeAspect="1"/>
+          </p:cNvPicPr>
+          <p:nvPr/>
+        </p:nvPicPr>
+        <p:blipFill>
+          <a:blip r:embed="rId2"/>
+          <a:stretch>
+            <a:fillRect/>
+          </a:stretch>
+        </p:blipFill>
+        <p:spPr>
+          <a:xfrm>
+            <a:off x="10756087" y="502920"/>
+            <a:ext cx="932688" cy="932688"/>
+          </a:xfrm>
+          <a:prstGeom prst="rect">
+            <a:avLst/>
+          </a:prstGeom>
+        </p:spPr>
+      </p:pic>
     </p:spTree>
   </p:cSld>
   <p:clrMapOvr>
